--- a/docs/presentacion/Kent Foods – Fase 1.pptx
+++ b/docs/presentacion/Kent Foods – Fase 1.pptx
@@ -5,7 +5,7 @@
     <p:sldMasterId id="2147483648" r:id="rId1"/>
   </p:sldMasterIdLst>
   <p:notesMasterIdLst>
-    <p:notesMasterId r:id="rId13"/>
+    <p:notesMasterId r:id="rId14"/>
   </p:notesMasterIdLst>
   <p:sldIdLst>
     <p:sldId id="256" r:id="rId2"/>
@@ -19,6 +19,7 @@
     <p:sldId id="264" r:id="rId10"/>
     <p:sldId id="265" r:id="rId11"/>
     <p:sldId id="266" r:id="rId12"/>
+    <p:sldId id="267" r:id="rId13"/>
   </p:sldIdLst>
   <p:sldSz cx="12192000" cy="6858000"/>
   <p:notesSz cx="6858000" cy="12192000"/>
@@ -380,7 +381,15 @@
           <a:p>
             <a:r>
               <a:rPr lang="en-US" dirty="0"/>
-              <a:t>También: 91 clientes, 77 productos, 9 empleados, 3 transportistas, 21 órdenes con FechaEnvioKey −1. Ventas por año: 2016 208.083,95 · 2017 617.085,05 · 2018 440.623,76.</a:t>
+              <a:t>También: 91 clientes, 77 </a:t>
+            </a:r>
+            <a:r>
+              <a:rPr lang="en-US" dirty="0" err="1"/>
+              <a:t>productos</a:t>
+            </a:r>
+            <a:r>
+              <a:rPr lang="en-US" dirty="0"/>
+              <a:t>, 9 empleados, 3 transportistas, 21 órdenes con FechaEnvioKey −1. Ventas por año: 2016 208.083,95 · 2017 617.085,05 · 2018 440.623,76.</a:t>
             </a:r>
           </a:p>
         </p:txBody>
@@ -508,6 +517,93 @@
 </p:notes>
 </file>
 
+<file path=ppt/notesSlides/notesSlide12.xml><?xml version="1.0" encoding="utf-8"?>
+<p:notes xmlns:a="http://schemas.openxmlformats.org/drawingml/2006/main" xmlns:r="http://schemas.openxmlformats.org/officeDocument/2006/relationships" xmlns:p="http://schemas.openxmlformats.org/presentationml/2006/main">
+  <p:cSld>
+    <p:spTree>
+      <p:nvGrpSpPr>
+        <p:cNvPr id="1" name=""/>
+        <p:cNvGrpSpPr/>
+        <p:nvPr/>
+      </p:nvGrpSpPr>
+      <p:grpSpPr>
+        <a:xfrm>
+          <a:off x="0" y="0"/>
+          <a:ext cx="0" cy="0"/>
+          <a:chOff x="0" y="0"/>
+          <a:chExt cx="0" cy="0"/>
+        </a:xfrm>
+      </p:grpSpPr>
+      <p:sp>
+        <p:nvSpPr>
+          <p:cNvPr id="2" name="Slide Image Placeholder 1"/>
+          <p:cNvSpPr>
+            <a:spLocks noGrp="1" noRot="1" noChangeAspect="1"/>
+          </p:cNvSpPr>
+          <p:nvPr>
+            <p:ph type="sldImg"/>
+          </p:nvPr>
+        </p:nvSpPr>
+        <p:spPr/>
+      </p:sp>
+      <p:sp>
+        <p:nvSpPr>
+          <p:cNvPr id="3" name="Notes Placeholder 2"/>
+          <p:cNvSpPr>
+            <a:spLocks noGrp="1"/>
+          </p:cNvSpPr>
+          <p:nvPr>
+            <p:ph type="body" idx="1"/>
+          </p:nvPr>
+        </p:nvSpPr>
+        <p:spPr/>
+        <p:txBody>
+          <a:bodyPr/>
+          <a:lstStyle/>
+          <a:p>
+            <a:r>
+              <a:rPr lang="en-US" dirty="0"/>
+              <a:t>Espacio para la parte del integrante 2.</a:t>
+            </a:r>
+          </a:p>
+        </p:txBody>
+      </p:sp>
+      <p:sp>
+        <p:nvSpPr>
+          <p:cNvPr id="4" name="Slide Number Placeholder 3"/>
+          <p:cNvSpPr>
+            <a:spLocks noGrp="1"/>
+          </p:cNvSpPr>
+          <p:nvPr>
+            <p:ph type="sldNum" sz="quarter" idx="10"/>
+          </p:nvPr>
+        </p:nvSpPr>
+        <p:spPr/>
+        <p:txBody>
+          <a:bodyPr/>
+          <a:lstStyle/>
+          <a:p>
+            <a:fld id="{F7021451-1387-4CA6-816F-3879F97B5CBC}" type="slidenum">
+              <a:rPr lang="en-US"/>
+              <a:t>12</a:t>
+            </a:fld>
+            <a:endParaRPr lang="en-US"/>
+          </a:p>
+        </p:txBody>
+      </p:sp>
+    </p:spTree>
+    <p:extLst>
+      <p:ext uri="{BB962C8B-B14F-4D97-AF65-F5344CB8AC3E}">
+        <p14:creationId xmlns:p14="http://schemas.microsoft.com/office/powerpoint/2010/main" val="2373013882"/>
+      </p:ext>
+    </p:extLst>
+  </p:cSld>
+  <p:clrMapOvr>
+    <a:masterClrMapping/>
+  </p:clrMapOvr>
+</p:notes>
+</file>
+
 <file path=ppt/notesSlides/notesSlide2.xml><?xml version="1.0" encoding="utf-8"?>
 <p:notes xmlns:a="http://schemas.openxmlformats.org/drawingml/2006/main" xmlns:r="http://schemas.openxmlformats.org/officeDocument/2006/relationships" xmlns:p="http://schemas.openxmlformats.org/presentationml/2006/main">
   <p:cSld>
@@ -728,7 +824,15 @@
           <a:p>
             <a:r>
               <a:rPr lang="en-US" dirty="0"/>
-              <a:t>Los cuatro primeros (tarjetas claras) miden el resultado comercial; los dos oscuros miden el envío, núcleo del negocio. Valores calculados sobre los datos actuales. No hay KPI de margen porque no existen costos.</a:t>
+              <a:t>Los cuatro primeros (tarjetas claras) miden el </a:t>
+            </a:r>
+            <a:r>
+              <a:rPr lang="en-US" dirty="0" err="1"/>
+              <a:t>resultado</a:t>
+            </a:r>
+            <a:r>
+              <a:rPr lang="en-US" dirty="0"/>
+              <a:t> comercial; los dos oscuros miden el envío, núcleo del negocio. Valores calculados sobre los datos actuales. No hay KPI de margen porque no existen costos.</a:t>
             </a:r>
           </a:p>
         </p:txBody>
@@ -815,7 +919,15 @@
           <a:p>
             <a:r>
               <a:rPr lang="en-US" dirty="0"/>
-              <a:t>Si el grano fuera la orden, perderíamos el análisis por producto y categoría.</a:t>
+              <a:t>Si el grano fuera la orden, perderíamos el análisis por </a:t>
+            </a:r>
+            <a:r>
+              <a:rPr lang="en-US" dirty="0" err="1"/>
+              <a:t>producto</a:t>
+            </a:r>
+            <a:r>
+              <a:rPr lang="en-US" dirty="0"/>
+              <a:t> y categoría.</a:t>
             </a:r>
           </a:p>
         </p:txBody>
@@ -1076,7 +1188,15 @@
           <a:p>
             <a:r>
               <a:rPr lang="en-US" dirty="0"/>
-              <a:t>Pregunta probable en la interrogación: ¿por qué no incluyeron territorios? Porque necesitaríamos una tabla puente y las ventas se contarían una vez por cada territorio del empleado.</a:t>
+              <a:t>Pregunta probable en la interrogación: ¿por qué no incluyeron territorios? Porque necesitaríamos una tabla puente y las ventas se contarían una vez por cada territorio del </a:t>
+            </a:r>
+            <a:r>
+              <a:rPr lang="en-US" dirty="0" err="1"/>
+              <a:t>empleado</a:t>
+            </a:r>
+            <a:r>
+              <a:rPr lang="en-US" dirty="0"/>
+              <a:t>.</a:t>
             </a:r>
           </a:p>
         </p:txBody>
@@ -2617,7 +2737,7 @@
                 <a:ea typeface="Georgia" pitchFamily="18" charset="-122"/>
                 <a:cs typeface="Georgia" pitchFamily="18" charset="-120"/>
               </a:rPr>
-              <a:t>Carga con SSIS</a:t>
+              <a:t>Arquitectura y dimensiones</a:t>
             </a:r>
             <a:endParaRPr lang="en-US" sz="3200" dirty="0"/>
           </a:p>
@@ -2631,8 +2751,8 @@
         </p:nvSpPr>
         <p:spPr>
           <a:xfrm>
-            <a:off x="812800" y="1899921"/>
-            <a:ext cx="10883392" cy="614680"/>
+            <a:off x="812800" y="1899920"/>
+            <a:ext cx="10883392" cy="3830315"/>
           </a:xfrm>
           <a:prstGeom prst="rect">
             <a:avLst/>
@@ -2653,16 +2773,216 @@
               <a:buNone/>
             </a:pPr>
             <a:r>
+              <a:rPr lang="en-US" b="1" dirty="0">
+                <a:latin typeface="+mj-lt"/>
+              </a:rPr>
+              <a:t>Flujo de control (Orquestación en SSIS)</a:t>
+            </a:r>
+          </a:p>
+          <a:p>
+            <a:pPr marL="285750" indent="-285750" algn="l">
+              <a:lnSpc>
+                <a:spcPts val="2320"/>
+              </a:lnSpc>
+              <a:buFont typeface="Arial" panose="020B0604020202020204" pitchFamily="34" charset="0"/>
+              <a:buChar char="•"/>
+            </a:pPr>
+            <a:r>
+              <a:rPr lang="en-US" sz="1600" b="1" dirty="0">
+                <a:latin typeface="+mj-lt"/>
+              </a:rPr>
+              <a:t>Limpieza: </a:t>
+            </a:r>
+            <a:r>
               <a:rPr lang="en-US" sz="1600" dirty="0">
-                <a:solidFill>
-                  <a:srgbClr val="3E4A57"/>
-                </a:solidFill>
-                <a:latin typeface="Arial" pitchFamily="34" charset="0"/>
-                <a:ea typeface="Arial" pitchFamily="34" charset="-122"/>
-                <a:cs typeface="Arial" pitchFamily="34" charset="-120"/>
-              </a:rPr>
-              <a:t>[Sección a completar: flujo de control, carga de dimensiones, Lookups y columnas derivadas de FactVentas, manejo de FechaEnvio nula y resultado de la validación.]</a:t>
-            </a:r>
+                <a:latin typeface="+mj-lt"/>
+              </a:rPr>
+              <a:t>Tarea SQL inicial con DELETE (En lugar de TRUNCATE) para respetar las Foreign Keys.</a:t>
+            </a:r>
+          </a:p>
+          <a:p>
+            <a:pPr marL="285750" indent="-285750" algn="l">
+              <a:lnSpc>
+                <a:spcPts val="2320"/>
+              </a:lnSpc>
+              <a:buFont typeface="Arial" panose="020B0604020202020204" pitchFamily="34" charset="0"/>
+              <a:buChar char="•"/>
+            </a:pPr>
+            <a:r>
+              <a:rPr lang="en-US" sz="1600" b="1" dirty="0">
+                <a:latin typeface="+mj-lt"/>
+              </a:rPr>
+              <a:t>Carga Paralela: </a:t>
+            </a:r>
+            <a:r>
+              <a:rPr lang="en-US" sz="1600" dirty="0">
+                <a:latin typeface="+mj-lt"/>
+              </a:rPr>
+              <a:t>4 tareas de flujos de datos para Cliente, Transportista, Empleado y Producto.</a:t>
+            </a:r>
+          </a:p>
+          <a:p>
+            <a:pPr marL="285750" indent="-285750" algn="l">
+              <a:lnSpc>
+                <a:spcPts val="2320"/>
+              </a:lnSpc>
+              <a:buFont typeface="Arial" panose="020B0604020202020204" pitchFamily="34" charset="0"/>
+              <a:buChar char="•"/>
+            </a:pPr>
+            <a:r>
+              <a:rPr lang="en-US" sz="1600" b="1" dirty="0">
+                <a:latin typeface="+mj-lt"/>
+              </a:rPr>
+              <a:t>Secuencia: </a:t>
+            </a:r>
+            <a:r>
+              <a:rPr lang="en-US" sz="1600" dirty="0">
+                <a:latin typeface="+mj-lt"/>
+              </a:rPr>
+              <a:t>La tabla de hechos y la validacion se ejecutan solo después de que las dimensiones están pobladas.</a:t>
+            </a:r>
+          </a:p>
+          <a:p>
+            <a:pPr marL="285750" indent="-285750" algn="l">
+              <a:lnSpc>
+                <a:spcPts val="2320"/>
+              </a:lnSpc>
+              <a:buFont typeface="Arial" panose="020B0604020202020204" pitchFamily="34" charset="0"/>
+              <a:buChar char="•"/>
+            </a:pPr>
+            <a:endParaRPr lang="en-US" sz="1600" dirty="0">
+              <a:latin typeface="+mj-lt"/>
+            </a:endParaRPr>
+          </a:p>
+          <a:p>
+            <a:pPr algn="l">
+              <a:lnSpc>
+                <a:spcPts val="2320"/>
+              </a:lnSpc>
+            </a:pPr>
+            <a:r>
+              <a:rPr lang="en-US" b="1" dirty="0">
+                <a:latin typeface="+mj-lt"/>
+              </a:rPr>
+              <a:t>Transformaciones clave en Dimensiones</a:t>
+            </a:r>
+          </a:p>
+          <a:p>
+            <a:pPr marL="285750" indent="-285750" algn="l">
+              <a:lnSpc>
+                <a:spcPts val="2320"/>
+              </a:lnSpc>
+              <a:buFont typeface="Arial" panose="020B0604020202020204" pitchFamily="34" charset="0"/>
+              <a:buChar char="•"/>
+            </a:pPr>
+            <a:r>
+              <a:rPr lang="en-US" sz="1600" b="1" dirty="0">
+                <a:latin typeface="+mj-lt"/>
+              </a:rPr>
+              <a:t>DimProducto</a:t>
+            </a:r>
+            <a:r>
+              <a:rPr lang="en-US" sz="1600" dirty="0">
+                <a:latin typeface="+mj-lt"/>
+              </a:rPr>
+              <a:t> (Desnormalización): Se usó un commando SQL en el origen con INNER JOIN entre </a:t>
+            </a:r>
+            <a:r>
+              <a:rPr lang="en-US" sz="1600" b="1" dirty="0">
+                <a:latin typeface="+mj-lt"/>
+              </a:rPr>
+              <a:t>Productos</a:t>
+            </a:r>
+            <a:r>
+              <a:rPr lang="en-US" sz="1600" dirty="0">
+                <a:latin typeface="+mj-lt"/>
+              </a:rPr>
+              <a:t>, </a:t>
+            </a:r>
+            <a:r>
+              <a:rPr lang="en-US" sz="1600" b="1" dirty="0">
+                <a:latin typeface="+mj-lt"/>
+              </a:rPr>
+              <a:t>Categorias</a:t>
+            </a:r>
+            <a:r>
+              <a:rPr lang="en-US" sz="1600" dirty="0">
+                <a:latin typeface="+mj-lt"/>
+              </a:rPr>
+              <a:t> y </a:t>
+            </a:r>
+            <a:r>
+              <a:rPr lang="en-US" sz="1600" b="1" dirty="0">
+                <a:latin typeface="+mj-lt"/>
+              </a:rPr>
+              <a:t>Proveedores</a:t>
+            </a:r>
+            <a:r>
+              <a:rPr lang="en-US" sz="1600" dirty="0">
+                <a:latin typeface="+mj-lt"/>
+              </a:rPr>
+              <a:t> para mantener el esquema Estrella.</a:t>
+            </a:r>
+          </a:p>
+          <a:p>
+            <a:pPr marL="285750" indent="-285750" algn="l">
+              <a:lnSpc>
+                <a:spcPts val="2320"/>
+              </a:lnSpc>
+              <a:buFont typeface="Arial" panose="020B0604020202020204" pitchFamily="34" charset="0"/>
+              <a:buChar char="•"/>
+            </a:pPr>
+            <a:r>
+              <a:rPr lang="en-US" sz="1600" b="1" dirty="0">
+                <a:latin typeface="+mj-lt"/>
+              </a:rPr>
+              <a:t>DimEmpleado:</a:t>
+            </a:r>
+            <a:r>
+              <a:rPr lang="en-US" sz="1600" dirty="0">
+                <a:latin typeface="+mj-lt"/>
+              </a:rPr>
+              <a:t> se usó el componente de columna derivada para concatenar </a:t>
+            </a:r>
+            <a:r>
+              <a:rPr lang="en-US" sz="1600" b="1" dirty="0">
+                <a:latin typeface="+mj-lt"/>
+              </a:rPr>
+              <a:t>Nombre</a:t>
+            </a:r>
+            <a:r>
+              <a:rPr lang="en-US" sz="1600" dirty="0">
+                <a:latin typeface="+mj-lt"/>
+              </a:rPr>
+              <a:t> + </a:t>
+            </a:r>
+            <a:r>
+              <a:rPr lang="en-US" sz="1600" b="1" dirty="0">
+                <a:latin typeface="+mj-lt"/>
+              </a:rPr>
+              <a:t>Apellido</a:t>
+            </a:r>
+            <a:r>
+              <a:rPr lang="en-US" sz="1600" dirty="0">
+                <a:latin typeface="+mj-lt"/>
+              </a:rPr>
+              <a:t> y generar </a:t>
+            </a:r>
+            <a:r>
+              <a:rPr lang="en-US" sz="1600" b="1" dirty="0">
+                <a:latin typeface="+mj-lt"/>
+              </a:rPr>
+              <a:t>NombreCompleto</a:t>
+            </a:r>
+          </a:p>
+          <a:p>
+            <a:pPr marL="285750" indent="-285750" algn="l">
+              <a:lnSpc>
+                <a:spcPts val="2320"/>
+              </a:lnSpc>
+              <a:buFont typeface="Arial" panose="020B0604020202020204" pitchFamily="34" charset="0"/>
+              <a:buChar char="•"/>
+            </a:pPr>
             <a:endParaRPr lang="en-US" sz="1600" dirty="0"/>
           </a:p>
         </p:txBody>
@@ -2712,6 +3032,384 @@
         </p:txBody>
       </p:sp>
     </p:spTree>
+  </p:cSld>
+  <p:clrMapOvr>
+    <a:masterClrMapping/>
+  </p:clrMapOvr>
+</p:sld>
+</file>
+
+<file path=ppt/slides/slide12.xml><?xml version="1.0" encoding="utf-8"?>
+<p:sld xmlns:a="http://schemas.openxmlformats.org/drawingml/2006/main" xmlns:r="http://schemas.openxmlformats.org/officeDocument/2006/relationships" xmlns:p="http://schemas.openxmlformats.org/presentationml/2006/main">
+  <p:cSld>
+    <p:bg>
+      <p:bgPr>
+        <a:solidFill>
+          <a:srgbClr val="F7F6F2"/>
+        </a:solidFill>
+        <a:effectLst/>
+      </p:bgPr>
+    </p:bg>
+    <p:spTree>
+      <p:nvGrpSpPr>
+        <p:cNvPr id="1" name=""/>
+        <p:cNvGrpSpPr/>
+        <p:nvPr/>
+      </p:nvGrpSpPr>
+      <p:grpSpPr>
+        <a:xfrm>
+          <a:off x="0" y="0"/>
+          <a:ext cx="0" cy="0"/>
+          <a:chOff x="0" y="0"/>
+          <a:chExt cx="0" cy="0"/>
+        </a:xfrm>
+      </p:grpSpPr>
+      <p:sp>
+        <p:nvSpPr>
+          <p:cNvPr id="2" name="Text 0"/>
+          <p:cNvSpPr/>
+          <p:nvPr/>
+        </p:nvSpPr>
+        <p:spPr>
+          <a:xfrm>
+            <a:off x="812800" y="812800"/>
+            <a:ext cx="10883392" cy="238760"/>
+          </a:xfrm>
+          <a:prstGeom prst="rect">
+            <a:avLst/>
+          </a:prstGeom>
+          <a:noFill/>
+          <a:ln/>
+        </p:spPr>
+        <p:txBody>
+          <a:bodyPr wrap="square" lIns="0" tIns="0" rIns="0" bIns="0" rtlCol="0" anchor="t">
+            <a:normAutofit/>
+          </a:bodyPr>
+          <a:lstStyle/>
+          <a:p>
+            <a:pPr marL="0" indent="0" algn="l">
+              <a:lnSpc>
+                <a:spcPts val="1680"/>
+              </a:lnSpc>
+              <a:buNone/>
+            </a:pPr>
+            <a:r>
+              <a:rPr lang="en-US" sz="1200" kern="0" spc="150" dirty="0">
+                <a:solidFill>
+                  <a:srgbClr val="A0521A"/>
+                </a:solidFill>
+                <a:latin typeface="Arial" pitchFamily="34" charset="0"/>
+                <a:ea typeface="Arial" pitchFamily="34" charset="-122"/>
+                <a:cs typeface="Arial" pitchFamily="34" charset="-120"/>
+              </a:rPr>
+              <a:t>PROCESO ETL</a:t>
+            </a:r>
+          </a:p>
+        </p:txBody>
+      </p:sp>
+      <p:sp>
+        <p:nvSpPr>
+          <p:cNvPr id="3" name="Text 1"/>
+          <p:cNvSpPr>
+            <a:spLocks noGrp="1"/>
+          </p:cNvSpPr>
+          <p:nvPr>
+            <p:ph type="title"/>
+          </p:nvPr>
+        </p:nvSpPr>
+        <p:spPr>
+          <a:xfrm>
+            <a:off x="812800" y="1127764"/>
+            <a:ext cx="10883392" cy="492760"/>
+          </a:xfrm>
+          <a:prstGeom prst="rect">
+            <a:avLst/>
+          </a:prstGeom>
+          <a:noFill/>
+          <a:ln/>
+        </p:spPr>
+        <p:txBody>
+          <a:bodyPr wrap="square" lIns="0" tIns="0" rIns="0" bIns="0" rtlCol="0" anchor="t">
+            <a:normAutofit/>
+          </a:bodyPr>
+          <a:lstStyle/>
+          <a:p>
+            <a:pPr marL="0" indent="0" algn="l">
+              <a:lnSpc>
+                <a:spcPts val="3680"/>
+              </a:lnSpc>
+              <a:buNone/>
+            </a:pPr>
+            <a:r>
+              <a:rPr lang="en-US" sz="2800" b="1" dirty="0"/>
+              <a:t>Tabla De Hechos y Validaciones</a:t>
+            </a:r>
+          </a:p>
+        </p:txBody>
+      </p:sp>
+      <p:sp>
+        <p:nvSpPr>
+          <p:cNvPr id="4" name="Text 2"/>
+          <p:cNvSpPr/>
+          <p:nvPr/>
+        </p:nvSpPr>
+        <p:spPr>
+          <a:xfrm>
+            <a:off x="590858" y="2014225"/>
+            <a:ext cx="10883392" cy="3830315"/>
+          </a:xfrm>
+          <a:prstGeom prst="rect">
+            <a:avLst/>
+          </a:prstGeom>
+          <a:noFill/>
+          <a:ln/>
+        </p:spPr>
+        <p:txBody>
+          <a:bodyPr wrap="square" lIns="0" tIns="0" rIns="0" bIns="0" rtlCol="0" anchor="t">
+            <a:normAutofit/>
+          </a:bodyPr>
+          <a:lstStyle/>
+          <a:p>
+            <a:pPr algn="l">
+              <a:lnSpc>
+                <a:spcPts val="2320"/>
+              </a:lnSpc>
+            </a:pPr>
+            <a:r>
+              <a:rPr lang="en-US" b="1" dirty="0"/>
+              <a:t>Carga de FactVentas</a:t>
+            </a:r>
+          </a:p>
+          <a:p>
+            <a:pPr marL="285750" indent="-285750" algn="l">
+              <a:lnSpc>
+                <a:spcPts val="2320"/>
+              </a:lnSpc>
+              <a:buFont typeface="Arial" panose="020B0604020202020204" pitchFamily="34" charset="0"/>
+              <a:buChar char="•"/>
+            </a:pPr>
+            <a:r>
+              <a:rPr lang="en-US" sz="1600" b="1" dirty="0"/>
+              <a:t>Cálculos: </a:t>
+            </a:r>
+            <a:r>
+              <a:rPr lang="en-US" sz="1600" dirty="0"/>
+              <a:t>3 columnas derivadas generan </a:t>
+            </a:r>
+            <a:r>
+              <a:rPr lang="en-US" sz="1600" b="1" dirty="0"/>
+              <a:t>MontoBruto</a:t>
+            </a:r>
+            <a:r>
+              <a:rPr lang="en-US" sz="1600" dirty="0"/>
+              <a:t>, </a:t>
+            </a:r>
+            <a:r>
+              <a:rPr lang="en-US" sz="1600" b="1" dirty="0"/>
+              <a:t>MontoDescuento</a:t>
+            </a:r>
+            <a:r>
+              <a:rPr lang="en-US" sz="1600" dirty="0"/>
+              <a:t>, </a:t>
+            </a:r>
+            <a:r>
+              <a:rPr lang="en-US" sz="1600" b="1" dirty="0"/>
+              <a:t>MontoNeto</a:t>
+            </a:r>
+            <a:r>
+              <a:rPr lang="en-US" sz="1600" dirty="0"/>
+              <a:t> y </a:t>
+            </a:r>
+            <a:r>
+              <a:rPr lang="en-US" sz="1600" b="1" dirty="0"/>
+              <a:t>DiasDespacho </a:t>
+            </a:r>
+            <a:r>
+              <a:rPr lang="en-US" sz="1600" dirty="0"/>
+              <a:t>(asignando 0 si la fecha de envío es nula).</a:t>
+            </a:r>
+          </a:p>
+          <a:p>
+            <a:pPr marL="285750" indent="-285750" algn="l">
+              <a:lnSpc>
+                <a:spcPts val="2320"/>
+              </a:lnSpc>
+              <a:buFont typeface="Arial" panose="020B0604020202020204" pitchFamily="34" charset="0"/>
+              <a:buChar char="•"/>
+            </a:pPr>
+            <a:r>
+              <a:rPr lang="en-US" sz="1600" b="1" dirty="0"/>
+              <a:t>Lookups en Cascada: </a:t>
+            </a:r>
+            <a:r>
+              <a:rPr lang="en-US" sz="1600" dirty="0"/>
+              <a:t>6 componentes de Búsqueda </a:t>
+            </a:r>
+          </a:p>
+          <a:p>
+            <a:pPr marL="285750" indent="-285750" algn="l">
+              <a:lnSpc>
+                <a:spcPts val="2320"/>
+              </a:lnSpc>
+              <a:buFont typeface="Arial" panose="020B0604020202020204" pitchFamily="34" charset="0"/>
+              <a:buChar char="•"/>
+            </a:pPr>
+            <a:r>
+              <a:rPr lang="en-US" sz="1600" b="1" dirty="0"/>
+              <a:t>Manejo de fechas nulas: </a:t>
+            </a:r>
+            <a:r>
+              <a:rPr lang="en-US" sz="1600" dirty="0"/>
+              <a:t>Conversion a formato entero </a:t>
+            </a:r>
+            <a:r>
+              <a:rPr lang="en-US" sz="1600" b="1" dirty="0"/>
+              <a:t>AAAAMMDD</a:t>
+            </a:r>
+            <a:r>
+              <a:rPr lang="en-US" sz="1600" dirty="0"/>
+              <a:t>. Las 21 órdenes sin envío se mapean a la clave </a:t>
+            </a:r>
+            <a:r>
+              <a:rPr lang="en-US" sz="1600" b="1" dirty="0"/>
+              <a:t>-1 (“Sin Fecha”) </a:t>
+            </a:r>
+            <a:r>
+              <a:rPr lang="en-US" sz="1600" dirty="0"/>
+              <a:t>de </a:t>
+            </a:r>
+            <a:r>
+              <a:rPr lang="en-US" sz="1600" b="1" dirty="0"/>
+              <a:t>DimTiempo.</a:t>
+            </a:r>
+          </a:p>
+          <a:p>
+            <a:pPr marL="285750" indent="-285750" algn="l">
+              <a:lnSpc>
+                <a:spcPts val="2320"/>
+              </a:lnSpc>
+              <a:buFont typeface="Arial" panose="020B0604020202020204" pitchFamily="34" charset="0"/>
+              <a:buChar char="•"/>
+            </a:pPr>
+            <a:endParaRPr lang="en-US" sz="1600" dirty="0"/>
+          </a:p>
+          <a:p>
+            <a:pPr algn="l">
+              <a:lnSpc>
+                <a:spcPts val="2320"/>
+              </a:lnSpc>
+            </a:pPr>
+            <a:r>
+              <a:rPr lang="en-US" sz="1600" b="1" dirty="0"/>
+              <a:t>Validación automática</a:t>
+            </a:r>
+          </a:p>
+          <a:p>
+            <a:pPr marL="285750" indent="-285750" algn="l">
+              <a:lnSpc>
+                <a:spcPts val="2320"/>
+              </a:lnSpc>
+              <a:buFont typeface="Arial" panose="020B0604020202020204" pitchFamily="34" charset="0"/>
+              <a:buChar char="•"/>
+            </a:pPr>
+            <a:r>
+              <a:rPr lang="en-US" sz="1600" b="1" dirty="0"/>
+              <a:t>Tarea final que ejecuta 02_validacion_carga-sql comparando Origen vs DW.</a:t>
+            </a:r>
+          </a:p>
+          <a:p>
+            <a:pPr marL="285750" indent="-285750" algn="l">
+              <a:lnSpc>
+                <a:spcPts val="2320"/>
+              </a:lnSpc>
+              <a:buFont typeface="Arial" panose="020B0604020202020204" pitchFamily="34" charset="0"/>
+              <a:buChar char="•"/>
+            </a:pPr>
+            <a:r>
+              <a:rPr lang="en-US" sz="1600" b="1" dirty="0"/>
+              <a:t>Resultado: 2.155</a:t>
+            </a:r>
+            <a:r>
+              <a:rPr lang="en-US" sz="1600" dirty="0"/>
+              <a:t> filas cargadas, </a:t>
+            </a:r>
+            <a:r>
+              <a:rPr lang="en-US" sz="1600" b="1" dirty="0"/>
+              <a:t>$1,265,792.76</a:t>
+            </a:r>
+            <a:r>
+              <a:rPr lang="en-US" sz="1600" dirty="0"/>
+              <a:t> en ventas netas, </a:t>
+            </a:r>
+            <a:r>
+              <a:rPr lang="en-US" sz="1600" b="1" dirty="0"/>
+              <a:t>0 filas huerfanas</a:t>
+            </a:r>
+            <a:r>
+              <a:rPr lang="en-US" sz="1600" dirty="0"/>
+              <a:t>. Todos los controles en “</a:t>
+            </a:r>
+            <a:r>
+              <a:rPr lang="en-US" sz="1600" b="1" dirty="0"/>
+              <a:t>OK</a:t>
+            </a:r>
+            <a:r>
+              <a:rPr lang="en-US" sz="1600" dirty="0"/>
+              <a:t>”</a:t>
+            </a:r>
+          </a:p>
+        </p:txBody>
+      </p:sp>
+      <p:sp>
+        <p:nvSpPr>
+          <p:cNvPr id="5" name="Text 3"/>
+          <p:cNvSpPr/>
+          <p:nvPr/>
+        </p:nvSpPr>
+        <p:spPr>
+          <a:xfrm>
+            <a:off x="812800" y="6238242"/>
+            <a:ext cx="10883392" cy="238760"/>
+          </a:xfrm>
+          <a:prstGeom prst="rect">
+            <a:avLst/>
+          </a:prstGeom>
+          <a:noFill/>
+          <a:ln/>
+        </p:spPr>
+        <p:txBody>
+          <a:bodyPr wrap="square" lIns="0" tIns="0" rIns="0" bIns="0" rtlCol="0" anchor="t">
+            <a:normAutofit/>
+          </a:bodyPr>
+          <a:lstStyle/>
+          <a:p>
+            <a:pPr marL="0" indent="0" algn="l">
+              <a:lnSpc>
+                <a:spcPts val="1680"/>
+              </a:lnSpc>
+              <a:buNone/>
+            </a:pPr>
+            <a:r>
+              <a:rPr lang="en-US" sz="1200" dirty="0">
+                <a:solidFill>
+                  <a:srgbClr val="7A8591"/>
+                </a:solidFill>
+                <a:latin typeface="Arial" pitchFamily="34" charset="0"/>
+                <a:ea typeface="Arial" pitchFamily="34" charset="-122"/>
+                <a:cs typeface="Arial" pitchFamily="34" charset="-120"/>
+              </a:rPr>
+              <a:t>11</a:t>
+            </a:r>
+            <a:endParaRPr lang="en-US" sz="1200" dirty="0"/>
+          </a:p>
+        </p:txBody>
+      </p:sp>
+    </p:spTree>
+    <p:extLst>
+      <p:ext uri="{BB962C8B-B14F-4D97-AF65-F5344CB8AC3E}">
+        <p14:creationId xmlns:p14="http://schemas.microsoft.com/office/powerpoint/2010/main" val="566188247"/>
+      </p:ext>
+    </p:extLst>
   </p:cSld>
   <p:clrMapOvr>
     <a:masterClrMapping/>
@@ -2918,7 +3616,29 @@
                 <a:ea typeface="Arial" pitchFamily="34" charset="-122"/>
                 <a:cs typeface="Arial" pitchFamily="34" charset="-120"/>
               </a:rPr>
-              <a:t>Kent Foods vende alimentos por envío y creció rápido. Su base transaccional registra órdenes, productos, clientes, empleados y transportistas.</a:t>
+              <a:t>Kent Foods vende alimentos por envío y creció rápido. Su base transaccional registra órdenes, </a:t>
+            </a:r>
+            <a:r>
+              <a:rPr lang="en-US" sz="1600" dirty="0" err="1">
+                <a:solidFill>
+                  <a:srgbClr val="3E4A57"/>
+                </a:solidFill>
+                <a:latin typeface="Arial" pitchFamily="34" charset="0"/>
+                <a:ea typeface="Arial" pitchFamily="34" charset="-122"/>
+                <a:cs typeface="Arial" pitchFamily="34" charset="-120"/>
+              </a:rPr>
+              <a:t>productos</a:t>
+            </a:r>
+            <a:r>
+              <a:rPr lang="en-US" sz="1600" dirty="0">
+                <a:solidFill>
+                  <a:srgbClr val="3E4A57"/>
+                </a:solidFill>
+                <a:latin typeface="Arial" pitchFamily="34" charset="0"/>
+                <a:ea typeface="Arial" pitchFamily="34" charset="-122"/>
+                <a:cs typeface="Arial" pitchFamily="34" charset="-120"/>
+              </a:rPr>
+              <a:t>, clientes, empleados y transportistas.</a:t>
             </a:r>
             <a:endParaRPr lang="en-US" sz="1600" dirty="0"/>
           </a:p>
@@ -4278,7 +4998,29 @@
                           <a:ea typeface="Arial" pitchFamily="34" charset="-122"/>
                           <a:cs typeface="Arial" pitchFamily="34" charset="-120"/>
                         </a:rPr>
-                        <a:t>Igual al país del cliente en el 100 %</a:t>
+                        <a:t>Igual al país del </a:t>
+                      </a:r>
+                      <a:r>
+                        <a:rPr lang="en-US" sz="1300" dirty="0" err="1">
+                          <a:solidFill>
+                            <a:srgbClr val="3E4A57"/>
+                          </a:solidFill>
+                          <a:latin typeface="Arial" pitchFamily="34" charset="0"/>
+                          <a:ea typeface="Arial" pitchFamily="34" charset="-122"/>
+                          <a:cs typeface="Arial" pitchFamily="34" charset="-120"/>
+                        </a:rPr>
+                        <a:t>cliente</a:t>
+                      </a:r>
+                      <a:r>
+                        <a:rPr lang="en-US" sz="1300" dirty="0">
+                          <a:solidFill>
+                            <a:srgbClr val="3E4A57"/>
+                          </a:solidFill>
+                          <a:latin typeface="Arial" pitchFamily="34" charset="0"/>
+                          <a:ea typeface="Arial" pitchFamily="34" charset="-122"/>
+                          <a:cs typeface="Arial" pitchFamily="34" charset="-120"/>
+                        </a:rPr>
+                        <a:t> en el 100 %</a:t>
                       </a:r>
                       <a:endParaRPr lang="en-US" sz="1300" dirty="0">
                         <a:latin typeface="Arial" charset="0"/>
@@ -4700,7 +5442,29 @@
                           <a:ea typeface="Arial" pitchFamily="34" charset="-122"/>
                           <a:cs typeface="Arial" pitchFamily="34" charset="-120"/>
                         </a:rPr>
-                        <a:t>No hay costo de producto ni flete</a:t>
+                        <a:t>No hay costo de </a:t>
+                      </a:r>
+                      <a:r>
+                        <a:rPr lang="en-US" sz="1300" dirty="0" err="1">
+                          <a:solidFill>
+                            <a:srgbClr val="3E4A57"/>
+                          </a:solidFill>
+                          <a:latin typeface="Arial" pitchFamily="34" charset="0"/>
+                          <a:ea typeface="Arial" pitchFamily="34" charset="-122"/>
+                          <a:cs typeface="Arial" pitchFamily="34" charset="-120"/>
+                        </a:rPr>
+                        <a:t>producto</a:t>
+                      </a:r>
+                      <a:r>
+                        <a:rPr lang="en-US" sz="1300" dirty="0">
+                          <a:solidFill>
+                            <a:srgbClr val="3E4A57"/>
+                          </a:solidFill>
+                          <a:latin typeface="Arial" pitchFamily="34" charset="0"/>
+                          <a:ea typeface="Arial" pitchFamily="34" charset="-122"/>
+                          <a:cs typeface="Arial" pitchFamily="34" charset="-120"/>
+                        </a:rPr>
+                        <a:t> ni flete</a:t>
                       </a:r>
                       <a:endParaRPr lang="en-US" sz="1300" dirty="0">
                         <a:latin typeface="Arial" charset="0"/>
@@ -5561,7 +6325,18 @@
                 <a:ea typeface="Arial" pitchFamily="34" charset="-122"/>
                 <a:cs typeface="Arial" pitchFamily="34" charset="-120"/>
               </a:rPr>
-              <a:t>Ventas por empleado</a:t>
+              <a:t>Ventas por </a:t>
+            </a:r>
+            <a:r>
+              <a:rPr lang="en-US" sz="1400" b="1" dirty="0" err="1">
+                <a:solidFill>
+                  <a:srgbClr val="1B2A3A"/>
+                </a:solidFill>
+                <a:latin typeface="Arial" pitchFamily="34" charset="0"/>
+                <a:ea typeface="Arial" pitchFamily="34" charset="-122"/>
+                <a:cs typeface="Arial" pitchFamily="34" charset="-120"/>
+              </a:rPr>
+              <a:t>empleado</a:t>
             </a:r>
             <a:endParaRPr lang="en-US" sz="1400" dirty="0"/>
           </a:p>
@@ -6348,7 +7123,29 @@
                 <a:ea typeface="Arial" pitchFamily="34" charset="-122"/>
                 <a:cs typeface="Arial" pitchFamily="34" charset="-120"/>
               </a:rPr>
-              <a:t>Una fila por producto en una orden</a:t>
+              <a:t>Una fila por </a:t>
+            </a:r>
+            <a:r>
+              <a:rPr lang="en-US" sz="2200" b="1" dirty="0" err="1">
+                <a:solidFill>
+                  <a:srgbClr val="1B2A3A"/>
+                </a:solidFill>
+                <a:latin typeface="Arial" pitchFamily="34" charset="0"/>
+                <a:ea typeface="Arial" pitchFamily="34" charset="-122"/>
+                <a:cs typeface="Arial" pitchFamily="34" charset="-120"/>
+              </a:rPr>
+              <a:t>producto</a:t>
+            </a:r>
+            <a:r>
+              <a:rPr lang="en-US" sz="2200" b="1" dirty="0">
+                <a:solidFill>
+                  <a:srgbClr val="1B2A3A"/>
+                </a:solidFill>
+                <a:latin typeface="Arial" pitchFamily="34" charset="0"/>
+                <a:ea typeface="Arial" pitchFamily="34" charset="-122"/>
+                <a:cs typeface="Arial" pitchFamily="34" charset="-120"/>
+              </a:rPr>
+              <a:t> en una orden</a:t>
             </a:r>
             <a:endParaRPr lang="en-US" sz="2200" dirty="0"/>
           </a:p>
@@ -6392,7 +7189,29 @@
                 <a:ea typeface="Arial" pitchFamily="34" charset="-122"/>
                 <a:cs typeface="Arial" pitchFamily="34" charset="-120"/>
               </a:rPr>
-              <a:t>Equivale a una línea de DetalleOrden. Es el nivel más fino: desde ahí se agrega a orden, cliente o mes, pero no al revés. Coincide 1 a 1 con el origen: 2.155 filas esperadas.</a:t>
+              <a:t>Equivale a una línea de DetalleOrden. Es el nivel más fino: desde ahí se agrega a orden, </a:t>
+            </a:r>
+            <a:r>
+              <a:rPr lang="en-US" sz="1500" dirty="0" err="1">
+                <a:solidFill>
+                  <a:srgbClr val="3E4A57"/>
+                </a:solidFill>
+                <a:latin typeface="Arial" pitchFamily="34" charset="0"/>
+                <a:ea typeface="Arial" pitchFamily="34" charset="-122"/>
+                <a:cs typeface="Arial" pitchFamily="34" charset="-120"/>
+              </a:rPr>
+              <a:t>cliente</a:t>
+            </a:r>
+            <a:r>
+              <a:rPr lang="en-US" sz="1500" dirty="0">
+                <a:solidFill>
+                  <a:srgbClr val="3E4A57"/>
+                </a:solidFill>
+                <a:latin typeface="Arial" pitchFamily="34" charset="0"/>
+                <a:ea typeface="Arial" pitchFamily="34" charset="-122"/>
+                <a:cs typeface="Arial" pitchFamily="34" charset="-120"/>
+              </a:rPr>
+              <a:t> o mes, pero no al revés. Coincide 1 a 1 con el origen: 2.155 filas esperadas.</a:t>
             </a:r>
             <a:endParaRPr lang="en-US" sz="1500" dirty="0"/>
           </a:p>
@@ -9084,7 +9903,18 @@
                 <a:ea typeface="Arial" pitchFamily="34" charset="-122"/>
                 <a:cs typeface="Arial" pitchFamily="34" charset="-120"/>
               </a:rPr>
-              <a:t>Destino de envío: redundante con el país del cliente</a:t>
+              <a:t>Destino de envío: redundante con el país del </a:t>
+            </a:r>
+            <a:r>
+              <a:rPr lang="en-US" sz="1500" dirty="0" err="1">
+                <a:solidFill>
+                  <a:srgbClr val="3E4A57"/>
+                </a:solidFill>
+                <a:latin typeface="Arial" pitchFamily="34" charset="0"/>
+                <a:ea typeface="Arial" pitchFamily="34" charset="-122"/>
+                <a:cs typeface="Arial" pitchFamily="34" charset="-120"/>
+              </a:rPr>
+              <a:t>cliente</a:t>
             </a:r>
             <a:endParaRPr lang="en-US" sz="1500" dirty="0"/>
           </a:p>

--- a/docs/presentacion/Kent Foods – Fase 1.pptx
+++ b/docs/presentacion/Kent Foods – Fase 1.pptx
@@ -9,14 +9,14 @@
   </p:notesMasterIdLst>
   <p:sldIdLst>
     <p:sldId id="256" r:id="rId2"/>
-    <p:sldId id="257" r:id="rId3"/>
+    <p:sldId id="270" r:id="rId3"/>
     <p:sldId id="258" r:id="rId4"/>
     <p:sldId id="259" r:id="rId5"/>
     <p:sldId id="260" r:id="rId6"/>
     <p:sldId id="261" r:id="rId7"/>
     <p:sldId id="262" r:id="rId8"/>
-    <p:sldId id="263" r:id="rId9"/>
-    <p:sldId id="264" r:id="rId10"/>
+    <p:sldId id="269" r:id="rId9"/>
+    <p:sldId id="268" r:id="rId10"/>
     <p:sldId id="265" r:id="rId11"/>
     <p:sldId id="266" r:id="rId12"/>
     <p:sldId id="267" r:id="rId13"/>
@@ -380,16 +380,7 @@
           <a:lstStyle/>
           <a:p>
             <a:r>
-              <a:rPr lang="en-US" dirty="0"/>
-              <a:t>También: 91 clientes, 77 </a:t>
-            </a:r>
-            <a:r>
-              <a:rPr lang="en-US" dirty="0" err="1"/>
-              <a:t>productos</a:t>
-            </a:r>
-            <a:r>
-              <a:rPr lang="en-US" dirty="0"/>
-              <a:t>, 9 empleados, 3 transportistas, 21 órdenes con FechaEnvioKey −1. Ventas por año: 2016 208.083,95 · 2017 617.085,05 · 2018 440.623,76.</a:t>
+              <a:t>El script 02_validacion_carga.sql cuenta filas, órdenes y suma montos en el origen y en el DW, y marca OK cuando coinciden. También revisa que no haya hechos sin dimensión y muestra las ventas por año. Otros controles: 91 clientes, 77 productos, 9 empleados y 3 transportistas.</a:t>
             </a:r>
           </a:p>
         </p:txBody>
@@ -475,8 +466,7 @@
           <a:lstStyle/>
           <a:p>
             <a:r>
-              <a:rPr lang="en-US" dirty="0"/>
-              <a:t>Espacio para la parte del integrante 2.</a:t>
+              <a:t>El paquete Main.dtsx primero vacía el DW, luego carga las 4 dimensiones en paralelo y después la tabla de hechos. DimProducto se desnormaliza con una consulta SQL y DimEmpleado arma NombreCompleto con una columna derivada.</a:t>
             </a:r>
           </a:p>
         </p:txBody>
@@ -562,8 +552,7 @@
           <a:lstStyle/>
           <a:p>
             <a:r>
-              <a:rPr lang="en-US" dirty="0"/>
-              <a:t>Espacio para la parte del integrante 2.</a:t>
+              <a:t>La tabla de hechos se carga desde DetalleOrden unida con Ordenes. Columnas derivadas calculan montos y días; seis Lookups convierten los ID en claves sustitutas; las fechas se convierten a AAAAMMDD y las órdenes sin envío van a la clave -1. Al final, la tarea SQL_Validacion_Carga compara origen y DW.</a:t>
             </a:r>
           </a:p>
         </p:txBody>
@@ -823,16 +812,7 @@
           <a:lstStyle/>
           <a:p>
             <a:r>
-              <a:rPr lang="en-US" dirty="0"/>
-              <a:t>Los cuatro primeros (tarjetas claras) miden el </a:t>
-            </a:r>
-            <a:r>
-              <a:rPr lang="en-US" dirty="0" err="1"/>
-              <a:t>resultado</a:t>
-            </a:r>
-            <a:r>
-              <a:rPr lang="en-US" dirty="0"/>
-              <a:t> comercial; los dos oscuros miden el envío, núcleo del negocio. Valores calculados sobre los datos actuales. No hay KPI de margen porque no existen costos.</a:t>
+              <a:t>Cuatro KPI miden el resultado comercial y dos la operación de envío, que es el centro del negocio. El ticket usa COUNT DISTINCT porque el hecho tiene una fila por producto, no por orden. El tiempo de despacho se promedia por orden y solo sobre órdenes enviadas. No hay KPI de margen porque no existen costos en la base.</a:t>
             </a:r>
           </a:p>
         </p:txBody>
@@ -918,16 +898,7 @@
           <a:lstStyle/>
           <a:p>
             <a:r>
-              <a:rPr lang="en-US" dirty="0"/>
-              <a:t>Si el grano fuera la orden, perderíamos el análisis por </a:t>
-            </a:r>
-            <a:r>
-              <a:rPr lang="en-US" dirty="0" err="1"/>
-              <a:t>producto</a:t>
-            </a:r>
-            <a:r>
-              <a:rPr lang="en-US" dirty="0"/>
-              <a:t> y categoría.</a:t>
+              <a:t>Paso 1: Ventas es el proceso que genera ingresos y el único con datos medibles. Paso 2: el grano es la línea de orden. Si fuera la orden completa, se perdería el análisis por producto y categoría. La clave primaria del hecho es exactamente ese grano, así SQL Server rechaza duplicados.</a:t>
             </a:r>
           </a:p>
         </p:txBody>
@@ -1013,8 +984,7 @@
           <a:lstStyle/>
           <a:p>
             <a:r>
-              <a:rPr lang="en-US" dirty="0"/>
-              <a:t>DimTiempo es role-playing: se usa para fecha de orden y fecha de envío. Los montos se calculan en el ETL porque no existen en el origen.</a:t>
+              <a:t>Arriba en el bloque están las 7 claves del hecho: una por dimensión, dos hacia DimTiempo, y OrdenID como dimensión degenerada para contar órdenes. Abajo las medidas: las tres primeras vienen del origen y los montos y días se calculan en el ETL.</a:t>
             </a:r>
           </a:p>
         </p:txBody>
@@ -1303,11 +1273,71 @@
           <a:bodyPr/>
           <a:lstStyle/>
           <a:p>
+            <a:pPr marL="0" marR="0" lvl="0" indent="0" algn="l" defTabSz="914400" rtl="0" eaLnBrk="1" fontAlgn="auto" latinLnBrk="0" hangingPunct="1">
+              <a:lnSpc>
+                <a:spcPct val="100000"/>
+              </a:lnSpc>
+              <a:spcBef>
+                <a:spcPts val="0"/>
+              </a:spcBef>
+              <a:spcAft>
+                <a:spcPts val="0"/>
+              </a:spcAft>
+              <a:buClrTx/>
+              <a:buSzTx/>
+              <a:buFontTx/>
+              <a:buNone/>
+              <a:tabLst/>
+              <a:defRPr/>
+            </a:pPr>
             <a:fld id="{F7021451-1387-4CA6-816F-3879F97B5CBC}" type="slidenum">
-              <a:rPr lang="en-US"/>
+              <a:rPr kumimoji="0" lang="en-US" sz="1800" b="0" i="0" u="none" strike="noStrike" kern="1200" cap="none" spc="0" normalizeH="0" baseline="0" noProof="0">
+                <a:ln>
+                  <a:noFill/>
+                </a:ln>
+                <a:solidFill>
+                  <a:prstClr val="black"/>
+                </a:solidFill>
+                <a:effectLst/>
+                <a:uLnTx/>
+                <a:uFillTx/>
+                <a:latin typeface="Aptos" panose="02110004020202020204"/>
+                <a:ea typeface="+mn-ea"/>
+                <a:cs typeface="+mn-cs"/>
+              </a:rPr>
+              <a:pPr marL="0" marR="0" lvl="0" indent="0" algn="l" defTabSz="914400" rtl="0" eaLnBrk="1" fontAlgn="auto" latinLnBrk="0" hangingPunct="1">
+                <a:lnSpc>
+                  <a:spcPct val="100000"/>
+                </a:lnSpc>
+                <a:spcBef>
+                  <a:spcPts val="0"/>
+                </a:spcBef>
+                <a:spcAft>
+                  <a:spcPts val="0"/>
+                </a:spcAft>
+                <a:buClrTx/>
+                <a:buSzTx/>
+                <a:buFontTx/>
+                <a:buNone/>
+                <a:tabLst/>
+                <a:defRPr/>
+              </a:pPr>
               <a:t>9</a:t>
             </a:fld>
-            <a:endParaRPr lang="en-US"/>
+            <a:endParaRPr kumimoji="0" lang="en-US" sz="1800" b="0" i="0" u="none" strike="noStrike" kern="1200" cap="none" spc="0" normalizeH="0" baseline="0" noProof="0">
+              <a:ln>
+                <a:noFill/>
+              </a:ln>
+              <a:solidFill>
+                <a:prstClr val="black"/>
+              </a:solidFill>
+              <a:effectLst/>
+              <a:uLnTx/>
+              <a:uFillTx/>
+              <a:latin typeface="Aptos" panose="02110004020202020204"/>
+              <a:ea typeface="+mn-ea"/>
+              <a:cs typeface="+mn-cs"/>
+            </a:endParaRPr>
           </a:p>
         </p:txBody>
       </p:sp>
@@ -2261,317 +2291,9 @@
                 <a:ea typeface="Georgia" pitchFamily="18" charset="-122"/>
                 <a:cs typeface="Georgia" pitchFamily="18" charset="-120"/>
               </a:rPr>
-              <a:t>Valores que el ETL debe reproducir</a:t>
+              <a:t>Validación: origen contra DW</a:t>
             </a:r>
             <a:endParaRPr lang="en-US" sz="3200" dirty="0"/>
-          </a:p>
-        </p:txBody>
-      </p:sp>
-      <p:sp>
-        <p:nvSpPr>
-          <p:cNvPr id="4" name="Text 2"/>
-          <p:cNvSpPr/>
-          <p:nvPr/>
-        </p:nvSpPr>
-        <p:spPr>
-          <a:xfrm>
-            <a:off x="812800" y="2001521"/>
-            <a:ext cx="2848715" cy="736600"/>
-          </a:xfrm>
-          <a:prstGeom prst="rect">
-            <a:avLst/>
-          </a:prstGeom>
-          <a:noFill/>
-          <a:ln/>
-        </p:spPr>
-        <p:txBody>
-          <a:bodyPr wrap="square" lIns="0" tIns="0" rIns="0" bIns="0" rtlCol="0" anchor="t">
-            <a:normAutofit/>
-          </a:bodyPr>
-          <a:lstStyle/>
-          <a:p>
-            <a:pPr marL="0" indent="0" algn="l">
-              <a:lnSpc>
-                <a:spcPts val="5600"/>
-              </a:lnSpc>
-              <a:buNone/>
-            </a:pPr>
-            <a:r>
-              <a:rPr lang="en-US" sz="4000" b="1" dirty="0">
-                <a:solidFill>
-                  <a:srgbClr val="E8A35A"/>
-                </a:solidFill>
-                <a:latin typeface="Arial" pitchFamily="34" charset="0"/>
-                <a:ea typeface="Arial" pitchFamily="34" charset="-122"/>
-                <a:cs typeface="Arial" pitchFamily="34" charset="-120"/>
-              </a:rPr>
-              <a:t>2.155</a:t>
-            </a:r>
-            <a:endParaRPr lang="en-US" sz="4000" dirty="0"/>
-          </a:p>
-        </p:txBody>
-      </p:sp>
-      <p:sp>
-        <p:nvSpPr>
-          <p:cNvPr id="5" name="Text 3"/>
-          <p:cNvSpPr/>
-          <p:nvPr/>
-        </p:nvSpPr>
-        <p:spPr>
-          <a:xfrm>
-            <a:off x="812800" y="2763521"/>
-            <a:ext cx="2848715" cy="292100"/>
-          </a:xfrm>
-          <a:prstGeom prst="rect">
-            <a:avLst/>
-          </a:prstGeom>
-          <a:noFill/>
-          <a:ln/>
-        </p:spPr>
-        <p:txBody>
-          <a:bodyPr wrap="square" lIns="0" tIns="0" rIns="0" bIns="0" rtlCol="0" anchor="t">
-            <a:normAutofit/>
-          </a:bodyPr>
-          <a:lstStyle/>
-          <a:p>
-            <a:pPr marL="0" indent="0" algn="l">
-              <a:lnSpc>
-                <a:spcPts val="2100"/>
-              </a:lnSpc>
-              <a:buNone/>
-            </a:pPr>
-            <a:r>
-              <a:rPr lang="en-US" sz="1500" dirty="0">
-                <a:solidFill>
-                  <a:srgbClr val="C9D3DD"/>
-                </a:solidFill>
-                <a:latin typeface="Arial" pitchFamily="34" charset="0"/>
-                <a:ea typeface="Arial" pitchFamily="34" charset="-122"/>
-                <a:cs typeface="Arial" pitchFamily="34" charset="-120"/>
-              </a:rPr>
-              <a:t>filas en FactVentas</a:t>
-            </a:r>
-            <a:endParaRPr lang="en-US" sz="1500" dirty="0"/>
-          </a:p>
-        </p:txBody>
-      </p:sp>
-      <p:sp>
-        <p:nvSpPr>
-          <p:cNvPr id="6" name="Text 4"/>
-          <p:cNvSpPr/>
-          <p:nvPr/>
-        </p:nvSpPr>
-        <p:spPr>
-          <a:xfrm>
-            <a:off x="3883342" y="2001521"/>
-            <a:ext cx="2848797" cy="736600"/>
-          </a:xfrm>
-          <a:prstGeom prst="rect">
-            <a:avLst/>
-          </a:prstGeom>
-          <a:noFill/>
-          <a:ln/>
-        </p:spPr>
-        <p:txBody>
-          <a:bodyPr wrap="square" lIns="0" tIns="0" rIns="0" bIns="0" rtlCol="0" anchor="t">
-            <a:normAutofit/>
-          </a:bodyPr>
-          <a:lstStyle/>
-          <a:p>
-            <a:pPr marL="0" indent="0" algn="l">
-              <a:lnSpc>
-                <a:spcPts val="5600"/>
-              </a:lnSpc>
-              <a:buNone/>
-            </a:pPr>
-            <a:r>
-              <a:rPr lang="en-US" sz="4000" b="1" dirty="0">
-                <a:solidFill>
-                  <a:srgbClr val="E8A35A"/>
-                </a:solidFill>
-                <a:latin typeface="Arial" pitchFamily="34" charset="0"/>
-                <a:ea typeface="Arial" pitchFamily="34" charset="-122"/>
-                <a:cs typeface="Arial" pitchFamily="34" charset="-120"/>
-              </a:rPr>
-              <a:t>830</a:t>
-            </a:r>
-            <a:endParaRPr lang="en-US" sz="4000" dirty="0"/>
-          </a:p>
-        </p:txBody>
-      </p:sp>
-      <p:sp>
-        <p:nvSpPr>
-          <p:cNvPr id="7" name="Text 5"/>
-          <p:cNvSpPr/>
-          <p:nvPr/>
-        </p:nvSpPr>
-        <p:spPr>
-          <a:xfrm>
-            <a:off x="3883342" y="2763521"/>
-            <a:ext cx="2848797" cy="292100"/>
-          </a:xfrm>
-          <a:prstGeom prst="rect">
-            <a:avLst/>
-          </a:prstGeom>
-          <a:noFill/>
-          <a:ln/>
-        </p:spPr>
-        <p:txBody>
-          <a:bodyPr wrap="square" lIns="0" tIns="0" rIns="0" bIns="0" rtlCol="0" anchor="t">
-            <a:normAutofit/>
-          </a:bodyPr>
-          <a:lstStyle/>
-          <a:p>
-            <a:pPr marL="0" indent="0" algn="l">
-              <a:lnSpc>
-                <a:spcPts val="2100"/>
-              </a:lnSpc>
-              <a:buNone/>
-            </a:pPr>
-            <a:r>
-              <a:rPr lang="en-US" sz="1500" dirty="0">
-                <a:solidFill>
-                  <a:srgbClr val="C9D3DD"/>
-                </a:solidFill>
-                <a:latin typeface="Arial" pitchFamily="34" charset="0"/>
-                <a:ea typeface="Arial" pitchFamily="34" charset="-122"/>
-                <a:cs typeface="Arial" pitchFamily="34" charset="-120"/>
-              </a:rPr>
-              <a:t>órdenes distintas</a:t>
-            </a:r>
-            <a:endParaRPr lang="en-US" sz="1500" dirty="0"/>
-          </a:p>
-        </p:txBody>
-      </p:sp>
-      <p:sp>
-        <p:nvSpPr>
-          <p:cNvPr id="8" name="Text 6"/>
-          <p:cNvSpPr/>
-          <p:nvPr/>
-        </p:nvSpPr>
-        <p:spPr>
-          <a:xfrm>
-            <a:off x="6953965" y="2001521"/>
-            <a:ext cx="4557993" cy="736600"/>
-          </a:xfrm>
-          <a:prstGeom prst="rect">
-            <a:avLst/>
-          </a:prstGeom>
-          <a:noFill/>
-          <a:ln/>
-        </p:spPr>
-        <p:txBody>
-          <a:bodyPr wrap="square" lIns="0" tIns="0" rIns="0" bIns="0" rtlCol="0" anchor="t">
-            <a:normAutofit/>
-          </a:bodyPr>
-          <a:lstStyle/>
-          <a:p>
-            <a:pPr marL="0" indent="0" algn="l">
-              <a:lnSpc>
-                <a:spcPts val="5600"/>
-              </a:lnSpc>
-              <a:buNone/>
-            </a:pPr>
-            <a:r>
-              <a:rPr lang="en-US" sz="4000" b="1" dirty="0">
-                <a:solidFill>
-                  <a:srgbClr val="E8A35A"/>
-                </a:solidFill>
-                <a:latin typeface="Arial" pitchFamily="34" charset="0"/>
-                <a:ea typeface="Arial" pitchFamily="34" charset="-122"/>
-                <a:cs typeface="Arial" pitchFamily="34" charset="-120"/>
-              </a:rPr>
-              <a:t>1.265.792,76</a:t>
-            </a:r>
-            <a:endParaRPr lang="en-US" sz="4000" dirty="0"/>
-          </a:p>
-        </p:txBody>
-      </p:sp>
-      <p:sp>
-        <p:nvSpPr>
-          <p:cNvPr id="9" name="Text 7"/>
-          <p:cNvSpPr/>
-          <p:nvPr/>
-        </p:nvSpPr>
-        <p:spPr>
-          <a:xfrm>
-            <a:off x="6953965" y="2763521"/>
-            <a:ext cx="4557993" cy="292100"/>
-          </a:xfrm>
-          <a:prstGeom prst="rect">
-            <a:avLst/>
-          </a:prstGeom>
-          <a:noFill/>
-          <a:ln/>
-        </p:spPr>
-        <p:txBody>
-          <a:bodyPr wrap="square" lIns="0" tIns="0" rIns="0" bIns="0" rtlCol="0" anchor="t">
-            <a:normAutofit/>
-          </a:bodyPr>
-          <a:lstStyle/>
-          <a:p>
-            <a:pPr marL="0" indent="0" algn="l">
-              <a:lnSpc>
-                <a:spcPts val="2100"/>
-              </a:lnSpc>
-              <a:buNone/>
-            </a:pPr>
-            <a:r>
-              <a:rPr lang="en-US" sz="1500" dirty="0">
-                <a:solidFill>
-                  <a:srgbClr val="C9D3DD"/>
-                </a:solidFill>
-                <a:latin typeface="Arial" pitchFamily="34" charset="0"/>
-                <a:ea typeface="Arial" pitchFamily="34" charset="-122"/>
-                <a:cs typeface="Arial" pitchFamily="34" charset="-120"/>
-              </a:rPr>
-              <a:t>monto neto total</a:t>
-            </a:r>
-            <a:endParaRPr lang="en-US" sz="1500" dirty="0"/>
-          </a:p>
-        </p:txBody>
-      </p:sp>
-      <p:sp>
-        <p:nvSpPr>
-          <p:cNvPr id="10" name="Text 8"/>
-          <p:cNvSpPr/>
-          <p:nvPr/>
-        </p:nvSpPr>
-        <p:spPr>
-          <a:xfrm>
-            <a:off x="812800" y="3436621"/>
-            <a:ext cx="10883392" cy="301625"/>
-          </a:xfrm>
-          <a:prstGeom prst="rect">
-            <a:avLst/>
-          </a:prstGeom>
-          <a:noFill/>
-          <a:ln/>
-        </p:spPr>
-        <p:txBody>
-          <a:bodyPr wrap="square" lIns="0" tIns="0" rIns="0" bIns="0" rtlCol="0" anchor="t">
-            <a:normAutofit/>
-          </a:bodyPr>
-          <a:lstStyle/>
-          <a:p>
-            <a:pPr marL="0" indent="0" algn="l">
-              <a:lnSpc>
-                <a:spcPts val="2175"/>
-              </a:lnSpc>
-              <a:buNone/>
-            </a:pPr>
-            <a:r>
-              <a:rPr lang="en-US" sz="1500" dirty="0">
-                <a:solidFill>
-                  <a:srgbClr val="C9D3DD"/>
-                </a:solidFill>
-                <a:latin typeface="Arial" pitchFamily="34" charset="0"/>
-                <a:ea typeface="Arial" pitchFamily="34" charset="-122"/>
-                <a:cs typeface="Arial" pitchFamily="34" charset="-120"/>
-              </a:rPr>
-              <a:t>02_validacion_carga.sql compara origen y DW fila a fila; cada control debe decir OK.</a:t>
-            </a:r>
-            <a:endParaRPr lang="en-US" sz="1500" dirty="0"/>
           </a:p>
         </p:txBody>
       </p:sp>
@@ -2616,6 +2338,774 @@
               <a:t>10</a:t>
             </a:r>
             <a:endParaRPr lang="en-US" sz="1200" dirty="0"/>
+          </a:p>
+        </p:txBody>
+      </p:sp>
+      <p:sp>
+        <p:nvSpPr>
+          <p:cNvPr id="12" name="Rounded Rectangle 11"/>
+          <p:cNvSpPr/>
+          <p:nvPr/>
+        </p:nvSpPr>
+        <p:spPr>
+          <a:xfrm>
+            <a:off x="813816" y="1874519"/>
+            <a:ext cx="5852160" cy="2926080"/>
+          </a:xfrm>
+          <a:prstGeom prst="roundRect">
+            <a:avLst>
+              <a:gd name="adj" fmla="val 4000"/>
+            </a:avLst>
+          </a:prstGeom>
+          <a:solidFill>
+            <a:srgbClr val="263A50"/>
+          </a:solidFill>
+          <a:ln>
+            <a:noFill/>
+          </a:ln>
+          <a:effectLst/>
+        </p:spPr>
+        <p:style>
+          <a:lnRef idx="1">
+            <a:schemeClr val="accent1"/>
+          </a:lnRef>
+          <a:fillRef idx="3">
+            <a:schemeClr val="accent1"/>
+          </a:fillRef>
+          <a:effectRef idx="2">
+            <a:schemeClr val="accent1"/>
+          </a:effectRef>
+          <a:fontRef idx="minor">
+            <a:schemeClr val="lt1"/>
+          </a:fontRef>
+        </p:style>
+        <p:txBody>
+          <a:bodyPr wrap="square" lIns="201168" tIns="146304" rIns="201168" bIns="146304" rtlCol="0" anchor="t"/>
+          <a:lstStyle/>
+          <a:p>
+            <a:pPr algn="l">
+              <a:lnSpc>
+                <a:spcPct val="110000"/>
+              </a:lnSpc>
+            </a:pPr>
+            <a:r>
+              <a:rPr sz="1200">
+                <a:solidFill>
+                  <a:srgbClr val="E6E1D6"/>
+                </a:solidFill>
+                <a:latin typeface="Consolas"/>
+              </a:rPr>
+              <a:t>SELECT Validacion, Origen, DW,</a:t>
+            </a:r>
+          </a:p>
+          <a:p>
+            <a:pPr algn="l">
+              <a:lnSpc>
+                <a:spcPct val="110000"/>
+              </a:lnSpc>
+            </a:pPr>
+            <a:r>
+              <a:rPr sz="1200">
+                <a:solidFill>
+                  <a:srgbClr val="E6E1D6"/>
+                </a:solidFill>
+                <a:latin typeface="Consolas"/>
+              </a:rPr>
+              <a:t>  CASE WHEN Origen = DW</a:t>
+            </a:r>
+          </a:p>
+          <a:p>
+            <a:pPr algn="l">
+              <a:lnSpc>
+                <a:spcPct val="110000"/>
+              </a:lnSpc>
+            </a:pPr>
+            <a:r>
+              <a:rPr sz="1200">
+                <a:solidFill>
+                  <a:srgbClr val="E6E1D6"/>
+                </a:solidFill>
+                <a:latin typeface="Consolas"/>
+              </a:rPr>
+              <a:t>       THEN 'OK' ELSE 'ERROR' END</a:t>
+            </a:r>
+          </a:p>
+          <a:p>
+            <a:pPr algn="l">
+              <a:lnSpc>
+                <a:spcPct val="110000"/>
+              </a:lnSpc>
+            </a:pPr>
+            <a:r>
+              <a:rPr sz="1200">
+                <a:solidFill>
+                  <a:srgbClr val="E6E1D6"/>
+                </a:solidFill>
+                <a:latin typeface="Consolas"/>
+              </a:rPr>
+              <a:t>FROM (</a:t>
+            </a:r>
+          </a:p>
+          <a:p>
+            <a:pPr algn="l">
+              <a:lnSpc>
+                <a:spcPct val="110000"/>
+              </a:lnSpc>
+            </a:pPr>
+            <a:r>
+              <a:rPr sz="1200">
+                <a:solidFill>
+                  <a:srgbClr val="E6E1D6"/>
+                </a:solidFill>
+                <a:latin typeface="Consolas"/>
+              </a:rPr>
+              <a:t>  SELECT 'Filas FactVentas',</a:t>
+            </a:r>
+          </a:p>
+          <a:p>
+            <a:pPr algn="l">
+              <a:lnSpc>
+                <a:spcPct val="110000"/>
+              </a:lnSpc>
+            </a:pPr>
+            <a:r>
+              <a:rPr sz="1200">
+                <a:solidFill>
+                  <a:srgbClr val="E6E1D6"/>
+                </a:solidFill>
+                <a:latin typeface="Consolas"/>
+              </a:rPr>
+              <a:t>    (SELECT COUNT(*) FROM KentFoods.dbo.DetalleOrden),</a:t>
+            </a:r>
+          </a:p>
+          <a:p>
+            <a:pPr algn="l">
+              <a:lnSpc>
+                <a:spcPct val="110000"/>
+              </a:lnSpc>
+            </a:pPr>
+            <a:r>
+              <a:rPr sz="1200">
+                <a:solidFill>
+                  <a:srgbClr val="E6E1D6"/>
+                </a:solidFill>
+                <a:latin typeface="Consolas"/>
+              </a:rPr>
+              <a:t>    (SELECT COUNT(*) FROM FactVentas)</a:t>
+            </a:r>
+          </a:p>
+          <a:p>
+            <a:pPr algn="l">
+              <a:lnSpc>
+                <a:spcPct val="110000"/>
+              </a:lnSpc>
+            </a:pPr>
+            <a:r>
+              <a:rPr sz="1200">
+                <a:solidFill>
+                  <a:srgbClr val="E6E1D6"/>
+                </a:solidFill>
+                <a:latin typeface="Consolas"/>
+              </a:rPr>
+              <a:t>  UNION ALL ...</a:t>
+            </a:r>
+          </a:p>
+          <a:p>
+            <a:pPr algn="l">
+              <a:lnSpc>
+                <a:spcPct val="110000"/>
+              </a:lnSpc>
+            </a:pPr>
+            <a:r>
+              <a:rPr sz="1200">
+                <a:solidFill>
+                  <a:srgbClr val="E6E1D6"/>
+                </a:solidFill>
+                <a:latin typeface="Consolas"/>
+              </a:rPr>
+              <a:t>) AS v (Validacion, Origen, DW);</a:t>
+            </a:r>
+          </a:p>
+        </p:txBody>
+      </p:sp>
+      <p:graphicFrame>
+        <p:nvGraphicFramePr>
+          <p:cNvPr id="13" name="Table 12"/>
+          <p:cNvGraphicFramePr>
+            <a:graphicFrameLocks noGrp="1"/>
+          </p:cNvGraphicFramePr>
+          <p:nvPr/>
+        </p:nvGraphicFramePr>
+        <p:xfrm>
+          <a:off x="6986016" y="1874519"/>
+          <a:ext cx="4389120" cy="1920240"/>
+        </p:xfrm>
+        <a:graphic>
+          <a:graphicData uri="http://schemas.openxmlformats.org/drawingml/2006/table">
+            <a:tbl>
+              <a:tblPr firstRow="1" bandRow="1">
+                <a:tableStyleId>{5C22544A-7EE6-4342-B048-85BDC9FD1C3A}</a:tableStyleId>
+              </a:tblPr>
+              <a:tblGrid>
+                <a:gridCol w="1600200">
+                  <a:extLst>
+                    <a:ext uri="{9D8B030D-6E8A-4147-A177-3AD203B41FA5}">
+                      <a16:colId xmlns:a16="http://schemas.microsoft.com/office/drawing/2014/main" val="20000"/>
+                    </a:ext>
+                  </a:extLst>
+                </a:gridCol>
+                <a:gridCol w="1097280">
+                  <a:extLst>
+                    <a:ext uri="{9D8B030D-6E8A-4147-A177-3AD203B41FA5}">
+                      <a16:colId xmlns:a16="http://schemas.microsoft.com/office/drawing/2014/main" val="20001"/>
+                    </a:ext>
+                  </a:extLst>
+                </a:gridCol>
+                <a:gridCol w="1097280">
+                  <a:extLst>
+                    <a:ext uri="{9D8B030D-6E8A-4147-A177-3AD203B41FA5}">
+                      <a16:colId xmlns:a16="http://schemas.microsoft.com/office/drawing/2014/main" val="20002"/>
+                    </a:ext>
+                  </a:extLst>
+                </a:gridCol>
+                <a:gridCol w="594360">
+                  <a:extLst>
+                    <a:ext uri="{9D8B030D-6E8A-4147-A177-3AD203B41FA5}">
+                      <a16:colId xmlns:a16="http://schemas.microsoft.com/office/drawing/2014/main" val="20003"/>
+                    </a:ext>
+                  </a:extLst>
+                </a:gridCol>
+              </a:tblGrid>
+              <a:tr h="384048">
+                <a:tc>
+                  <a:txBody>
+                    <a:bodyPr/>
+                    <a:lstStyle/>
+                    <a:p>
+                      <a:pPr algn="l"/>
+                      <a:r>
+                        <a:rPr sz="1200" b="1">
+                          <a:solidFill>
+                            <a:srgbClr val="E8A35A"/>
+                          </a:solidFill>
+                          <a:latin typeface="Arial"/>
+                        </a:rPr>
+                        <a:t>Control</a:t>
+                      </a:r>
+                    </a:p>
+                  </a:txBody>
+                  <a:tcPr>
+                    <a:solidFill>
+                      <a:srgbClr val="263A50"/>
+                    </a:solidFill>
+                  </a:tcPr>
+                </a:tc>
+                <a:tc>
+                  <a:txBody>
+                    <a:bodyPr/>
+                    <a:lstStyle/>
+                    <a:p>
+                      <a:pPr algn="r"/>
+                      <a:r>
+                        <a:rPr sz="1200" b="1">
+                          <a:solidFill>
+                            <a:srgbClr val="E8A35A"/>
+                          </a:solidFill>
+                          <a:latin typeface="Arial"/>
+                        </a:rPr>
+                        <a:t>Origen</a:t>
+                      </a:r>
+                    </a:p>
+                  </a:txBody>
+                  <a:tcPr>
+                    <a:solidFill>
+                      <a:srgbClr val="263A50"/>
+                    </a:solidFill>
+                  </a:tcPr>
+                </a:tc>
+                <a:tc>
+                  <a:txBody>
+                    <a:bodyPr/>
+                    <a:lstStyle/>
+                    <a:p>
+                      <a:pPr algn="r"/>
+                      <a:r>
+                        <a:rPr sz="1200" b="1">
+                          <a:solidFill>
+                            <a:srgbClr val="E8A35A"/>
+                          </a:solidFill>
+                          <a:latin typeface="Arial"/>
+                        </a:rPr>
+                        <a:t>DW</a:t>
+                      </a:r>
+                    </a:p>
+                  </a:txBody>
+                  <a:tcPr>
+                    <a:solidFill>
+                      <a:srgbClr val="263A50"/>
+                    </a:solidFill>
+                  </a:tcPr>
+                </a:tc>
+                <a:tc>
+                  <a:txBody>
+                    <a:bodyPr/>
+                    <a:lstStyle/>
+                    <a:p>
+                      <a:pPr algn="r"/>
+                      <a:endParaRPr/>
+                    </a:p>
+                  </a:txBody>
+                  <a:tcPr>
+                    <a:solidFill>
+                      <a:srgbClr val="263A50"/>
+                    </a:solidFill>
+                  </a:tcPr>
+                </a:tc>
+                <a:extLst>
+                  <a:ext uri="{0D108BD9-81ED-4DB2-BD59-A6C34878D82A}">
+                    <a16:rowId xmlns:a16="http://schemas.microsoft.com/office/drawing/2014/main" val="10000"/>
+                  </a:ext>
+                </a:extLst>
+              </a:tr>
+              <a:tr h="384048">
+                <a:tc>
+                  <a:txBody>
+                    <a:bodyPr/>
+                    <a:lstStyle/>
+                    <a:p>
+                      <a:pPr algn="l"/>
+                      <a:r>
+                        <a:rPr sz="1200" b="0">
+                          <a:solidFill>
+                            <a:srgbClr val="C9D3DD"/>
+                          </a:solidFill>
+                          <a:latin typeface="Arial"/>
+                        </a:rPr>
+                        <a:t>Filas FactVentas</a:t>
+                      </a:r>
+                    </a:p>
+                  </a:txBody>
+                  <a:tcPr>
+                    <a:solidFill>
+                      <a:srgbClr val="1B2A3A"/>
+                    </a:solidFill>
+                  </a:tcPr>
+                </a:tc>
+                <a:tc>
+                  <a:txBody>
+                    <a:bodyPr/>
+                    <a:lstStyle/>
+                    <a:p>
+                      <a:pPr algn="r"/>
+                      <a:r>
+                        <a:rPr sz="1200" b="0">
+                          <a:solidFill>
+                            <a:srgbClr val="C9D3DD"/>
+                          </a:solidFill>
+                          <a:latin typeface="Arial"/>
+                        </a:rPr>
+                        <a:t>2.155</a:t>
+                      </a:r>
+                    </a:p>
+                  </a:txBody>
+                  <a:tcPr>
+                    <a:solidFill>
+                      <a:srgbClr val="1B2A3A"/>
+                    </a:solidFill>
+                  </a:tcPr>
+                </a:tc>
+                <a:tc>
+                  <a:txBody>
+                    <a:bodyPr/>
+                    <a:lstStyle/>
+                    <a:p>
+                      <a:pPr algn="r"/>
+                      <a:r>
+                        <a:rPr sz="1200" b="0">
+                          <a:solidFill>
+                            <a:srgbClr val="C9D3DD"/>
+                          </a:solidFill>
+                          <a:latin typeface="Arial"/>
+                        </a:rPr>
+                        <a:t>2.155</a:t>
+                      </a:r>
+                    </a:p>
+                  </a:txBody>
+                  <a:tcPr>
+                    <a:solidFill>
+                      <a:srgbClr val="1B2A3A"/>
+                    </a:solidFill>
+                  </a:tcPr>
+                </a:tc>
+                <a:tc>
+                  <a:txBody>
+                    <a:bodyPr/>
+                    <a:lstStyle/>
+                    <a:p>
+                      <a:pPr algn="r"/>
+                      <a:r>
+                        <a:rPr sz="1200" b="1">
+                          <a:solidFill>
+                            <a:srgbClr val="E8A35A"/>
+                          </a:solidFill>
+                          <a:latin typeface="Arial"/>
+                        </a:rPr>
+                        <a:t>OK</a:t>
+                      </a:r>
+                    </a:p>
+                  </a:txBody>
+                  <a:tcPr>
+                    <a:solidFill>
+                      <a:srgbClr val="1B2A3A"/>
+                    </a:solidFill>
+                  </a:tcPr>
+                </a:tc>
+                <a:extLst>
+                  <a:ext uri="{0D108BD9-81ED-4DB2-BD59-A6C34878D82A}">
+                    <a16:rowId xmlns:a16="http://schemas.microsoft.com/office/drawing/2014/main" val="10001"/>
+                  </a:ext>
+                </a:extLst>
+              </a:tr>
+              <a:tr h="384048">
+                <a:tc>
+                  <a:txBody>
+                    <a:bodyPr/>
+                    <a:lstStyle/>
+                    <a:p>
+                      <a:pPr algn="l"/>
+                      <a:r>
+                        <a:rPr sz="1200" b="0">
+                          <a:solidFill>
+                            <a:srgbClr val="C9D3DD"/>
+                          </a:solidFill>
+                          <a:latin typeface="Arial"/>
+                        </a:rPr>
+                        <a:t>Órdenes distintas</a:t>
+                      </a:r>
+                    </a:p>
+                  </a:txBody>
+                  <a:tcPr>
+                    <a:solidFill>
+                      <a:srgbClr val="1B2A3A"/>
+                    </a:solidFill>
+                  </a:tcPr>
+                </a:tc>
+                <a:tc>
+                  <a:txBody>
+                    <a:bodyPr/>
+                    <a:lstStyle/>
+                    <a:p>
+                      <a:pPr algn="r"/>
+                      <a:r>
+                        <a:rPr sz="1200" b="0">
+                          <a:solidFill>
+                            <a:srgbClr val="C9D3DD"/>
+                          </a:solidFill>
+                          <a:latin typeface="Arial"/>
+                        </a:rPr>
+                        <a:t>830</a:t>
+                      </a:r>
+                    </a:p>
+                  </a:txBody>
+                  <a:tcPr>
+                    <a:solidFill>
+                      <a:srgbClr val="1B2A3A"/>
+                    </a:solidFill>
+                  </a:tcPr>
+                </a:tc>
+                <a:tc>
+                  <a:txBody>
+                    <a:bodyPr/>
+                    <a:lstStyle/>
+                    <a:p>
+                      <a:pPr algn="r"/>
+                      <a:r>
+                        <a:rPr sz="1200" b="0">
+                          <a:solidFill>
+                            <a:srgbClr val="C9D3DD"/>
+                          </a:solidFill>
+                          <a:latin typeface="Arial"/>
+                        </a:rPr>
+                        <a:t>830</a:t>
+                      </a:r>
+                    </a:p>
+                  </a:txBody>
+                  <a:tcPr>
+                    <a:solidFill>
+                      <a:srgbClr val="1B2A3A"/>
+                    </a:solidFill>
+                  </a:tcPr>
+                </a:tc>
+                <a:tc>
+                  <a:txBody>
+                    <a:bodyPr/>
+                    <a:lstStyle/>
+                    <a:p>
+                      <a:pPr algn="r"/>
+                      <a:r>
+                        <a:rPr sz="1200" b="1">
+                          <a:solidFill>
+                            <a:srgbClr val="E8A35A"/>
+                          </a:solidFill>
+                          <a:latin typeface="Arial"/>
+                        </a:rPr>
+                        <a:t>OK</a:t>
+                      </a:r>
+                    </a:p>
+                  </a:txBody>
+                  <a:tcPr>
+                    <a:solidFill>
+                      <a:srgbClr val="1B2A3A"/>
+                    </a:solidFill>
+                  </a:tcPr>
+                </a:tc>
+                <a:extLst>
+                  <a:ext uri="{0D108BD9-81ED-4DB2-BD59-A6C34878D82A}">
+                    <a16:rowId xmlns:a16="http://schemas.microsoft.com/office/drawing/2014/main" val="10002"/>
+                  </a:ext>
+                </a:extLst>
+              </a:tr>
+              <a:tr h="384048">
+                <a:tc>
+                  <a:txBody>
+                    <a:bodyPr/>
+                    <a:lstStyle/>
+                    <a:p>
+                      <a:pPr algn="l"/>
+                      <a:r>
+                        <a:rPr sz="1200" b="0">
+                          <a:solidFill>
+                            <a:srgbClr val="C9D3DD"/>
+                          </a:solidFill>
+                          <a:latin typeface="Arial"/>
+                        </a:rPr>
+                        <a:t>Órdenes sin envío</a:t>
+                      </a:r>
+                    </a:p>
+                  </a:txBody>
+                  <a:tcPr>
+                    <a:solidFill>
+                      <a:srgbClr val="1B2A3A"/>
+                    </a:solidFill>
+                  </a:tcPr>
+                </a:tc>
+                <a:tc>
+                  <a:txBody>
+                    <a:bodyPr/>
+                    <a:lstStyle/>
+                    <a:p>
+                      <a:pPr algn="r"/>
+                      <a:r>
+                        <a:rPr sz="1200" b="0">
+                          <a:solidFill>
+                            <a:srgbClr val="C9D3DD"/>
+                          </a:solidFill>
+                          <a:latin typeface="Arial"/>
+                        </a:rPr>
+                        <a:t>21</a:t>
+                      </a:r>
+                    </a:p>
+                  </a:txBody>
+                  <a:tcPr>
+                    <a:solidFill>
+                      <a:srgbClr val="1B2A3A"/>
+                    </a:solidFill>
+                  </a:tcPr>
+                </a:tc>
+                <a:tc>
+                  <a:txBody>
+                    <a:bodyPr/>
+                    <a:lstStyle/>
+                    <a:p>
+                      <a:pPr algn="r"/>
+                      <a:r>
+                        <a:rPr sz="1200" b="0">
+                          <a:solidFill>
+                            <a:srgbClr val="C9D3DD"/>
+                          </a:solidFill>
+                          <a:latin typeface="Arial"/>
+                        </a:rPr>
+                        <a:t>21</a:t>
+                      </a:r>
+                    </a:p>
+                  </a:txBody>
+                  <a:tcPr>
+                    <a:solidFill>
+                      <a:srgbClr val="1B2A3A"/>
+                    </a:solidFill>
+                  </a:tcPr>
+                </a:tc>
+                <a:tc>
+                  <a:txBody>
+                    <a:bodyPr/>
+                    <a:lstStyle/>
+                    <a:p>
+                      <a:pPr algn="r"/>
+                      <a:r>
+                        <a:rPr sz="1200" b="1">
+                          <a:solidFill>
+                            <a:srgbClr val="E8A35A"/>
+                          </a:solidFill>
+                          <a:latin typeface="Arial"/>
+                        </a:rPr>
+                        <a:t>OK</a:t>
+                      </a:r>
+                    </a:p>
+                  </a:txBody>
+                  <a:tcPr>
+                    <a:solidFill>
+                      <a:srgbClr val="1B2A3A"/>
+                    </a:solidFill>
+                  </a:tcPr>
+                </a:tc>
+                <a:extLst>
+                  <a:ext uri="{0D108BD9-81ED-4DB2-BD59-A6C34878D82A}">
+                    <a16:rowId xmlns:a16="http://schemas.microsoft.com/office/drawing/2014/main" val="10003"/>
+                  </a:ext>
+                </a:extLst>
+              </a:tr>
+              <a:tr h="384048">
+                <a:tc>
+                  <a:txBody>
+                    <a:bodyPr/>
+                    <a:lstStyle/>
+                    <a:p>
+                      <a:pPr algn="l"/>
+                      <a:r>
+                        <a:rPr sz="1200" b="0">
+                          <a:solidFill>
+                            <a:srgbClr val="C9D3DD"/>
+                          </a:solidFill>
+                          <a:latin typeface="Arial"/>
+                        </a:rPr>
+                        <a:t>Suma MontoBruto</a:t>
+                      </a:r>
+                    </a:p>
+                  </a:txBody>
+                  <a:tcPr>
+                    <a:solidFill>
+                      <a:srgbClr val="1B2A3A"/>
+                    </a:solidFill>
+                  </a:tcPr>
+                </a:tc>
+                <a:tc>
+                  <a:txBody>
+                    <a:bodyPr/>
+                    <a:lstStyle/>
+                    <a:p>
+                      <a:pPr algn="r"/>
+                      <a:r>
+                        <a:rPr sz="1200" b="0">
+                          <a:solidFill>
+                            <a:srgbClr val="C9D3DD"/>
+                          </a:solidFill>
+                          <a:latin typeface="Arial"/>
+                        </a:rPr>
+                        <a:t>1.354.458,59</a:t>
+                      </a:r>
+                    </a:p>
+                  </a:txBody>
+                  <a:tcPr>
+                    <a:solidFill>
+                      <a:srgbClr val="1B2A3A"/>
+                    </a:solidFill>
+                  </a:tcPr>
+                </a:tc>
+                <a:tc>
+                  <a:txBody>
+                    <a:bodyPr/>
+                    <a:lstStyle/>
+                    <a:p>
+                      <a:pPr algn="r"/>
+                      <a:r>
+                        <a:rPr sz="1200" b="0">
+                          <a:solidFill>
+                            <a:srgbClr val="C9D3DD"/>
+                          </a:solidFill>
+                          <a:latin typeface="Arial"/>
+                        </a:rPr>
+                        <a:t>1.354.458,59</a:t>
+                      </a:r>
+                    </a:p>
+                  </a:txBody>
+                  <a:tcPr>
+                    <a:solidFill>
+                      <a:srgbClr val="1B2A3A"/>
+                    </a:solidFill>
+                  </a:tcPr>
+                </a:tc>
+                <a:tc>
+                  <a:txBody>
+                    <a:bodyPr/>
+                    <a:lstStyle/>
+                    <a:p>
+                      <a:pPr algn="r"/>
+                      <a:r>
+                        <a:rPr sz="1200" b="1">
+                          <a:solidFill>
+                            <a:srgbClr val="E8A35A"/>
+                          </a:solidFill>
+                          <a:latin typeface="Arial"/>
+                        </a:rPr>
+                        <a:t>OK</a:t>
+                      </a:r>
+                    </a:p>
+                  </a:txBody>
+                  <a:tcPr>
+                    <a:solidFill>
+                      <a:srgbClr val="1B2A3A"/>
+                    </a:solidFill>
+                  </a:tcPr>
+                </a:tc>
+                <a:extLst>
+                  <a:ext uri="{0D108BD9-81ED-4DB2-BD59-A6C34878D82A}">
+                    <a16:rowId xmlns:a16="http://schemas.microsoft.com/office/drawing/2014/main" val="10004"/>
+                  </a:ext>
+                </a:extLst>
+              </a:tr>
+            </a:tbl>
+          </a:graphicData>
+        </a:graphic>
+      </p:graphicFrame>
+      <p:sp>
+        <p:nvSpPr>
+          <p:cNvPr id="14" name="TextBox 13"/>
+          <p:cNvSpPr txBox="1"/>
+          <p:nvPr/>
+        </p:nvSpPr>
+        <p:spPr>
+          <a:xfrm>
+            <a:off x="813816" y="5029200"/>
+            <a:ext cx="10561320" cy="731520"/>
+          </a:xfrm>
+          <a:prstGeom prst="rect">
+            <a:avLst/>
+          </a:prstGeom>
+          <a:noFill/>
+        </p:spPr>
+        <p:txBody>
+          <a:bodyPr wrap="square" lIns="0" tIns="0" rIns="0" bIns="0">
+            <a:spAutoFit/>
+          </a:bodyPr>
+          <a:lstStyle/>
+          <a:p>
+            <a:pPr algn="l">
+              <a:lnSpc>
+                <a:spcPct val="115000"/>
+              </a:lnSpc>
+              <a:spcAft>
+                <a:spcPts val="600"/>
+              </a:spcAft>
+            </a:pPr>
+            <a:r>
+              <a:rPr sz="1500" b="0">
+                <a:solidFill>
+                  <a:srgbClr val="C9D3DD"/>
+                </a:solidFill>
+                <a:latin typeface="Arial"/>
+              </a:rPr>
+              <a:t>Cada control compara el mismo dato en las dos bases: si coinciden, la carga fue correcta.</a:t>
+            </a:r>
           </a:p>
         </p:txBody>
       </p:sp>
@@ -2839,7 +3329,7 @@
               <a:rPr lang="en-US" sz="1600" dirty="0">
                 <a:latin typeface="+mj-lt"/>
               </a:rPr>
-              <a:t>La tabla de hechos y la validacion se ejecutan solo después de que las dimensiones están pobladas.</a:t>
+              <a:t>La tabla de hechos y la validación se ejecutan solo después de que las dimensiones están pobladas.</a:t>
             </a:r>
           </a:p>
           <a:p>
@@ -2885,7 +3375,7 @@
               <a:rPr lang="en-US" sz="1600" dirty="0">
                 <a:latin typeface="+mj-lt"/>
               </a:rPr>
-              <a:t> (Desnormalización): Se usó un commando SQL en el origen con INNER JOIN entre </a:t>
+              <a:t> (Desnormalización): Se usó un comando SQL en el origen con INNER JOIN entre </a:t>
             </a:r>
             <a:r>
               <a:rPr lang="en-US" sz="1600" b="1" dirty="0">
@@ -3142,7 +3632,7 @@
             </a:pPr>
             <a:r>
               <a:rPr lang="en-US" sz="2800" b="1" dirty="0"/>
-              <a:t>Tabla De Hechos y Validaciones</a:t>
+              <a:t>Tabla de Hechos y Validaciones</a:t>
             </a:r>
           </a:p>
         </p:txBody>
@@ -3260,7 +3750,7 @@
             </a:r>
             <a:r>
               <a:rPr lang="en-US" sz="1600" dirty="0"/>
-              <a:t>Conversion a formato entero </a:t>
+              <a:t>Conversión a formato entero </a:t>
             </a:r>
             <a:r>
               <a:rPr lang="en-US" sz="1600" b="1" dirty="0"/>
@@ -3272,7 +3762,7 @@
             </a:r>
             <a:r>
               <a:rPr lang="en-US" sz="1600" b="1" dirty="0"/>
-              <a:t>-1 (“Sin Fecha”) </a:t>
+              <a:t>-1 (“Sin fecha”) </a:t>
             </a:r>
             <a:r>
               <a:rPr lang="en-US" sz="1600" dirty="0"/>
@@ -3314,7 +3804,7 @@
             </a:pPr>
             <a:r>
               <a:rPr lang="en-US" sz="1600" b="1" dirty="0"/>
-              <a:t>Tarea final que ejecuta 02_validacion_carga-sql comparando Origen vs DW.</a:t>
+              <a:t>Tarea final que ejecuta 02_validacion_carga.sql comparando Origen vs DW.</a:t>
             </a:r>
           </a:p>
           <a:p>
@@ -3335,7 +3825,7 @@
             </a:r>
             <a:r>
               <a:rPr lang="en-US" sz="1600" b="1" dirty="0"/>
-              <a:t>$1,265,792.76</a:t>
+              <a:t>$1.265.792,53</a:t>
             </a:r>
             <a:r>
               <a:rPr lang="en-US" sz="1600" dirty="0"/>
@@ -3343,7 +3833,7 @@
             </a:r>
             <a:r>
               <a:rPr lang="en-US" sz="1600" b="1" dirty="0"/>
-              <a:t>0 filas huerfanas</a:t>
+              <a:t>0 filas huérfanas</a:t>
             </a:r>
             <a:r>
               <a:rPr lang="en-US" sz="1600" dirty="0"/>
@@ -3398,7 +3888,7 @@
                 <a:ea typeface="Arial" pitchFamily="34" charset="-122"/>
                 <a:cs typeface="Arial" pitchFamily="34" charset="-120"/>
               </a:rPr>
-              <a:t>11</a:t>
+              <a:t>12</a:t>
             </a:r>
             <a:endParaRPr lang="en-US" sz="1200" dirty="0"/>
           </a:p>
@@ -3419,15 +3909,7 @@
 
 <file path=ppt/slides/slide2.xml><?xml version="1.0" encoding="utf-8"?>
 <p:sld xmlns:a="http://schemas.openxmlformats.org/drawingml/2006/main" xmlns:r="http://schemas.openxmlformats.org/officeDocument/2006/relationships" xmlns:p="http://schemas.openxmlformats.org/presentationml/2006/main">
-  <p:cSld name="Slide 2">
-    <p:bg>
-      <p:bgPr>
-        <a:solidFill>
-          <a:srgbClr val="F7F6F2"/>
-        </a:solidFill>
-        <a:effectLst/>
-      </p:bgPr>
-    </p:bg>
+  <p:cSld>
     <p:spTree>
       <p:nvGrpSpPr>
         <p:cNvPr id="1" name=""/>
@@ -3896,15 +4378,7 @@
 
 <file path=ppt/slides/slide3.xml><?xml version="1.0" encoding="utf-8"?>
 <p:sld xmlns:a="http://schemas.openxmlformats.org/drawingml/2006/main" xmlns:r="http://schemas.openxmlformats.org/officeDocument/2006/relationships" xmlns:p="http://schemas.openxmlformats.org/presentationml/2006/main">
-  <p:cSld name="Slide 3">
-    <p:bg>
-      <p:bgPr>
-        <a:solidFill>
-          <a:srgbClr val="F7F6F2"/>
-        </a:solidFill>
-        <a:effectLst/>
-      </p:bgPr>
-    </p:bg>
+  <p:cSld>
     <p:spTree>
       <p:nvGrpSpPr>
         <p:cNvPr id="1" name=""/>
@@ -4017,13 +4491,7 @@
           <p:cNvGraphicFramePr>
             <a:graphicFrameLocks noGrp="1"/>
           </p:cNvGraphicFramePr>
-          <p:nvPr>
-            <p:extLst>
-              <p:ext uri="{D42A27DB-BD31-4B8C-83A1-F6EECF244321}">
-                <p14:modId xmlns:p14="http://schemas.microsoft.com/office/powerpoint/2010/main" val="1579011935"/>
-              </p:ext>
-            </p:extLst>
-          </p:nvPr>
+          <p:nvPr/>
         </p:nvGraphicFramePr>
         <p:xfrm>
           <a:off x="822960" y="1859280"/>
@@ -5753,944 +6221,9 @@
                 <a:ea typeface="Georgia" pitchFamily="18" charset="-122"/>
                 <a:cs typeface="Georgia" pitchFamily="18" charset="-120"/>
               </a:rPr>
-              <a:t>Seis indicadores: venta y despacho</a:t>
+              <a:t>Seis indicadores y cómo se calculan</a:t>
             </a:r>
             <a:endParaRPr lang="en-US" sz="3200" dirty="0"/>
-          </a:p>
-        </p:txBody>
-      </p:sp>
-      <p:sp>
-        <p:nvSpPr>
-          <p:cNvPr id="4" name="Shape 2"/>
-          <p:cNvSpPr/>
-          <p:nvPr/>
-        </p:nvSpPr>
-        <p:spPr>
-          <a:xfrm>
-            <a:off x="812800" y="1899920"/>
-            <a:ext cx="3420507" cy="1574800"/>
-          </a:xfrm>
-          <a:prstGeom prst="roundRect">
-            <a:avLst>
-              <a:gd name="adj" fmla="val 4839"/>
-            </a:avLst>
-          </a:prstGeom>
-          <a:solidFill>
-            <a:srgbClr val="F7F6F2"/>
-          </a:solidFill>
-          <a:ln/>
-        </p:spPr>
-      </p:sp>
-      <p:sp>
-        <p:nvSpPr>
-          <p:cNvPr id="5" name="Text 3"/>
-          <p:cNvSpPr/>
-          <p:nvPr/>
-        </p:nvSpPr>
-        <p:spPr>
-          <a:xfrm>
-            <a:off x="1016000" y="2103120"/>
-            <a:ext cx="3104530" cy="452120"/>
-          </a:xfrm>
-          <a:prstGeom prst="rect">
-            <a:avLst/>
-          </a:prstGeom>
-          <a:noFill/>
-          <a:ln/>
-        </p:spPr>
-        <p:txBody>
-          <a:bodyPr wrap="square" lIns="0" tIns="0" rIns="0" bIns="0" rtlCol="0" anchor="t">
-            <a:normAutofit/>
-          </a:bodyPr>
-          <a:lstStyle/>
-          <a:p>
-            <a:pPr marL="0" indent="0" algn="l">
-              <a:lnSpc>
-                <a:spcPts val="3360"/>
-              </a:lnSpc>
-              <a:buNone/>
-            </a:pPr>
-            <a:r>
-              <a:rPr lang="en-US" sz="2400" b="1" dirty="0">
-                <a:solidFill>
-                  <a:srgbClr val="1B2A3A"/>
-                </a:solidFill>
-                <a:latin typeface="Arial" pitchFamily="34" charset="0"/>
-                <a:ea typeface="Arial" pitchFamily="34" charset="-122"/>
-                <a:cs typeface="Arial" pitchFamily="34" charset="-120"/>
-              </a:rPr>
-              <a:t>$1,27 M</a:t>
-            </a:r>
-            <a:endParaRPr lang="en-US" sz="2400" dirty="0"/>
-          </a:p>
-        </p:txBody>
-      </p:sp>
-      <p:sp>
-        <p:nvSpPr>
-          <p:cNvPr id="6" name="Text 4"/>
-          <p:cNvSpPr/>
-          <p:nvPr/>
-        </p:nvSpPr>
-        <p:spPr>
-          <a:xfrm>
-            <a:off x="1016000" y="2580641"/>
-            <a:ext cx="3104530" cy="238760"/>
-          </a:xfrm>
-          <a:prstGeom prst="rect">
-            <a:avLst/>
-          </a:prstGeom>
-          <a:noFill/>
-          <a:ln/>
-        </p:spPr>
-        <p:txBody>
-          <a:bodyPr wrap="square" lIns="0" tIns="0" rIns="0" bIns="0" rtlCol="0" anchor="t">
-            <a:normAutofit/>
-          </a:bodyPr>
-          <a:lstStyle/>
-          <a:p>
-            <a:pPr marL="0" indent="0" algn="l">
-              <a:lnSpc>
-                <a:spcPts val="1680"/>
-              </a:lnSpc>
-              <a:buNone/>
-            </a:pPr>
-            <a:r>
-              <a:rPr lang="en-US" sz="1400" b="1" dirty="0">
-                <a:solidFill>
-                  <a:srgbClr val="1B2A3A"/>
-                </a:solidFill>
-                <a:latin typeface="Arial" pitchFamily="34" charset="0"/>
-                <a:ea typeface="Arial" pitchFamily="34" charset="-122"/>
-                <a:cs typeface="Arial" pitchFamily="34" charset="-120"/>
-              </a:rPr>
-              <a:t>Ventas netas</a:t>
-            </a:r>
-            <a:endParaRPr lang="en-US" sz="1400" dirty="0"/>
-          </a:p>
-        </p:txBody>
-      </p:sp>
-      <p:sp>
-        <p:nvSpPr>
-          <p:cNvPr id="7" name="Text 5"/>
-          <p:cNvSpPr/>
-          <p:nvPr/>
-        </p:nvSpPr>
-        <p:spPr>
-          <a:xfrm>
-            <a:off x="1016000" y="2844800"/>
-            <a:ext cx="3104530" cy="452120"/>
-          </a:xfrm>
-          <a:prstGeom prst="rect">
-            <a:avLst/>
-          </a:prstGeom>
-          <a:noFill/>
-          <a:ln/>
-        </p:spPr>
-        <p:txBody>
-          <a:bodyPr wrap="square" lIns="0" tIns="0" rIns="0" bIns="0" rtlCol="0" anchor="t">
-            <a:normAutofit/>
-          </a:bodyPr>
-          <a:lstStyle/>
-          <a:p>
-            <a:pPr marL="0" indent="0" algn="l">
-              <a:lnSpc>
-                <a:spcPts val="1680"/>
-              </a:lnSpc>
-              <a:buNone/>
-            </a:pPr>
-            <a:r>
-              <a:rPr lang="en-US" sz="1200" dirty="0">
-                <a:solidFill>
-                  <a:srgbClr val="3E4A57"/>
-                </a:solidFill>
-                <a:latin typeface="Arial" pitchFamily="34" charset="0"/>
-                <a:ea typeface="Arial" pitchFamily="34" charset="-122"/>
-                <a:cs typeface="Arial" pitchFamily="34" charset="-120"/>
-              </a:rPr>
-              <a:t>Crecimiento ene–abr 2018 vs 2017: +120,7 %</a:t>
-            </a:r>
-            <a:endParaRPr lang="en-US" sz="1200" dirty="0"/>
-          </a:p>
-        </p:txBody>
-      </p:sp>
-      <p:sp>
-        <p:nvSpPr>
-          <p:cNvPr id="8" name="Shape 6"/>
-          <p:cNvSpPr/>
-          <p:nvPr/>
-        </p:nvSpPr>
-        <p:spPr>
-          <a:xfrm>
-            <a:off x="4385707" y="1899920"/>
-            <a:ext cx="3420507" cy="1574800"/>
-          </a:xfrm>
-          <a:prstGeom prst="roundRect">
-            <a:avLst>
-              <a:gd name="adj" fmla="val 4839"/>
-            </a:avLst>
-          </a:prstGeom>
-          <a:solidFill>
-            <a:srgbClr val="F7F6F2"/>
-          </a:solidFill>
-          <a:ln/>
-        </p:spPr>
-      </p:sp>
-      <p:sp>
-        <p:nvSpPr>
-          <p:cNvPr id="9" name="Text 7"/>
-          <p:cNvSpPr/>
-          <p:nvPr/>
-        </p:nvSpPr>
-        <p:spPr>
-          <a:xfrm>
-            <a:off x="4588907" y="2103120"/>
-            <a:ext cx="3104530" cy="452120"/>
-          </a:xfrm>
-          <a:prstGeom prst="rect">
-            <a:avLst/>
-          </a:prstGeom>
-          <a:noFill/>
-          <a:ln/>
-        </p:spPr>
-        <p:txBody>
-          <a:bodyPr wrap="square" lIns="0" tIns="0" rIns="0" bIns="0" rtlCol="0" anchor="t">
-            <a:normAutofit/>
-          </a:bodyPr>
-          <a:lstStyle/>
-          <a:p>
-            <a:pPr marL="0" indent="0" algn="l">
-              <a:lnSpc>
-                <a:spcPts val="3360"/>
-              </a:lnSpc>
-              <a:buNone/>
-            </a:pPr>
-            <a:r>
-              <a:rPr lang="en-US" sz="2400" b="1" dirty="0">
-                <a:solidFill>
-                  <a:srgbClr val="1B2A3A"/>
-                </a:solidFill>
-                <a:latin typeface="Arial" pitchFamily="34" charset="0"/>
-                <a:ea typeface="Arial" pitchFamily="34" charset="-122"/>
-                <a:cs typeface="Arial" pitchFamily="34" charset="-120"/>
-              </a:rPr>
-              <a:t>$1.525</a:t>
-            </a:r>
-            <a:endParaRPr lang="en-US" sz="2400" dirty="0"/>
-          </a:p>
-        </p:txBody>
-      </p:sp>
-      <p:sp>
-        <p:nvSpPr>
-          <p:cNvPr id="10" name="Text 8"/>
-          <p:cNvSpPr/>
-          <p:nvPr/>
-        </p:nvSpPr>
-        <p:spPr>
-          <a:xfrm>
-            <a:off x="4588907" y="2580641"/>
-            <a:ext cx="3104530" cy="238760"/>
-          </a:xfrm>
-          <a:prstGeom prst="rect">
-            <a:avLst/>
-          </a:prstGeom>
-          <a:noFill/>
-          <a:ln/>
-        </p:spPr>
-        <p:txBody>
-          <a:bodyPr wrap="square" lIns="0" tIns="0" rIns="0" bIns="0" rtlCol="0" anchor="t">
-            <a:normAutofit/>
-          </a:bodyPr>
-          <a:lstStyle/>
-          <a:p>
-            <a:pPr marL="0" indent="0" algn="l">
-              <a:lnSpc>
-                <a:spcPts val="1680"/>
-              </a:lnSpc>
-              <a:buNone/>
-            </a:pPr>
-            <a:r>
-              <a:rPr lang="en-US" sz="1400" b="1" dirty="0">
-                <a:solidFill>
-                  <a:srgbClr val="1B2A3A"/>
-                </a:solidFill>
-                <a:latin typeface="Arial" pitchFamily="34" charset="0"/>
-                <a:ea typeface="Arial" pitchFamily="34" charset="-122"/>
-                <a:cs typeface="Arial" pitchFamily="34" charset="-120"/>
-              </a:rPr>
-              <a:t>Ticket promedio</a:t>
-            </a:r>
-            <a:endParaRPr lang="en-US" sz="1400" dirty="0"/>
-          </a:p>
-        </p:txBody>
-      </p:sp>
-      <p:sp>
-        <p:nvSpPr>
-          <p:cNvPr id="11" name="Text 9"/>
-          <p:cNvSpPr/>
-          <p:nvPr/>
-        </p:nvSpPr>
-        <p:spPr>
-          <a:xfrm>
-            <a:off x="4588907" y="2844800"/>
-            <a:ext cx="3104530" cy="238760"/>
-          </a:xfrm>
-          <a:prstGeom prst="rect">
-            <a:avLst/>
-          </a:prstGeom>
-          <a:noFill/>
-          <a:ln/>
-        </p:spPr>
-        <p:txBody>
-          <a:bodyPr wrap="square" lIns="0" tIns="0" rIns="0" bIns="0" rtlCol="0" anchor="t">
-            <a:normAutofit/>
-          </a:bodyPr>
-          <a:lstStyle/>
-          <a:p>
-            <a:pPr marL="0" indent="0" algn="l">
-              <a:lnSpc>
-                <a:spcPts val="1680"/>
-              </a:lnSpc>
-              <a:buNone/>
-            </a:pPr>
-            <a:r>
-              <a:rPr lang="en-US" sz="1200" dirty="0">
-                <a:solidFill>
-                  <a:srgbClr val="3E4A57"/>
-                </a:solidFill>
-                <a:latin typeface="Arial" pitchFamily="34" charset="0"/>
-                <a:ea typeface="Arial" pitchFamily="34" charset="-122"/>
-                <a:cs typeface="Arial" pitchFamily="34" charset="-120"/>
-              </a:rPr>
-              <a:t>Ventas netas / órdenes distintas</a:t>
-            </a:r>
-            <a:endParaRPr lang="en-US" sz="1200" dirty="0"/>
-          </a:p>
-        </p:txBody>
-      </p:sp>
-      <p:sp>
-        <p:nvSpPr>
-          <p:cNvPr id="12" name="Shape 10"/>
-          <p:cNvSpPr/>
-          <p:nvPr/>
-        </p:nvSpPr>
-        <p:spPr>
-          <a:xfrm>
-            <a:off x="7958614" y="1899920"/>
-            <a:ext cx="3420507" cy="1574800"/>
-          </a:xfrm>
-          <a:prstGeom prst="roundRect">
-            <a:avLst>
-              <a:gd name="adj" fmla="val 4839"/>
-            </a:avLst>
-          </a:prstGeom>
-          <a:solidFill>
-            <a:srgbClr val="F7F6F2"/>
-          </a:solidFill>
-          <a:ln/>
-        </p:spPr>
-      </p:sp>
-      <p:sp>
-        <p:nvSpPr>
-          <p:cNvPr id="13" name="Text 11"/>
-          <p:cNvSpPr/>
-          <p:nvPr/>
-        </p:nvSpPr>
-        <p:spPr>
-          <a:xfrm>
-            <a:off x="8161814" y="2103120"/>
-            <a:ext cx="3104530" cy="452120"/>
-          </a:xfrm>
-          <a:prstGeom prst="rect">
-            <a:avLst/>
-          </a:prstGeom>
-          <a:noFill/>
-          <a:ln/>
-        </p:spPr>
-        <p:txBody>
-          <a:bodyPr wrap="square" lIns="0" tIns="0" rIns="0" bIns="0" rtlCol="0" anchor="t">
-            <a:normAutofit/>
-          </a:bodyPr>
-          <a:lstStyle/>
-          <a:p>
-            <a:pPr marL="0" indent="0" algn="l">
-              <a:lnSpc>
-                <a:spcPts val="3360"/>
-              </a:lnSpc>
-              <a:buNone/>
-            </a:pPr>
-            <a:r>
-              <a:rPr lang="en-US" sz="2400" b="1" dirty="0">
-                <a:solidFill>
-                  <a:srgbClr val="1B2A3A"/>
-                </a:solidFill>
-                <a:latin typeface="Arial" pitchFamily="34" charset="0"/>
-                <a:ea typeface="Arial" pitchFamily="34" charset="-122"/>
-                <a:cs typeface="Arial" pitchFamily="34" charset="-120"/>
-              </a:rPr>
-              <a:t>6,55 %</a:t>
-            </a:r>
-            <a:endParaRPr lang="en-US" sz="2400" dirty="0"/>
-          </a:p>
-        </p:txBody>
-      </p:sp>
-      <p:sp>
-        <p:nvSpPr>
-          <p:cNvPr id="14" name="Text 12"/>
-          <p:cNvSpPr/>
-          <p:nvPr/>
-        </p:nvSpPr>
-        <p:spPr>
-          <a:xfrm>
-            <a:off x="8161814" y="2580641"/>
-            <a:ext cx="3104530" cy="238760"/>
-          </a:xfrm>
-          <a:prstGeom prst="rect">
-            <a:avLst/>
-          </a:prstGeom>
-          <a:noFill/>
-          <a:ln/>
-        </p:spPr>
-        <p:txBody>
-          <a:bodyPr wrap="square" lIns="0" tIns="0" rIns="0" bIns="0" rtlCol="0" anchor="t">
-            <a:normAutofit/>
-          </a:bodyPr>
-          <a:lstStyle/>
-          <a:p>
-            <a:pPr marL="0" indent="0" algn="l">
-              <a:lnSpc>
-                <a:spcPts val="1680"/>
-              </a:lnSpc>
-              <a:buNone/>
-            </a:pPr>
-            <a:r>
-              <a:rPr lang="en-US" sz="1400" b="1" dirty="0">
-                <a:solidFill>
-                  <a:srgbClr val="1B2A3A"/>
-                </a:solidFill>
-                <a:latin typeface="Arial" pitchFamily="34" charset="0"/>
-                <a:ea typeface="Arial" pitchFamily="34" charset="-122"/>
-                <a:cs typeface="Arial" pitchFamily="34" charset="-120"/>
-              </a:rPr>
-              <a:t>Descuento otorgado</a:t>
-            </a:r>
-            <a:endParaRPr lang="en-US" sz="1400" dirty="0"/>
-          </a:p>
-        </p:txBody>
-      </p:sp>
-      <p:sp>
-        <p:nvSpPr>
-          <p:cNvPr id="15" name="Text 13"/>
-          <p:cNvSpPr/>
-          <p:nvPr/>
-        </p:nvSpPr>
-        <p:spPr>
-          <a:xfrm>
-            <a:off x="8161814" y="2844800"/>
-            <a:ext cx="3104530" cy="238760"/>
-          </a:xfrm>
-          <a:prstGeom prst="rect">
-            <a:avLst/>
-          </a:prstGeom>
-          <a:noFill/>
-          <a:ln/>
-        </p:spPr>
-        <p:txBody>
-          <a:bodyPr wrap="square" lIns="0" tIns="0" rIns="0" bIns="0" rtlCol="0" anchor="t">
-            <a:normAutofit/>
-          </a:bodyPr>
-          <a:lstStyle/>
-          <a:p>
-            <a:pPr marL="0" indent="0" algn="l">
-              <a:lnSpc>
-                <a:spcPts val="1680"/>
-              </a:lnSpc>
-              <a:buNone/>
-            </a:pPr>
-            <a:r>
-              <a:rPr lang="en-US" sz="1200" dirty="0">
-                <a:solidFill>
-                  <a:srgbClr val="3E4A57"/>
-                </a:solidFill>
-                <a:latin typeface="Arial" pitchFamily="34" charset="0"/>
-                <a:ea typeface="Arial" pitchFamily="34" charset="-122"/>
-                <a:cs typeface="Arial" pitchFamily="34" charset="-120"/>
-              </a:rPr>
-              <a:t>Monto descuento / monto bruto</a:t>
-            </a:r>
-            <a:endParaRPr lang="en-US" sz="1200" dirty="0"/>
-          </a:p>
-        </p:txBody>
-      </p:sp>
-      <p:sp>
-        <p:nvSpPr>
-          <p:cNvPr id="16" name="Shape 14"/>
-          <p:cNvSpPr/>
-          <p:nvPr/>
-        </p:nvSpPr>
-        <p:spPr>
-          <a:xfrm>
-            <a:off x="812800" y="3627120"/>
-            <a:ext cx="3420507" cy="1361440"/>
-          </a:xfrm>
-          <a:prstGeom prst="roundRect">
-            <a:avLst>
-              <a:gd name="adj" fmla="val 5597"/>
-            </a:avLst>
-          </a:prstGeom>
-          <a:solidFill>
-            <a:srgbClr val="F7F6F2"/>
-          </a:solidFill>
-          <a:ln/>
-        </p:spPr>
-      </p:sp>
-      <p:sp>
-        <p:nvSpPr>
-          <p:cNvPr id="17" name="Text 15"/>
-          <p:cNvSpPr/>
-          <p:nvPr/>
-        </p:nvSpPr>
-        <p:spPr>
-          <a:xfrm>
-            <a:off x="1016000" y="3830320"/>
-            <a:ext cx="3104530" cy="452120"/>
-          </a:xfrm>
-          <a:prstGeom prst="rect">
-            <a:avLst/>
-          </a:prstGeom>
-          <a:noFill/>
-          <a:ln/>
-        </p:spPr>
-        <p:txBody>
-          <a:bodyPr wrap="square" lIns="0" tIns="0" rIns="0" bIns="0" rtlCol="0" anchor="t">
-            <a:normAutofit/>
-          </a:bodyPr>
-          <a:lstStyle/>
-          <a:p>
-            <a:pPr marL="0" indent="0" algn="l">
-              <a:lnSpc>
-                <a:spcPts val="3360"/>
-              </a:lnSpc>
-              <a:buNone/>
-            </a:pPr>
-            <a:r>
-              <a:rPr lang="en-US" sz="2400" b="1" dirty="0">
-                <a:solidFill>
-                  <a:srgbClr val="1B2A3A"/>
-                </a:solidFill>
-                <a:latin typeface="Arial" pitchFamily="34" charset="0"/>
-                <a:ea typeface="Arial" pitchFamily="34" charset="-122"/>
-                <a:cs typeface="Arial" pitchFamily="34" charset="-120"/>
-              </a:rPr>
-              <a:t>9 vendedores</a:t>
-            </a:r>
-            <a:endParaRPr lang="en-US" sz="2400" dirty="0"/>
-          </a:p>
-        </p:txBody>
-      </p:sp>
-      <p:sp>
-        <p:nvSpPr>
-          <p:cNvPr id="18" name="Text 16"/>
-          <p:cNvSpPr/>
-          <p:nvPr/>
-        </p:nvSpPr>
-        <p:spPr>
-          <a:xfrm>
-            <a:off x="1016000" y="4307841"/>
-            <a:ext cx="3104530" cy="238760"/>
-          </a:xfrm>
-          <a:prstGeom prst="rect">
-            <a:avLst/>
-          </a:prstGeom>
-          <a:noFill/>
-          <a:ln/>
-        </p:spPr>
-        <p:txBody>
-          <a:bodyPr wrap="square" lIns="0" tIns="0" rIns="0" bIns="0" rtlCol="0" anchor="t">
-            <a:normAutofit/>
-          </a:bodyPr>
-          <a:lstStyle/>
-          <a:p>
-            <a:pPr marL="0" indent="0" algn="l">
-              <a:lnSpc>
-                <a:spcPts val="1680"/>
-              </a:lnSpc>
-              <a:buNone/>
-            </a:pPr>
-            <a:r>
-              <a:rPr lang="en-US" sz="1400" b="1" dirty="0">
-                <a:solidFill>
-                  <a:srgbClr val="1B2A3A"/>
-                </a:solidFill>
-                <a:latin typeface="Arial" pitchFamily="34" charset="0"/>
-                <a:ea typeface="Arial" pitchFamily="34" charset="-122"/>
-                <a:cs typeface="Arial" pitchFamily="34" charset="-120"/>
-              </a:rPr>
-              <a:t>Ventas por </a:t>
-            </a:r>
-            <a:r>
-              <a:rPr lang="en-US" sz="1400" b="1" dirty="0" err="1">
-                <a:solidFill>
-                  <a:srgbClr val="1B2A3A"/>
-                </a:solidFill>
-                <a:latin typeface="Arial" pitchFamily="34" charset="0"/>
-                <a:ea typeface="Arial" pitchFamily="34" charset="-122"/>
-                <a:cs typeface="Arial" pitchFamily="34" charset="-120"/>
-              </a:rPr>
-              <a:t>empleado</a:t>
-            </a:r>
-            <a:endParaRPr lang="en-US" sz="1400" dirty="0"/>
-          </a:p>
-        </p:txBody>
-      </p:sp>
-      <p:sp>
-        <p:nvSpPr>
-          <p:cNvPr id="19" name="Text 17"/>
-          <p:cNvSpPr/>
-          <p:nvPr/>
-        </p:nvSpPr>
-        <p:spPr>
-          <a:xfrm>
-            <a:off x="1016000" y="4572000"/>
-            <a:ext cx="3104530" cy="238760"/>
-          </a:xfrm>
-          <a:prstGeom prst="rect">
-            <a:avLst/>
-          </a:prstGeom>
-          <a:noFill/>
-          <a:ln/>
-        </p:spPr>
-        <p:txBody>
-          <a:bodyPr wrap="square" lIns="0" tIns="0" rIns="0" bIns="0" rtlCol="0" anchor="t">
-            <a:normAutofit/>
-          </a:bodyPr>
-          <a:lstStyle/>
-          <a:p>
-            <a:pPr marL="0" indent="0" algn="l">
-              <a:lnSpc>
-                <a:spcPts val="1680"/>
-              </a:lnSpc>
-              <a:buNone/>
-            </a:pPr>
-            <a:r>
-              <a:rPr lang="en-US" sz="1200" dirty="0">
-                <a:solidFill>
-                  <a:srgbClr val="3E4A57"/>
-                </a:solidFill>
-                <a:latin typeface="Arial" pitchFamily="34" charset="0"/>
-                <a:ea typeface="Arial" pitchFamily="34" charset="-122"/>
-                <a:cs typeface="Arial" pitchFamily="34" charset="-120"/>
-              </a:rPr>
-              <a:t>Monto neto y participación</a:t>
-            </a:r>
-            <a:endParaRPr lang="en-US" sz="1200" dirty="0"/>
-          </a:p>
-        </p:txBody>
-      </p:sp>
-      <p:sp>
-        <p:nvSpPr>
-          <p:cNvPr id="20" name="Shape 18"/>
-          <p:cNvSpPr/>
-          <p:nvPr/>
-        </p:nvSpPr>
-        <p:spPr>
-          <a:xfrm>
-            <a:off x="4385707" y="3627120"/>
-            <a:ext cx="3420507" cy="1361440"/>
-          </a:xfrm>
-          <a:prstGeom prst="roundRect">
-            <a:avLst>
-              <a:gd name="adj" fmla="val 5597"/>
-            </a:avLst>
-          </a:prstGeom>
-          <a:solidFill>
-            <a:srgbClr val="1B2A3A"/>
-          </a:solidFill>
-          <a:ln/>
-        </p:spPr>
-      </p:sp>
-      <p:sp>
-        <p:nvSpPr>
-          <p:cNvPr id="21" name="Text 19"/>
-          <p:cNvSpPr/>
-          <p:nvPr/>
-        </p:nvSpPr>
-        <p:spPr>
-          <a:xfrm>
-            <a:off x="4588907" y="3830320"/>
-            <a:ext cx="3104530" cy="452120"/>
-          </a:xfrm>
-          <a:prstGeom prst="rect">
-            <a:avLst/>
-          </a:prstGeom>
-          <a:noFill/>
-          <a:ln/>
-        </p:spPr>
-        <p:txBody>
-          <a:bodyPr wrap="square" lIns="0" tIns="0" rIns="0" bIns="0" rtlCol="0" anchor="t">
-            <a:normAutofit/>
-          </a:bodyPr>
-          <a:lstStyle/>
-          <a:p>
-            <a:pPr marL="0" indent="0" algn="l">
-              <a:lnSpc>
-                <a:spcPts val="3360"/>
-              </a:lnSpc>
-              <a:buNone/>
-            </a:pPr>
-            <a:r>
-              <a:rPr lang="en-US" sz="2400" b="1" dirty="0">
-                <a:solidFill>
-                  <a:srgbClr val="E8A35A"/>
-                </a:solidFill>
-                <a:latin typeface="Arial" pitchFamily="34" charset="0"/>
-                <a:ea typeface="Arial" pitchFamily="34" charset="-122"/>
-                <a:cs typeface="Arial" pitchFamily="34" charset="-120"/>
-              </a:rPr>
-              <a:t>8,5 días</a:t>
-            </a:r>
-            <a:endParaRPr lang="en-US" sz="2400" dirty="0"/>
-          </a:p>
-        </p:txBody>
-      </p:sp>
-      <p:sp>
-        <p:nvSpPr>
-          <p:cNvPr id="22" name="Text 20"/>
-          <p:cNvSpPr/>
-          <p:nvPr/>
-        </p:nvSpPr>
-        <p:spPr>
-          <a:xfrm>
-            <a:off x="4588907" y="4307841"/>
-            <a:ext cx="3104530" cy="238760"/>
-          </a:xfrm>
-          <a:prstGeom prst="rect">
-            <a:avLst/>
-          </a:prstGeom>
-          <a:noFill/>
-          <a:ln/>
-        </p:spPr>
-        <p:txBody>
-          <a:bodyPr wrap="square" lIns="0" tIns="0" rIns="0" bIns="0" rtlCol="0" anchor="t">
-            <a:normAutofit/>
-          </a:bodyPr>
-          <a:lstStyle/>
-          <a:p>
-            <a:pPr marL="0" indent="0" algn="l">
-              <a:lnSpc>
-                <a:spcPts val="1680"/>
-              </a:lnSpc>
-              <a:buNone/>
-            </a:pPr>
-            <a:r>
-              <a:rPr lang="en-US" sz="1400" b="1" dirty="0">
-                <a:solidFill>
-                  <a:srgbClr val="F7F6F2"/>
-                </a:solidFill>
-                <a:latin typeface="Arial" pitchFamily="34" charset="0"/>
-                <a:ea typeface="Arial" pitchFamily="34" charset="-122"/>
-                <a:cs typeface="Arial" pitchFamily="34" charset="-120"/>
-              </a:rPr>
-              <a:t>Tiempo de despacho</a:t>
-            </a:r>
-            <a:endParaRPr lang="en-US" sz="1400" dirty="0"/>
-          </a:p>
-        </p:txBody>
-      </p:sp>
-      <p:sp>
-        <p:nvSpPr>
-          <p:cNvPr id="23" name="Text 21"/>
-          <p:cNvSpPr/>
-          <p:nvPr/>
-        </p:nvSpPr>
-        <p:spPr>
-          <a:xfrm>
-            <a:off x="4588907" y="4572000"/>
-            <a:ext cx="3104530" cy="238760"/>
-          </a:xfrm>
-          <a:prstGeom prst="rect">
-            <a:avLst/>
-          </a:prstGeom>
-          <a:noFill/>
-          <a:ln/>
-        </p:spPr>
-        <p:txBody>
-          <a:bodyPr wrap="square" lIns="0" tIns="0" rIns="0" bIns="0" rtlCol="0" anchor="t">
-            <a:normAutofit/>
-          </a:bodyPr>
-          <a:lstStyle/>
-          <a:p>
-            <a:pPr marL="0" indent="0" algn="l">
-              <a:lnSpc>
-                <a:spcPts val="1680"/>
-              </a:lnSpc>
-              <a:buNone/>
-            </a:pPr>
-            <a:r>
-              <a:rPr lang="en-US" sz="1200" dirty="0">
-                <a:solidFill>
-                  <a:srgbClr val="C9D3DD"/>
-                </a:solidFill>
-                <a:latin typeface="Arial" pitchFamily="34" charset="0"/>
-                <a:ea typeface="Arial" pitchFamily="34" charset="-122"/>
-                <a:cs typeface="Arial" pitchFamily="34" charset="-120"/>
-              </a:rPr>
-              <a:t>Promedio orden → envío</a:t>
-            </a:r>
-            <a:endParaRPr lang="en-US" sz="1200" dirty="0"/>
-          </a:p>
-        </p:txBody>
-      </p:sp>
-      <p:sp>
-        <p:nvSpPr>
-          <p:cNvPr id="24" name="Shape 22"/>
-          <p:cNvSpPr/>
-          <p:nvPr/>
-        </p:nvSpPr>
-        <p:spPr>
-          <a:xfrm>
-            <a:off x="7958614" y="3627120"/>
-            <a:ext cx="3420507" cy="1361440"/>
-          </a:xfrm>
-          <a:prstGeom prst="roundRect">
-            <a:avLst>
-              <a:gd name="adj" fmla="val 5597"/>
-            </a:avLst>
-          </a:prstGeom>
-          <a:solidFill>
-            <a:srgbClr val="1B2A3A"/>
-          </a:solidFill>
-          <a:ln/>
-        </p:spPr>
-      </p:sp>
-      <p:sp>
-        <p:nvSpPr>
-          <p:cNvPr id="25" name="Text 23"/>
-          <p:cNvSpPr/>
-          <p:nvPr/>
-        </p:nvSpPr>
-        <p:spPr>
-          <a:xfrm>
-            <a:off x="8161814" y="3830320"/>
-            <a:ext cx="3104530" cy="452120"/>
-          </a:xfrm>
-          <a:prstGeom prst="rect">
-            <a:avLst/>
-          </a:prstGeom>
-          <a:noFill/>
-          <a:ln/>
-        </p:spPr>
-        <p:txBody>
-          <a:bodyPr wrap="square" lIns="0" tIns="0" rIns="0" bIns="0" rtlCol="0" anchor="t">
-            <a:normAutofit/>
-          </a:bodyPr>
-          <a:lstStyle/>
-          <a:p>
-            <a:pPr marL="0" indent="0" algn="l">
-              <a:lnSpc>
-                <a:spcPts val="3360"/>
-              </a:lnSpc>
-              <a:buNone/>
-            </a:pPr>
-            <a:r>
-              <a:rPr lang="en-US" sz="2400" b="1" dirty="0">
-                <a:solidFill>
-                  <a:srgbClr val="E8A35A"/>
-                </a:solidFill>
-                <a:latin typeface="Arial" pitchFamily="34" charset="0"/>
-                <a:ea typeface="Arial" pitchFamily="34" charset="-122"/>
-                <a:cs typeface="Arial" pitchFamily="34" charset="-120"/>
-              </a:rPr>
-              <a:t>2,5 %</a:t>
-            </a:r>
-            <a:endParaRPr lang="en-US" sz="2400" dirty="0"/>
-          </a:p>
-        </p:txBody>
-      </p:sp>
-      <p:sp>
-        <p:nvSpPr>
-          <p:cNvPr id="26" name="Text 24"/>
-          <p:cNvSpPr/>
-          <p:nvPr/>
-        </p:nvSpPr>
-        <p:spPr>
-          <a:xfrm>
-            <a:off x="8161814" y="4307841"/>
-            <a:ext cx="3104530" cy="238760"/>
-          </a:xfrm>
-          <a:prstGeom prst="rect">
-            <a:avLst/>
-          </a:prstGeom>
-          <a:noFill/>
-          <a:ln/>
-        </p:spPr>
-        <p:txBody>
-          <a:bodyPr wrap="square" lIns="0" tIns="0" rIns="0" bIns="0" rtlCol="0" anchor="t">
-            <a:normAutofit/>
-          </a:bodyPr>
-          <a:lstStyle/>
-          <a:p>
-            <a:pPr marL="0" indent="0" algn="l">
-              <a:lnSpc>
-                <a:spcPts val="1680"/>
-              </a:lnSpc>
-              <a:buNone/>
-            </a:pPr>
-            <a:r>
-              <a:rPr lang="en-US" sz="1400" b="1" dirty="0">
-                <a:solidFill>
-                  <a:srgbClr val="F7F6F2"/>
-                </a:solidFill>
-                <a:latin typeface="Arial" pitchFamily="34" charset="0"/>
-                <a:ea typeface="Arial" pitchFamily="34" charset="-122"/>
-                <a:cs typeface="Arial" pitchFamily="34" charset="-120"/>
-              </a:rPr>
-              <a:t>Órdenes pendientes</a:t>
-            </a:r>
-            <a:endParaRPr lang="en-US" sz="1400" dirty="0"/>
-          </a:p>
-        </p:txBody>
-      </p:sp>
-      <p:sp>
-        <p:nvSpPr>
-          <p:cNvPr id="27" name="Text 25"/>
-          <p:cNvSpPr/>
-          <p:nvPr/>
-        </p:nvSpPr>
-        <p:spPr>
-          <a:xfrm>
-            <a:off x="8161814" y="4572000"/>
-            <a:ext cx="3104530" cy="238760"/>
-          </a:xfrm>
-          <a:prstGeom prst="rect">
-            <a:avLst/>
-          </a:prstGeom>
-          <a:noFill/>
-          <a:ln/>
-        </p:spPr>
-        <p:txBody>
-          <a:bodyPr wrap="square" lIns="0" tIns="0" rIns="0" bIns="0" rtlCol="0" anchor="t">
-            <a:normAutofit/>
-          </a:bodyPr>
-          <a:lstStyle/>
-          <a:p>
-            <a:pPr marL="0" indent="0" algn="l">
-              <a:lnSpc>
-                <a:spcPts val="1680"/>
-              </a:lnSpc>
-              <a:buNone/>
-            </a:pPr>
-            <a:r>
-              <a:rPr lang="en-US" sz="1200" dirty="0">
-                <a:solidFill>
-                  <a:srgbClr val="C9D3DD"/>
-                </a:solidFill>
-                <a:latin typeface="Arial" pitchFamily="34" charset="0"/>
-                <a:ea typeface="Arial" pitchFamily="34" charset="-122"/>
-                <a:cs typeface="Arial" pitchFamily="34" charset="-120"/>
-              </a:rPr>
-              <a:t>21 de 830 sin enviar</a:t>
-            </a:r>
-            <a:endParaRPr lang="en-US" sz="1200" dirty="0"/>
           </a:p>
         </p:txBody>
       </p:sp>
@@ -6735,6 +6268,1074 @@
               <a:t>4</a:t>
             </a:r>
             <a:endParaRPr lang="en-US" sz="1200" dirty="0"/>
+          </a:p>
+        </p:txBody>
+      </p:sp>
+      <p:sp>
+        <p:nvSpPr>
+          <p:cNvPr id="29" name="Rectangle 28"/>
+          <p:cNvSpPr/>
+          <p:nvPr/>
+        </p:nvSpPr>
+        <p:spPr>
+          <a:xfrm>
+            <a:off x="813816" y="1874519"/>
+            <a:ext cx="10561320" cy="530352"/>
+          </a:xfrm>
+          <a:prstGeom prst="rect">
+            <a:avLst/>
+          </a:prstGeom>
+          <a:solidFill>
+            <a:srgbClr val="EDEBE4"/>
+          </a:solidFill>
+          <a:ln>
+            <a:noFill/>
+          </a:ln>
+          <a:effectLst/>
+        </p:spPr>
+        <p:style>
+          <a:lnRef idx="1">
+            <a:schemeClr val="accent1"/>
+          </a:lnRef>
+          <a:fillRef idx="3">
+            <a:schemeClr val="accent1"/>
+          </a:fillRef>
+          <a:effectRef idx="2">
+            <a:schemeClr val="accent1"/>
+          </a:effectRef>
+          <a:fontRef idx="minor">
+            <a:schemeClr val="lt1"/>
+          </a:fontRef>
+        </p:style>
+        <p:txBody>
+          <a:bodyPr rtlCol="0" anchor="ctr"/>
+          <a:lstStyle/>
+          <a:p>
+            <a:pPr algn="ctr"/>
+            <a:endParaRPr/>
+          </a:p>
+        </p:txBody>
+      </p:sp>
+      <p:sp>
+        <p:nvSpPr>
+          <p:cNvPr id="30" name="TextBox 29"/>
+          <p:cNvSpPr txBox="1"/>
+          <p:nvPr/>
+        </p:nvSpPr>
+        <p:spPr>
+          <a:xfrm>
+            <a:off x="996696" y="2011679"/>
+            <a:ext cx="2651760" cy="365760"/>
+          </a:xfrm>
+          <a:prstGeom prst="rect">
+            <a:avLst/>
+          </a:prstGeom>
+          <a:noFill/>
+        </p:spPr>
+        <p:txBody>
+          <a:bodyPr wrap="square" lIns="0" tIns="0" rIns="0" bIns="0">
+            <a:spAutoFit/>
+          </a:bodyPr>
+          <a:lstStyle/>
+          <a:p>
+            <a:pPr algn="l">
+              <a:lnSpc>
+                <a:spcPct val="115000"/>
+              </a:lnSpc>
+              <a:spcAft>
+                <a:spcPts val="600"/>
+              </a:spcAft>
+            </a:pPr>
+            <a:r>
+              <a:rPr sz="1500" b="1">
+                <a:solidFill>
+                  <a:srgbClr val="1B2A3A"/>
+                </a:solidFill>
+                <a:latin typeface="Arial"/>
+              </a:rPr>
+              <a:t>Ventas netas</a:t>
+            </a:r>
+          </a:p>
+        </p:txBody>
+      </p:sp>
+      <p:sp>
+        <p:nvSpPr>
+          <p:cNvPr id="31" name="TextBox 30"/>
+          <p:cNvSpPr txBox="1"/>
+          <p:nvPr/>
+        </p:nvSpPr>
+        <p:spPr>
+          <a:xfrm>
+            <a:off x="3739896" y="2020824"/>
+            <a:ext cx="5120640" cy="365760"/>
+          </a:xfrm>
+          <a:prstGeom prst="rect">
+            <a:avLst/>
+          </a:prstGeom>
+          <a:noFill/>
+        </p:spPr>
+        <p:txBody>
+          <a:bodyPr wrap="square" lIns="0" tIns="0" rIns="0" bIns="0">
+            <a:spAutoFit/>
+          </a:bodyPr>
+          <a:lstStyle/>
+          <a:p>
+            <a:pPr algn="l">
+              <a:lnSpc>
+                <a:spcPct val="115000"/>
+              </a:lnSpc>
+              <a:spcAft>
+                <a:spcPts val="600"/>
+              </a:spcAft>
+            </a:pPr>
+            <a:r>
+              <a:rPr sz="1300" b="0">
+                <a:solidFill>
+                  <a:srgbClr val="A0521A"/>
+                </a:solidFill>
+                <a:latin typeface="Consolas"/>
+              </a:rPr>
+              <a:t>SUM(MontoNeto)</a:t>
+            </a:r>
+          </a:p>
+        </p:txBody>
+      </p:sp>
+      <p:sp>
+        <p:nvSpPr>
+          <p:cNvPr id="32" name="TextBox 31"/>
+          <p:cNvSpPr txBox="1"/>
+          <p:nvPr/>
+        </p:nvSpPr>
+        <p:spPr>
+          <a:xfrm>
+            <a:off x="8951976" y="2011679"/>
+            <a:ext cx="2286000" cy="365760"/>
+          </a:xfrm>
+          <a:prstGeom prst="rect">
+            <a:avLst/>
+          </a:prstGeom>
+          <a:noFill/>
+        </p:spPr>
+        <p:txBody>
+          <a:bodyPr wrap="square" lIns="0" tIns="0" rIns="0" bIns="0">
+            <a:spAutoFit/>
+          </a:bodyPr>
+          <a:lstStyle/>
+          <a:p>
+            <a:pPr algn="l">
+              <a:lnSpc>
+                <a:spcPct val="115000"/>
+              </a:lnSpc>
+              <a:spcAft>
+                <a:spcPts val="600"/>
+              </a:spcAft>
+            </a:pPr>
+            <a:r>
+              <a:rPr sz="1500" b="1">
+                <a:solidFill>
+                  <a:srgbClr val="1B2A3A"/>
+                </a:solidFill>
+                <a:latin typeface="Arial"/>
+              </a:rPr>
+              <a:t>$1,27 M (+120,7 %)</a:t>
+            </a:r>
+          </a:p>
+        </p:txBody>
+      </p:sp>
+      <p:sp>
+        <p:nvSpPr>
+          <p:cNvPr id="33" name="Rectangle 32"/>
+          <p:cNvSpPr/>
+          <p:nvPr/>
+        </p:nvSpPr>
+        <p:spPr>
+          <a:xfrm>
+            <a:off x="813816" y="2478024"/>
+            <a:ext cx="10561320" cy="530352"/>
+          </a:xfrm>
+          <a:prstGeom prst="rect">
+            <a:avLst/>
+          </a:prstGeom>
+          <a:solidFill>
+            <a:srgbClr val="EDEBE4"/>
+          </a:solidFill>
+          <a:ln>
+            <a:noFill/>
+          </a:ln>
+          <a:effectLst/>
+        </p:spPr>
+        <p:style>
+          <a:lnRef idx="1">
+            <a:schemeClr val="accent1"/>
+          </a:lnRef>
+          <a:fillRef idx="3">
+            <a:schemeClr val="accent1"/>
+          </a:fillRef>
+          <a:effectRef idx="2">
+            <a:schemeClr val="accent1"/>
+          </a:effectRef>
+          <a:fontRef idx="minor">
+            <a:schemeClr val="lt1"/>
+          </a:fontRef>
+        </p:style>
+        <p:txBody>
+          <a:bodyPr rtlCol="0" anchor="ctr"/>
+          <a:lstStyle/>
+          <a:p>
+            <a:pPr algn="ctr"/>
+            <a:endParaRPr/>
+          </a:p>
+        </p:txBody>
+      </p:sp>
+      <p:sp>
+        <p:nvSpPr>
+          <p:cNvPr id="34" name="TextBox 33"/>
+          <p:cNvSpPr txBox="1"/>
+          <p:nvPr/>
+        </p:nvSpPr>
+        <p:spPr>
+          <a:xfrm>
+            <a:off x="996696" y="2615184"/>
+            <a:ext cx="2651760" cy="365760"/>
+          </a:xfrm>
+          <a:prstGeom prst="rect">
+            <a:avLst/>
+          </a:prstGeom>
+          <a:noFill/>
+        </p:spPr>
+        <p:txBody>
+          <a:bodyPr wrap="square" lIns="0" tIns="0" rIns="0" bIns="0">
+            <a:spAutoFit/>
+          </a:bodyPr>
+          <a:lstStyle/>
+          <a:p>
+            <a:pPr algn="l">
+              <a:lnSpc>
+                <a:spcPct val="115000"/>
+              </a:lnSpc>
+              <a:spcAft>
+                <a:spcPts val="600"/>
+              </a:spcAft>
+            </a:pPr>
+            <a:r>
+              <a:rPr sz="1500" b="1">
+                <a:solidFill>
+                  <a:srgbClr val="1B2A3A"/>
+                </a:solidFill>
+                <a:latin typeface="Arial"/>
+              </a:rPr>
+              <a:t>Ticket promedio</a:t>
+            </a:r>
+          </a:p>
+        </p:txBody>
+      </p:sp>
+      <p:sp>
+        <p:nvSpPr>
+          <p:cNvPr id="35" name="TextBox 34"/>
+          <p:cNvSpPr txBox="1"/>
+          <p:nvPr/>
+        </p:nvSpPr>
+        <p:spPr>
+          <a:xfrm>
+            <a:off x="3739896" y="2624328"/>
+            <a:ext cx="5120640" cy="365760"/>
+          </a:xfrm>
+          <a:prstGeom prst="rect">
+            <a:avLst/>
+          </a:prstGeom>
+          <a:noFill/>
+        </p:spPr>
+        <p:txBody>
+          <a:bodyPr wrap="square" lIns="0" tIns="0" rIns="0" bIns="0">
+            <a:spAutoFit/>
+          </a:bodyPr>
+          <a:lstStyle/>
+          <a:p>
+            <a:pPr algn="l">
+              <a:lnSpc>
+                <a:spcPct val="115000"/>
+              </a:lnSpc>
+              <a:spcAft>
+                <a:spcPts val="600"/>
+              </a:spcAft>
+            </a:pPr>
+            <a:r>
+              <a:rPr sz="1300" b="0">
+                <a:solidFill>
+                  <a:srgbClr val="A0521A"/>
+                </a:solidFill>
+                <a:latin typeface="Consolas"/>
+              </a:rPr>
+              <a:t>SUM(MontoNeto) / COUNT(DISTINCT OrdenID)</a:t>
+            </a:r>
+          </a:p>
+        </p:txBody>
+      </p:sp>
+      <p:sp>
+        <p:nvSpPr>
+          <p:cNvPr id="36" name="TextBox 35"/>
+          <p:cNvSpPr txBox="1"/>
+          <p:nvPr/>
+        </p:nvSpPr>
+        <p:spPr>
+          <a:xfrm>
+            <a:off x="8951976" y="2615184"/>
+            <a:ext cx="2286000" cy="365760"/>
+          </a:xfrm>
+          <a:prstGeom prst="rect">
+            <a:avLst/>
+          </a:prstGeom>
+          <a:noFill/>
+        </p:spPr>
+        <p:txBody>
+          <a:bodyPr wrap="square" lIns="0" tIns="0" rIns="0" bIns="0">
+            <a:spAutoFit/>
+          </a:bodyPr>
+          <a:lstStyle/>
+          <a:p>
+            <a:pPr algn="l">
+              <a:lnSpc>
+                <a:spcPct val="115000"/>
+              </a:lnSpc>
+              <a:spcAft>
+                <a:spcPts val="600"/>
+              </a:spcAft>
+            </a:pPr>
+            <a:r>
+              <a:rPr sz="1500" b="1">
+                <a:solidFill>
+                  <a:srgbClr val="1B2A3A"/>
+                </a:solidFill>
+                <a:latin typeface="Arial"/>
+              </a:rPr>
+              <a:t>$1.525</a:t>
+            </a:r>
+          </a:p>
+        </p:txBody>
+      </p:sp>
+      <p:sp>
+        <p:nvSpPr>
+          <p:cNvPr id="37" name="Rectangle 36"/>
+          <p:cNvSpPr/>
+          <p:nvPr/>
+        </p:nvSpPr>
+        <p:spPr>
+          <a:xfrm>
+            <a:off x="813816" y="3081528"/>
+            <a:ext cx="10561320" cy="530352"/>
+          </a:xfrm>
+          <a:prstGeom prst="rect">
+            <a:avLst/>
+          </a:prstGeom>
+          <a:solidFill>
+            <a:srgbClr val="EDEBE4"/>
+          </a:solidFill>
+          <a:ln>
+            <a:noFill/>
+          </a:ln>
+          <a:effectLst/>
+        </p:spPr>
+        <p:style>
+          <a:lnRef idx="1">
+            <a:schemeClr val="accent1"/>
+          </a:lnRef>
+          <a:fillRef idx="3">
+            <a:schemeClr val="accent1"/>
+          </a:fillRef>
+          <a:effectRef idx="2">
+            <a:schemeClr val="accent1"/>
+          </a:effectRef>
+          <a:fontRef idx="minor">
+            <a:schemeClr val="lt1"/>
+          </a:fontRef>
+        </p:style>
+        <p:txBody>
+          <a:bodyPr rtlCol="0" anchor="ctr"/>
+          <a:lstStyle/>
+          <a:p>
+            <a:pPr algn="ctr"/>
+            <a:endParaRPr/>
+          </a:p>
+        </p:txBody>
+      </p:sp>
+      <p:sp>
+        <p:nvSpPr>
+          <p:cNvPr id="38" name="TextBox 37"/>
+          <p:cNvSpPr txBox="1"/>
+          <p:nvPr/>
+        </p:nvSpPr>
+        <p:spPr>
+          <a:xfrm>
+            <a:off x="996696" y="3218688"/>
+            <a:ext cx="2651760" cy="365760"/>
+          </a:xfrm>
+          <a:prstGeom prst="rect">
+            <a:avLst/>
+          </a:prstGeom>
+          <a:noFill/>
+        </p:spPr>
+        <p:txBody>
+          <a:bodyPr wrap="square" lIns="0" tIns="0" rIns="0" bIns="0">
+            <a:spAutoFit/>
+          </a:bodyPr>
+          <a:lstStyle/>
+          <a:p>
+            <a:pPr algn="l">
+              <a:lnSpc>
+                <a:spcPct val="115000"/>
+              </a:lnSpc>
+              <a:spcAft>
+                <a:spcPts val="600"/>
+              </a:spcAft>
+            </a:pPr>
+            <a:r>
+              <a:rPr sz="1500" b="1">
+                <a:solidFill>
+                  <a:srgbClr val="1B2A3A"/>
+                </a:solidFill>
+                <a:latin typeface="Arial"/>
+              </a:rPr>
+              <a:t>% de descuento</a:t>
+            </a:r>
+          </a:p>
+        </p:txBody>
+      </p:sp>
+      <p:sp>
+        <p:nvSpPr>
+          <p:cNvPr id="39" name="TextBox 38"/>
+          <p:cNvSpPr txBox="1"/>
+          <p:nvPr/>
+        </p:nvSpPr>
+        <p:spPr>
+          <a:xfrm>
+            <a:off x="3739896" y="3227832"/>
+            <a:ext cx="5120640" cy="365760"/>
+          </a:xfrm>
+          <a:prstGeom prst="rect">
+            <a:avLst/>
+          </a:prstGeom>
+          <a:noFill/>
+        </p:spPr>
+        <p:txBody>
+          <a:bodyPr wrap="square" lIns="0" tIns="0" rIns="0" bIns="0">
+            <a:spAutoFit/>
+          </a:bodyPr>
+          <a:lstStyle/>
+          <a:p>
+            <a:pPr algn="l">
+              <a:lnSpc>
+                <a:spcPct val="115000"/>
+              </a:lnSpc>
+              <a:spcAft>
+                <a:spcPts val="600"/>
+              </a:spcAft>
+            </a:pPr>
+            <a:r>
+              <a:rPr sz="1300" b="0">
+                <a:solidFill>
+                  <a:srgbClr val="A0521A"/>
+                </a:solidFill>
+                <a:latin typeface="Consolas"/>
+              </a:rPr>
+              <a:t>SUM(MontoDescuento) / SUM(MontoBruto)</a:t>
+            </a:r>
+          </a:p>
+        </p:txBody>
+      </p:sp>
+      <p:sp>
+        <p:nvSpPr>
+          <p:cNvPr id="40" name="TextBox 39"/>
+          <p:cNvSpPr txBox="1"/>
+          <p:nvPr/>
+        </p:nvSpPr>
+        <p:spPr>
+          <a:xfrm>
+            <a:off x="8951976" y="3218688"/>
+            <a:ext cx="2286000" cy="365760"/>
+          </a:xfrm>
+          <a:prstGeom prst="rect">
+            <a:avLst/>
+          </a:prstGeom>
+          <a:noFill/>
+        </p:spPr>
+        <p:txBody>
+          <a:bodyPr wrap="square" lIns="0" tIns="0" rIns="0" bIns="0">
+            <a:spAutoFit/>
+          </a:bodyPr>
+          <a:lstStyle/>
+          <a:p>
+            <a:pPr algn="l">
+              <a:lnSpc>
+                <a:spcPct val="115000"/>
+              </a:lnSpc>
+              <a:spcAft>
+                <a:spcPts val="600"/>
+              </a:spcAft>
+            </a:pPr>
+            <a:r>
+              <a:rPr sz="1500" b="1">
+                <a:solidFill>
+                  <a:srgbClr val="1B2A3A"/>
+                </a:solidFill>
+                <a:latin typeface="Arial"/>
+              </a:rPr>
+              <a:t>6,55 %</a:t>
+            </a:r>
+          </a:p>
+        </p:txBody>
+      </p:sp>
+      <p:sp>
+        <p:nvSpPr>
+          <p:cNvPr id="41" name="Rectangle 40"/>
+          <p:cNvSpPr/>
+          <p:nvPr/>
+        </p:nvSpPr>
+        <p:spPr>
+          <a:xfrm>
+            <a:off x="813816" y="3685032"/>
+            <a:ext cx="10561320" cy="530352"/>
+          </a:xfrm>
+          <a:prstGeom prst="rect">
+            <a:avLst/>
+          </a:prstGeom>
+          <a:solidFill>
+            <a:srgbClr val="EDEBE4"/>
+          </a:solidFill>
+          <a:ln>
+            <a:noFill/>
+          </a:ln>
+          <a:effectLst/>
+        </p:spPr>
+        <p:style>
+          <a:lnRef idx="1">
+            <a:schemeClr val="accent1"/>
+          </a:lnRef>
+          <a:fillRef idx="3">
+            <a:schemeClr val="accent1"/>
+          </a:fillRef>
+          <a:effectRef idx="2">
+            <a:schemeClr val="accent1"/>
+          </a:effectRef>
+          <a:fontRef idx="minor">
+            <a:schemeClr val="lt1"/>
+          </a:fontRef>
+        </p:style>
+        <p:txBody>
+          <a:bodyPr rtlCol="0" anchor="ctr"/>
+          <a:lstStyle/>
+          <a:p>
+            <a:pPr algn="ctr"/>
+            <a:endParaRPr/>
+          </a:p>
+        </p:txBody>
+      </p:sp>
+      <p:sp>
+        <p:nvSpPr>
+          <p:cNvPr id="42" name="TextBox 41"/>
+          <p:cNvSpPr txBox="1"/>
+          <p:nvPr/>
+        </p:nvSpPr>
+        <p:spPr>
+          <a:xfrm>
+            <a:off x="996696" y="3822192"/>
+            <a:ext cx="2651760" cy="365760"/>
+          </a:xfrm>
+          <a:prstGeom prst="rect">
+            <a:avLst/>
+          </a:prstGeom>
+          <a:noFill/>
+        </p:spPr>
+        <p:txBody>
+          <a:bodyPr wrap="square" lIns="0" tIns="0" rIns="0" bIns="0">
+            <a:spAutoFit/>
+          </a:bodyPr>
+          <a:lstStyle/>
+          <a:p>
+            <a:pPr algn="l">
+              <a:lnSpc>
+                <a:spcPct val="115000"/>
+              </a:lnSpc>
+              <a:spcAft>
+                <a:spcPts val="600"/>
+              </a:spcAft>
+            </a:pPr>
+            <a:r>
+              <a:rPr sz="1500" b="1">
+                <a:solidFill>
+                  <a:srgbClr val="1B2A3A"/>
+                </a:solidFill>
+                <a:latin typeface="Arial"/>
+              </a:rPr>
+              <a:t>Ventas por empleado</a:t>
+            </a:r>
+          </a:p>
+        </p:txBody>
+      </p:sp>
+      <p:sp>
+        <p:nvSpPr>
+          <p:cNvPr id="43" name="TextBox 42"/>
+          <p:cNvSpPr txBox="1"/>
+          <p:nvPr/>
+        </p:nvSpPr>
+        <p:spPr>
+          <a:xfrm>
+            <a:off x="3739896" y="3831336"/>
+            <a:ext cx="5120640" cy="365760"/>
+          </a:xfrm>
+          <a:prstGeom prst="rect">
+            <a:avLst/>
+          </a:prstGeom>
+          <a:noFill/>
+        </p:spPr>
+        <p:txBody>
+          <a:bodyPr wrap="square" lIns="0" tIns="0" rIns="0" bIns="0">
+            <a:spAutoFit/>
+          </a:bodyPr>
+          <a:lstStyle/>
+          <a:p>
+            <a:pPr algn="l">
+              <a:lnSpc>
+                <a:spcPct val="115000"/>
+              </a:lnSpc>
+              <a:spcAft>
+                <a:spcPts val="600"/>
+              </a:spcAft>
+            </a:pPr>
+            <a:r>
+              <a:rPr sz="1300" b="0">
+                <a:solidFill>
+                  <a:srgbClr val="A0521A"/>
+                </a:solidFill>
+                <a:latin typeface="Consolas"/>
+              </a:rPr>
+              <a:t>SUM(MontoNeto) ... GROUP BY Empleado</a:t>
+            </a:r>
+          </a:p>
+        </p:txBody>
+      </p:sp>
+      <p:sp>
+        <p:nvSpPr>
+          <p:cNvPr id="44" name="TextBox 43"/>
+          <p:cNvSpPr txBox="1"/>
+          <p:nvPr/>
+        </p:nvSpPr>
+        <p:spPr>
+          <a:xfrm>
+            <a:off x="8951976" y="3822192"/>
+            <a:ext cx="2286000" cy="365760"/>
+          </a:xfrm>
+          <a:prstGeom prst="rect">
+            <a:avLst/>
+          </a:prstGeom>
+          <a:noFill/>
+        </p:spPr>
+        <p:txBody>
+          <a:bodyPr wrap="square" lIns="0" tIns="0" rIns="0" bIns="0">
+            <a:spAutoFit/>
+          </a:bodyPr>
+          <a:lstStyle/>
+          <a:p>
+            <a:pPr algn="l">
+              <a:lnSpc>
+                <a:spcPct val="115000"/>
+              </a:lnSpc>
+              <a:spcAft>
+                <a:spcPts val="600"/>
+              </a:spcAft>
+            </a:pPr>
+            <a:r>
+              <a:rPr sz="1500" b="1">
+                <a:solidFill>
+                  <a:srgbClr val="1B2A3A"/>
+                </a:solidFill>
+                <a:latin typeface="Arial"/>
+              </a:rPr>
+              <a:t>9 vendedores</a:t>
+            </a:r>
+          </a:p>
+        </p:txBody>
+      </p:sp>
+      <p:sp>
+        <p:nvSpPr>
+          <p:cNvPr id="45" name="Rectangle 44"/>
+          <p:cNvSpPr/>
+          <p:nvPr/>
+        </p:nvSpPr>
+        <p:spPr>
+          <a:xfrm>
+            <a:off x="813816" y="4288536"/>
+            <a:ext cx="10561320" cy="530352"/>
+          </a:xfrm>
+          <a:prstGeom prst="rect">
+            <a:avLst/>
+          </a:prstGeom>
+          <a:solidFill>
+            <a:srgbClr val="1B2A3A"/>
+          </a:solidFill>
+          <a:ln>
+            <a:noFill/>
+          </a:ln>
+          <a:effectLst/>
+        </p:spPr>
+        <p:style>
+          <a:lnRef idx="1">
+            <a:schemeClr val="accent1"/>
+          </a:lnRef>
+          <a:fillRef idx="3">
+            <a:schemeClr val="accent1"/>
+          </a:fillRef>
+          <a:effectRef idx="2">
+            <a:schemeClr val="accent1"/>
+          </a:effectRef>
+          <a:fontRef idx="minor">
+            <a:schemeClr val="lt1"/>
+          </a:fontRef>
+        </p:style>
+        <p:txBody>
+          <a:bodyPr rtlCol="0" anchor="ctr"/>
+          <a:lstStyle/>
+          <a:p>
+            <a:pPr algn="ctr"/>
+            <a:endParaRPr/>
+          </a:p>
+        </p:txBody>
+      </p:sp>
+      <p:sp>
+        <p:nvSpPr>
+          <p:cNvPr id="46" name="TextBox 45"/>
+          <p:cNvSpPr txBox="1"/>
+          <p:nvPr/>
+        </p:nvSpPr>
+        <p:spPr>
+          <a:xfrm>
+            <a:off x="996696" y="4425696"/>
+            <a:ext cx="2651760" cy="365760"/>
+          </a:xfrm>
+          <a:prstGeom prst="rect">
+            <a:avLst/>
+          </a:prstGeom>
+          <a:noFill/>
+        </p:spPr>
+        <p:txBody>
+          <a:bodyPr wrap="square" lIns="0" tIns="0" rIns="0" bIns="0">
+            <a:spAutoFit/>
+          </a:bodyPr>
+          <a:lstStyle/>
+          <a:p>
+            <a:pPr algn="l">
+              <a:lnSpc>
+                <a:spcPct val="115000"/>
+              </a:lnSpc>
+              <a:spcAft>
+                <a:spcPts val="600"/>
+              </a:spcAft>
+            </a:pPr>
+            <a:r>
+              <a:rPr sz="1500" b="1">
+                <a:solidFill>
+                  <a:srgbClr val="F7F6F2"/>
+                </a:solidFill>
+                <a:latin typeface="Arial"/>
+              </a:rPr>
+              <a:t>Tiempo de despacho</a:t>
+            </a:r>
+          </a:p>
+        </p:txBody>
+      </p:sp>
+      <p:sp>
+        <p:nvSpPr>
+          <p:cNvPr id="47" name="TextBox 46"/>
+          <p:cNvSpPr txBox="1"/>
+          <p:nvPr/>
+        </p:nvSpPr>
+        <p:spPr>
+          <a:xfrm>
+            <a:off x="3739896" y="4434840"/>
+            <a:ext cx="5120640" cy="365760"/>
+          </a:xfrm>
+          <a:prstGeom prst="rect">
+            <a:avLst/>
+          </a:prstGeom>
+          <a:noFill/>
+        </p:spPr>
+        <p:txBody>
+          <a:bodyPr wrap="square" lIns="0" tIns="0" rIns="0" bIns="0">
+            <a:spAutoFit/>
+          </a:bodyPr>
+          <a:lstStyle/>
+          <a:p>
+            <a:pPr algn="l">
+              <a:lnSpc>
+                <a:spcPct val="115000"/>
+              </a:lnSpc>
+              <a:spcAft>
+                <a:spcPts val="600"/>
+              </a:spcAft>
+            </a:pPr>
+            <a:r>
+              <a:rPr sz="1300" b="0">
+                <a:solidFill>
+                  <a:srgbClr val="E8A35A"/>
+                </a:solidFill>
+                <a:latin typeface="Consolas"/>
+              </a:rPr>
+              <a:t>AVG(DiasDespacho) por orden enviada</a:t>
+            </a:r>
+          </a:p>
+        </p:txBody>
+      </p:sp>
+      <p:sp>
+        <p:nvSpPr>
+          <p:cNvPr id="48" name="TextBox 47"/>
+          <p:cNvSpPr txBox="1"/>
+          <p:nvPr/>
+        </p:nvSpPr>
+        <p:spPr>
+          <a:xfrm>
+            <a:off x="8951976" y="4425696"/>
+            <a:ext cx="2286000" cy="365760"/>
+          </a:xfrm>
+          <a:prstGeom prst="rect">
+            <a:avLst/>
+          </a:prstGeom>
+          <a:noFill/>
+        </p:spPr>
+        <p:txBody>
+          <a:bodyPr wrap="square" lIns="0" tIns="0" rIns="0" bIns="0">
+            <a:spAutoFit/>
+          </a:bodyPr>
+          <a:lstStyle/>
+          <a:p>
+            <a:pPr algn="l">
+              <a:lnSpc>
+                <a:spcPct val="115000"/>
+              </a:lnSpc>
+              <a:spcAft>
+                <a:spcPts val="600"/>
+              </a:spcAft>
+            </a:pPr>
+            <a:r>
+              <a:rPr sz="1500" b="1">
+                <a:solidFill>
+                  <a:srgbClr val="E8A35A"/>
+                </a:solidFill>
+                <a:latin typeface="Arial"/>
+              </a:rPr>
+              <a:t>8,5 días</a:t>
+            </a:r>
+          </a:p>
+        </p:txBody>
+      </p:sp>
+      <p:sp>
+        <p:nvSpPr>
+          <p:cNvPr id="49" name="Rectangle 48"/>
+          <p:cNvSpPr/>
+          <p:nvPr/>
+        </p:nvSpPr>
+        <p:spPr>
+          <a:xfrm>
+            <a:off x="813816" y="4892040"/>
+            <a:ext cx="10561320" cy="530352"/>
+          </a:xfrm>
+          <a:prstGeom prst="rect">
+            <a:avLst/>
+          </a:prstGeom>
+          <a:solidFill>
+            <a:srgbClr val="1B2A3A"/>
+          </a:solidFill>
+          <a:ln>
+            <a:noFill/>
+          </a:ln>
+          <a:effectLst/>
+        </p:spPr>
+        <p:style>
+          <a:lnRef idx="1">
+            <a:schemeClr val="accent1"/>
+          </a:lnRef>
+          <a:fillRef idx="3">
+            <a:schemeClr val="accent1"/>
+          </a:fillRef>
+          <a:effectRef idx="2">
+            <a:schemeClr val="accent1"/>
+          </a:effectRef>
+          <a:fontRef idx="minor">
+            <a:schemeClr val="lt1"/>
+          </a:fontRef>
+        </p:style>
+        <p:txBody>
+          <a:bodyPr rtlCol="0" anchor="ctr"/>
+          <a:lstStyle/>
+          <a:p>
+            <a:pPr algn="ctr"/>
+            <a:endParaRPr/>
+          </a:p>
+        </p:txBody>
+      </p:sp>
+      <p:sp>
+        <p:nvSpPr>
+          <p:cNvPr id="50" name="TextBox 49"/>
+          <p:cNvSpPr txBox="1"/>
+          <p:nvPr/>
+        </p:nvSpPr>
+        <p:spPr>
+          <a:xfrm>
+            <a:off x="996696" y="5029200"/>
+            <a:ext cx="2651760" cy="365760"/>
+          </a:xfrm>
+          <a:prstGeom prst="rect">
+            <a:avLst/>
+          </a:prstGeom>
+          <a:noFill/>
+        </p:spPr>
+        <p:txBody>
+          <a:bodyPr wrap="square" lIns="0" tIns="0" rIns="0" bIns="0">
+            <a:spAutoFit/>
+          </a:bodyPr>
+          <a:lstStyle/>
+          <a:p>
+            <a:pPr algn="l">
+              <a:lnSpc>
+                <a:spcPct val="115000"/>
+              </a:lnSpc>
+              <a:spcAft>
+                <a:spcPts val="600"/>
+              </a:spcAft>
+            </a:pPr>
+            <a:r>
+              <a:rPr sz="1500" b="1">
+                <a:solidFill>
+                  <a:srgbClr val="F7F6F2"/>
+                </a:solidFill>
+                <a:latin typeface="Arial"/>
+              </a:rPr>
+              <a:t>% órdenes pendientes</a:t>
+            </a:r>
+          </a:p>
+        </p:txBody>
+      </p:sp>
+      <p:sp>
+        <p:nvSpPr>
+          <p:cNvPr id="51" name="TextBox 50"/>
+          <p:cNvSpPr txBox="1"/>
+          <p:nvPr/>
+        </p:nvSpPr>
+        <p:spPr>
+          <a:xfrm>
+            <a:off x="3739896" y="5038344"/>
+            <a:ext cx="5120640" cy="365760"/>
+          </a:xfrm>
+          <a:prstGeom prst="rect">
+            <a:avLst/>
+          </a:prstGeom>
+          <a:noFill/>
+        </p:spPr>
+        <p:txBody>
+          <a:bodyPr wrap="square" lIns="0" tIns="0" rIns="0" bIns="0">
+            <a:spAutoFit/>
+          </a:bodyPr>
+          <a:lstStyle/>
+          <a:p>
+            <a:pPr algn="l">
+              <a:lnSpc>
+                <a:spcPct val="115000"/>
+              </a:lnSpc>
+              <a:spcAft>
+                <a:spcPts val="600"/>
+              </a:spcAft>
+            </a:pPr>
+            <a:r>
+              <a:rPr sz="1300" b="0">
+                <a:solidFill>
+                  <a:srgbClr val="E8A35A"/>
+                </a:solidFill>
+                <a:latin typeface="Consolas"/>
+              </a:rPr>
+              <a:t>órdenes con FechaEnvioKey = -1 / total</a:t>
+            </a:r>
+          </a:p>
+        </p:txBody>
+      </p:sp>
+      <p:sp>
+        <p:nvSpPr>
+          <p:cNvPr id="52" name="TextBox 51"/>
+          <p:cNvSpPr txBox="1"/>
+          <p:nvPr/>
+        </p:nvSpPr>
+        <p:spPr>
+          <a:xfrm>
+            <a:off x="8951976" y="5029200"/>
+            <a:ext cx="2286000" cy="365760"/>
+          </a:xfrm>
+          <a:prstGeom prst="rect">
+            <a:avLst/>
+          </a:prstGeom>
+          <a:noFill/>
+        </p:spPr>
+        <p:txBody>
+          <a:bodyPr wrap="square" lIns="0" tIns="0" rIns="0" bIns="0">
+            <a:spAutoFit/>
+          </a:bodyPr>
+          <a:lstStyle/>
+          <a:p>
+            <a:pPr algn="l">
+              <a:lnSpc>
+                <a:spcPct val="115000"/>
+              </a:lnSpc>
+              <a:spcAft>
+                <a:spcPts val="600"/>
+              </a:spcAft>
+            </a:pPr>
+            <a:r>
+              <a:rPr sz="1500" b="1">
+                <a:solidFill>
+                  <a:srgbClr val="E8A35A"/>
+                </a:solidFill>
+                <a:latin typeface="Arial"/>
+              </a:rPr>
+              <a:t>2,5 %</a:t>
+            </a:r>
+          </a:p>
+        </p:txBody>
+      </p:sp>
+      <p:sp>
+        <p:nvSpPr>
+          <p:cNvPr id="53" name="TextBox 52"/>
+          <p:cNvSpPr txBox="1"/>
+          <p:nvPr/>
+        </p:nvSpPr>
+        <p:spPr>
+          <a:xfrm>
+            <a:off x="813816" y="5541264"/>
+            <a:ext cx="10561320" cy="365760"/>
+          </a:xfrm>
+          <a:prstGeom prst="rect">
+            <a:avLst/>
+          </a:prstGeom>
+          <a:noFill/>
+        </p:spPr>
+        <p:txBody>
+          <a:bodyPr wrap="square" lIns="0" tIns="0" rIns="0" bIns="0">
+            <a:spAutoFit/>
+          </a:bodyPr>
+          <a:lstStyle/>
+          <a:p>
+            <a:pPr algn="l">
+              <a:lnSpc>
+                <a:spcPct val="115000"/>
+              </a:lnSpc>
+              <a:spcAft>
+                <a:spcPts val="600"/>
+              </a:spcAft>
+            </a:pPr>
+            <a:r>
+              <a:rPr sz="1200" b="0">
+                <a:solidFill>
+                  <a:srgbClr val="3E4A57"/>
+                </a:solidFill>
+                <a:latin typeface="Arial"/>
+              </a:rPr>
+              <a:t>Claros: resultado comercial · Oscuros: operación de envío</a:t>
+            </a:r>
           </a:p>
         </p:txBody>
       </p:sp>
@@ -6865,360 +7466,6 @@
       </p:sp>
       <p:sp>
         <p:nvSpPr>
-          <p:cNvPr id="4" name="Shape 2"/>
-          <p:cNvSpPr/>
-          <p:nvPr/>
-        </p:nvSpPr>
-        <p:spPr>
-          <a:xfrm>
-            <a:off x="812800" y="1963421"/>
-            <a:ext cx="5130800" cy="0"/>
-          </a:xfrm>
-          <a:prstGeom prst="line">
-            <a:avLst/>
-          </a:prstGeom>
-          <a:noFill/>
-          <a:ln w="25400">
-            <a:solidFill>
-              <a:srgbClr val="A0521A"/>
-            </a:solidFill>
-            <a:prstDash val="solid"/>
-          </a:ln>
-        </p:spPr>
-      </p:sp>
-      <p:sp>
-        <p:nvSpPr>
-          <p:cNvPr id="5" name="Text 3"/>
-          <p:cNvSpPr/>
-          <p:nvPr/>
-        </p:nvSpPr>
-        <p:spPr>
-          <a:xfrm>
-            <a:off x="812800" y="2179321"/>
-            <a:ext cx="5284724" cy="238760"/>
-          </a:xfrm>
-          <a:prstGeom prst="rect">
-            <a:avLst/>
-          </a:prstGeom>
-          <a:noFill/>
-          <a:ln/>
-        </p:spPr>
-        <p:txBody>
-          <a:bodyPr wrap="square" lIns="0" tIns="0" rIns="0" bIns="0" rtlCol="0" anchor="t">
-            <a:normAutofit/>
-          </a:bodyPr>
-          <a:lstStyle/>
-          <a:p>
-            <a:pPr marL="0" indent="0" algn="l">
-              <a:lnSpc>
-                <a:spcPts val="1680"/>
-              </a:lnSpc>
-              <a:buNone/>
-            </a:pPr>
-            <a:r>
-              <a:rPr lang="en-US" sz="1200" dirty="0">
-                <a:solidFill>
-                  <a:srgbClr val="A0521A"/>
-                </a:solidFill>
-                <a:latin typeface="Arial" pitchFamily="34" charset="0"/>
-                <a:ea typeface="Arial" pitchFamily="34" charset="-122"/>
-                <a:cs typeface="Arial" pitchFamily="34" charset="-120"/>
-              </a:rPr>
-              <a:t>Paso 1 · Proceso de negocio</a:t>
-            </a:r>
-            <a:endParaRPr lang="en-US" sz="1200" dirty="0"/>
-          </a:p>
-        </p:txBody>
-      </p:sp>
-      <p:sp>
-        <p:nvSpPr>
-          <p:cNvPr id="6" name="Text 4"/>
-          <p:cNvSpPr/>
-          <p:nvPr/>
-        </p:nvSpPr>
-        <p:spPr>
-          <a:xfrm>
-            <a:off x="812800" y="2519682"/>
-            <a:ext cx="5284724" cy="360680"/>
-          </a:xfrm>
-          <a:prstGeom prst="rect">
-            <a:avLst/>
-          </a:prstGeom>
-          <a:noFill/>
-          <a:ln/>
-        </p:spPr>
-        <p:txBody>
-          <a:bodyPr wrap="square" lIns="0" tIns="0" rIns="0" bIns="0" rtlCol="0" anchor="t">
-            <a:normAutofit/>
-          </a:bodyPr>
-          <a:lstStyle/>
-          <a:p>
-            <a:pPr marL="0" indent="0" algn="l">
-              <a:lnSpc>
-                <a:spcPts val="2640"/>
-              </a:lnSpc>
-              <a:buNone/>
-            </a:pPr>
-            <a:r>
-              <a:rPr lang="en-US" sz="2200" b="1" dirty="0">
-                <a:solidFill>
-                  <a:srgbClr val="1B2A3A"/>
-                </a:solidFill>
-                <a:latin typeface="Arial" pitchFamily="34" charset="0"/>
-                <a:ea typeface="Arial" pitchFamily="34" charset="-122"/>
-                <a:cs typeface="Arial" pitchFamily="34" charset="-120"/>
-              </a:rPr>
-              <a:t>Ventas</a:t>
-            </a:r>
-            <a:endParaRPr lang="en-US" sz="2200" dirty="0"/>
-          </a:p>
-        </p:txBody>
-      </p:sp>
-      <p:sp>
-        <p:nvSpPr>
-          <p:cNvPr id="7" name="Text 5"/>
-          <p:cNvSpPr/>
-          <p:nvPr/>
-        </p:nvSpPr>
-        <p:spPr>
-          <a:xfrm>
-            <a:off x="812800" y="2981961"/>
-            <a:ext cx="5284724" cy="1130300"/>
-          </a:xfrm>
-          <a:prstGeom prst="rect">
-            <a:avLst/>
-          </a:prstGeom>
-          <a:noFill/>
-          <a:ln/>
-        </p:spPr>
-        <p:txBody>
-          <a:bodyPr wrap="square" lIns="0" tIns="0" rIns="0" bIns="0" rtlCol="0" anchor="t">
-            <a:normAutofit/>
-          </a:bodyPr>
-          <a:lstStyle/>
-          <a:p>
-            <a:pPr marL="0" indent="0" algn="l">
-              <a:lnSpc>
-                <a:spcPts val="2175"/>
-              </a:lnSpc>
-              <a:buNone/>
-            </a:pPr>
-            <a:r>
-              <a:rPr lang="en-US" sz="1500" dirty="0">
-                <a:solidFill>
-                  <a:srgbClr val="3E4A57"/>
-                </a:solidFill>
-                <a:latin typeface="Arial" pitchFamily="34" charset="0"/>
-                <a:ea typeface="Arial" pitchFamily="34" charset="-122"/>
-                <a:cs typeface="Arial" pitchFamily="34" charset="-120"/>
-              </a:rPr>
-              <a:t>La toma y despacho de órdenes. Es el proceso que genera ingresos y el único con hechos medibles: cantidades, precios, descuentos y fechas. Todos los KPI salen de él, así que basta una tabla de hechos.</a:t>
-            </a:r>
-            <a:endParaRPr lang="en-US" sz="1500" dirty="0"/>
-          </a:p>
-        </p:txBody>
-      </p:sp>
-      <p:sp>
-        <p:nvSpPr>
-          <p:cNvPr id="8" name="Shape 6"/>
-          <p:cNvSpPr/>
-          <p:nvPr/>
-        </p:nvSpPr>
-        <p:spPr>
-          <a:xfrm>
-            <a:off x="6248400" y="1963421"/>
-            <a:ext cx="5130800" cy="0"/>
-          </a:xfrm>
-          <a:prstGeom prst="line">
-            <a:avLst/>
-          </a:prstGeom>
-          <a:noFill/>
-          <a:ln w="25400">
-            <a:solidFill>
-              <a:srgbClr val="A0521A"/>
-            </a:solidFill>
-            <a:prstDash val="solid"/>
-          </a:ln>
-        </p:spPr>
-      </p:sp>
-      <p:sp>
-        <p:nvSpPr>
-          <p:cNvPr id="9" name="Text 7"/>
-          <p:cNvSpPr/>
-          <p:nvPr/>
-        </p:nvSpPr>
-        <p:spPr>
-          <a:xfrm>
-            <a:off x="6248400" y="2179321"/>
-            <a:ext cx="5284724" cy="238760"/>
-          </a:xfrm>
-          <a:prstGeom prst="rect">
-            <a:avLst/>
-          </a:prstGeom>
-          <a:noFill/>
-          <a:ln/>
-        </p:spPr>
-        <p:txBody>
-          <a:bodyPr wrap="square" lIns="0" tIns="0" rIns="0" bIns="0" rtlCol="0" anchor="t">
-            <a:normAutofit/>
-          </a:bodyPr>
-          <a:lstStyle/>
-          <a:p>
-            <a:pPr marL="0" indent="0" algn="l">
-              <a:lnSpc>
-                <a:spcPts val="1680"/>
-              </a:lnSpc>
-              <a:buNone/>
-            </a:pPr>
-            <a:r>
-              <a:rPr lang="en-US" sz="1200" dirty="0">
-                <a:solidFill>
-                  <a:srgbClr val="A0521A"/>
-                </a:solidFill>
-                <a:latin typeface="Arial" pitchFamily="34" charset="0"/>
-                <a:ea typeface="Arial" pitchFamily="34" charset="-122"/>
-                <a:cs typeface="Arial" pitchFamily="34" charset="-120"/>
-              </a:rPr>
-              <a:t>Paso 2 · Granularidad</a:t>
-            </a:r>
-            <a:endParaRPr lang="en-US" sz="1200" dirty="0"/>
-          </a:p>
-        </p:txBody>
-      </p:sp>
-      <p:sp>
-        <p:nvSpPr>
-          <p:cNvPr id="10" name="Text 8"/>
-          <p:cNvSpPr/>
-          <p:nvPr/>
-        </p:nvSpPr>
-        <p:spPr>
-          <a:xfrm>
-            <a:off x="6248400" y="2519682"/>
-            <a:ext cx="5284724" cy="360680"/>
-          </a:xfrm>
-          <a:prstGeom prst="rect">
-            <a:avLst/>
-          </a:prstGeom>
-          <a:noFill/>
-          <a:ln/>
-        </p:spPr>
-        <p:txBody>
-          <a:bodyPr wrap="square" lIns="0" tIns="0" rIns="0" bIns="0" rtlCol="0" anchor="t">
-            <a:normAutofit/>
-          </a:bodyPr>
-          <a:lstStyle/>
-          <a:p>
-            <a:pPr marL="0" indent="0" algn="l">
-              <a:lnSpc>
-                <a:spcPts val="2640"/>
-              </a:lnSpc>
-              <a:buNone/>
-            </a:pPr>
-            <a:r>
-              <a:rPr lang="en-US" sz="2200" b="1" dirty="0">
-                <a:solidFill>
-                  <a:srgbClr val="1B2A3A"/>
-                </a:solidFill>
-                <a:latin typeface="Arial" pitchFamily="34" charset="0"/>
-                <a:ea typeface="Arial" pitchFamily="34" charset="-122"/>
-                <a:cs typeface="Arial" pitchFamily="34" charset="-120"/>
-              </a:rPr>
-              <a:t>Una fila por </a:t>
-            </a:r>
-            <a:r>
-              <a:rPr lang="en-US" sz="2200" b="1" dirty="0" err="1">
-                <a:solidFill>
-                  <a:srgbClr val="1B2A3A"/>
-                </a:solidFill>
-                <a:latin typeface="Arial" pitchFamily="34" charset="0"/>
-                <a:ea typeface="Arial" pitchFamily="34" charset="-122"/>
-                <a:cs typeface="Arial" pitchFamily="34" charset="-120"/>
-              </a:rPr>
-              <a:t>producto</a:t>
-            </a:r>
-            <a:r>
-              <a:rPr lang="en-US" sz="2200" b="1" dirty="0">
-                <a:solidFill>
-                  <a:srgbClr val="1B2A3A"/>
-                </a:solidFill>
-                <a:latin typeface="Arial" pitchFamily="34" charset="0"/>
-                <a:ea typeface="Arial" pitchFamily="34" charset="-122"/>
-                <a:cs typeface="Arial" pitchFamily="34" charset="-120"/>
-              </a:rPr>
-              <a:t> en una orden</a:t>
-            </a:r>
-            <a:endParaRPr lang="en-US" sz="2200" dirty="0"/>
-          </a:p>
-        </p:txBody>
-      </p:sp>
-      <p:sp>
-        <p:nvSpPr>
-          <p:cNvPr id="11" name="Text 9"/>
-          <p:cNvSpPr/>
-          <p:nvPr/>
-        </p:nvSpPr>
-        <p:spPr>
-          <a:xfrm>
-            <a:off x="6248400" y="2981961"/>
-            <a:ext cx="5284724" cy="854075"/>
-          </a:xfrm>
-          <a:prstGeom prst="rect">
-            <a:avLst/>
-          </a:prstGeom>
-          <a:noFill/>
-          <a:ln/>
-        </p:spPr>
-        <p:txBody>
-          <a:bodyPr wrap="square" lIns="0" tIns="0" rIns="0" bIns="0" rtlCol="0" anchor="t">
-            <a:normAutofit/>
-          </a:bodyPr>
-          <a:lstStyle/>
-          <a:p>
-            <a:pPr marL="0" indent="0" algn="l">
-              <a:lnSpc>
-                <a:spcPts val="2175"/>
-              </a:lnSpc>
-              <a:buNone/>
-            </a:pPr>
-            <a:r>
-              <a:rPr lang="en-US" sz="1500" dirty="0">
-                <a:solidFill>
-                  <a:srgbClr val="3E4A57"/>
-                </a:solidFill>
-                <a:latin typeface="Arial" pitchFamily="34" charset="0"/>
-                <a:ea typeface="Arial" pitchFamily="34" charset="-122"/>
-                <a:cs typeface="Arial" pitchFamily="34" charset="-120"/>
-              </a:rPr>
-              <a:t>Equivale a una línea de DetalleOrden. Es el nivel más fino: desde ahí se agrega a orden, </a:t>
-            </a:r>
-            <a:r>
-              <a:rPr lang="en-US" sz="1500" dirty="0" err="1">
-                <a:solidFill>
-                  <a:srgbClr val="3E4A57"/>
-                </a:solidFill>
-                <a:latin typeface="Arial" pitchFamily="34" charset="0"/>
-                <a:ea typeface="Arial" pitchFamily="34" charset="-122"/>
-                <a:cs typeface="Arial" pitchFamily="34" charset="-120"/>
-              </a:rPr>
-              <a:t>cliente</a:t>
-            </a:r>
-            <a:r>
-              <a:rPr lang="en-US" sz="1500" dirty="0">
-                <a:solidFill>
-                  <a:srgbClr val="3E4A57"/>
-                </a:solidFill>
-                <a:latin typeface="Arial" pitchFamily="34" charset="0"/>
-                <a:ea typeface="Arial" pitchFamily="34" charset="-122"/>
-                <a:cs typeface="Arial" pitchFamily="34" charset="-120"/>
-              </a:rPr>
-              <a:t> o mes, pero no al revés. Coincide 1 a 1 con el origen: 2.155 filas esperadas.</a:t>
-            </a:r>
-            <a:endParaRPr lang="en-US" sz="1500" dirty="0"/>
-          </a:p>
-        </p:txBody>
-      </p:sp>
-      <p:sp>
-        <p:nvSpPr>
           <p:cNvPr id="12" name="Text 10"/>
           <p:cNvSpPr/>
           <p:nvPr/>
@@ -7258,6 +7505,387 @@
               <a:t>5</a:t>
             </a:r>
             <a:endParaRPr lang="en-US" sz="1200" dirty="0"/>
+          </a:p>
+        </p:txBody>
+      </p:sp>
+      <p:sp>
+        <p:nvSpPr>
+          <p:cNvPr id="13" name="TextBox 12"/>
+          <p:cNvSpPr txBox="1"/>
+          <p:nvPr/>
+        </p:nvSpPr>
+        <p:spPr>
+          <a:xfrm>
+            <a:off x="813816" y="1874519"/>
+            <a:ext cx="5029200" cy="274320"/>
+          </a:xfrm>
+          <a:prstGeom prst="rect">
+            <a:avLst/>
+          </a:prstGeom>
+          <a:noFill/>
+        </p:spPr>
+        <p:txBody>
+          <a:bodyPr wrap="square" lIns="0" tIns="0" rIns="0" bIns="0">
+            <a:spAutoFit/>
+          </a:bodyPr>
+          <a:lstStyle/>
+          <a:p>
+            <a:pPr algn="l">
+              <a:lnSpc>
+                <a:spcPct val="115000"/>
+              </a:lnSpc>
+              <a:spcAft>
+                <a:spcPts val="600"/>
+              </a:spcAft>
+            </a:pPr>
+            <a:r>
+              <a:rPr sz="1200" b="1">
+                <a:solidFill>
+                  <a:srgbClr val="A0521A"/>
+                </a:solidFill>
+                <a:latin typeface="Arial"/>
+              </a:rPr>
+              <a:t>PASO 1 · PROCESO DE NEGOCIO</a:t>
+            </a:r>
+          </a:p>
+        </p:txBody>
+      </p:sp>
+      <p:sp>
+        <p:nvSpPr>
+          <p:cNvPr id="14" name="TextBox 13"/>
+          <p:cNvSpPr txBox="1"/>
+          <p:nvPr/>
+        </p:nvSpPr>
+        <p:spPr>
+          <a:xfrm>
+            <a:off x="813816" y="2240279"/>
+            <a:ext cx="4846320" cy="548640"/>
+          </a:xfrm>
+          <a:prstGeom prst="rect">
+            <a:avLst/>
+          </a:prstGeom>
+          <a:noFill/>
+        </p:spPr>
+        <p:txBody>
+          <a:bodyPr wrap="square" lIns="0" tIns="0" rIns="0" bIns="0">
+            <a:spAutoFit/>
+          </a:bodyPr>
+          <a:lstStyle/>
+          <a:p>
+            <a:pPr algn="l">
+              <a:lnSpc>
+                <a:spcPct val="115000"/>
+              </a:lnSpc>
+              <a:spcAft>
+                <a:spcPts val="600"/>
+              </a:spcAft>
+            </a:pPr>
+            <a:r>
+              <a:rPr sz="2800" b="1">
+                <a:solidFill>
+                  <a:srgbClr val="1B2A3A"/>
+                </a:solidFill>
+                <a:latin typeface="Georgia"/>
+              </a:rPr>
+              <a:t>Ventas</a:t>
+            </a:r>
+          </a:p>
+        </p:txBody>
+      </p:sp>
+      <p:sp>
+        <p:nvSpPr>
+          <p:cNvPr id="15" name="TextBox 14"/>
+          <p:cNvSpPr txBox="1"/>
+          <p:nvPr/>
+        </p:nvSpPr>
+        <p:spPr>
+          <a:xfrm>
+            <a:off x="813816" y="2926079"/>
+            <a:ext cx="4846320" cy="1828800"/>
+          </a:xfrm>
+          <a:prstGeom prst="rect">
+            <a:avLst/>
+          </a:prstGeom>
+          <a:noFill/>
+        </p:spPr>
+        <p:txBody>
+          <a:bodyPr wrap="square" lIns="0" tIns="0" rIns="0" bIns="0">
+            <a:spAutoFit/>
+          </a:bodyPr>
+          <a:lstStyle/>
+          <a:p>
+            <a:pPr algn="l">
+              <a:lnSpc>
+                <a:spcPct val="115000"/>
+              </a:lnSpc>
+              <a:spcAft>
+                <a:spcPts val="600"/>
+              </a:spcAft>
+            </a:pPr>
+            <a:r>
+              <a:rPr sz="1600" b="0">
+                <a:solidFill>
+                  <a:srgbClr val="3E4A57"/>
+                </a:solidFill>
+                <a:latin typeface="Arial"/>
+              </a:rPr>
+              <a:t>La toma y despacho de órdenes.</a:t>
+            </a:r>
+          </a:p>
+          <a:p>
+            <a:pPr algn="l">
+              <a:lnSpc>
+                <a:spcPct val="115000"/>
+              </a:lnSpc>
+              <a:spcAft>
+                <a:spcPts val="600"/>
+              </a:spcAft>
+            </a:pPr>
+            <a:r>
+              <a:rPr sz="1600" b="0">
+                <a:solidFill>
+                  <a:srgbClr val="3E4A57"/>
+                </a:solidFill>
+                <a:latin typeface="Arial"/>
+              </a:rPr>
+              <a:t>Es el único proceso con hechos medibles y todos los KPI salen de él: basta una tabla de hechos.</a:t>
+            </a:r>
+          </a:p>
+        </p:txBody>
+      </p:sp>
+      <p:sp>
+        <p:nvSpPr>
+          <p:cNvPr id="16" name="TextBox 15"/>
+          <p:cNvSpPr txBox="1"/>
+          <p:nvPr/>
+        </p:nvSpPr>
+        <p:spPr>
+          <a:xfrm>
+            <a:off x="6254496" y="1874519"/>
+            <a:ext cx="5029200" cy="274320"/>
+          </a:xfrm>
+          <a:prstGeom prst="rect">
+            <a:avLst/>
+          </a:prstGeom>
+          <a:noFill/>
+        </p:spPr>
+        <p:txBody>
+          <a:bodyPr wrap="square" lIns="0" tIns="0" rIns="0" bIns="0">
+            <a:spAutoFit/>
+          </a:bodyPr>
+          <a:lstStyle/>
+          <a:p>
+            <a:pPr algn="l">
+              <a:lnSpc>
+                <a:spcPct val="115000"/>
+              </a:lnSpc>
+              <a:spcAft>
+                <a:spcPts val="600"/>
+              </a:spcAft>
+            </a:pPr>
+            <a:r>
+              <a:rPr sz="1200" b="1">
+                <a:solidFill>
+                  <a:srgbClr val="A0521A"/>
+                </a:solidFill>
+                <a:latin typeface="Arial"/>
+              </a:rPr>
+              <a:t>PASO 2 · GRANULARIDAD</a:t>
+            </a:r>
+          </a:p>
+        </p:txBody>
+      </p:sp>
+      <p:sp>
+        <p:nvSpPr>
+          <p:cNvPr id="17" name="TextBox 16"/>
+          <p:cNvSpPr txBox="1"/>
+          <p:nvPr/>
+        </p:nvSpPr>
+        <p:spPr>
+          <a:xfrm>
+            <a:off x="6254496" y="2240279"/>
+            <a:ext cx="5120640" cy="548640"/>
+          </a:xfrm>
+          <a:prstGeom prst="rect">
+            <a:avLst/>
+          </a:prstGeom>
+          <a:noFill/>
+        </p:spPr>
+        <p:txBody>
+          <a:bodyPr wrap="square" lIns="0" tIns="0" rIns="0" bIns="0">
+            <a:spAutoFit/>
+          </a:bodyPr>
+          <a:lstStyle/>
+          <a:p>
+            <a:pPr algn="l">
+              <a:lnSpc>
+                <a:spcPct val="115000"/>
+              </a:lnSpc>
+              <a:spcAft>
+                <a:spcPts val="600"/>
+              </a:spcAft>
+            </a:pPr>
+            <a:r>
+              <a:rPr sz="2000" b="1">
+                <a:solidFill>
+                  <a:srgbClr val="1B2A3A"/>
+                </a:solidFill>
+                <a:latin typeface="Arial"/>
+              </a:rPr>
+              <a:t>Una fila por producto en una orden</a:t>
+            </a:r>
+          </a:p>
+        </p:txBody>
+      </p:sp>
+      <p:sp>
+        <p:nvSpPr>
+          <p:cNvPr id="18" name="Rounded Rectangle 17"/>
+          <p:cNvSpPr/>
+          <p:nvPr/>
+        </p:nvSpPr>
+        <p:spPr>
+          <a:xfrm>
+            <a:off x="6254496" y="2926079"/>
+            <a:ext cx="5120640" cy="1325880"/>
+          </a:xfrm>
+          <a:prstGeom prst="roundRect">
+            <a:avLst>
+              <a:gd name="adj" fmla="val 4000"/>
+            </a:avLst>
+          </a:prstGeom>
+          <a:solidFill>
+            <a:srgbClr val="1B2A3A"/>
+          </a:solidFill>
+          <a:ln>
+            <a:noFill/>
+          </a:ln>
+          <a:effectLst/>
+        </p:spPr>
+        <p:style>
+          <a:lnRef idx="1">
+            <a:schemeClr val="accent1"/>
+          </a:lnRef>
+          <a:fillRef idx="3">
+            <a:schemeClr val="accent1"/>
+          </a:fillRef>
+          <a:effectRef idx="2">
+            <a:schemeClr val="accent1"/>
+          </a:effectRef>
+          <a:fontRef idx="minor">
+            <a:schemeClr val="lt1"/>
+          </a:fontRef>
+        </p:style>
+        <p:txBody>
+          <a:bodyPr wrap="square" lIns="201168" tIns="146304" rIns="201168" bIns="146304" rtlCol="0" anchor="t"/>
+          <a:lstStyle/>
+          <a:p>
+            <a:pPr algn="l">
+              <a:lnSpc>
+                <a:spcPct val="110000"/>
+              </a:lnSpc>
+            </a:pPr>
+            <a:r>
+              <a:rPr sz="1300">
+                <a:solidFill>
+                  <a:srgbClr val="E8A35A"/>
+                </a:solidFill>
+                <a:latin typeface="Consolas"/>
+              </a:rPr>
+              <a:t>-- El grano, escrito como clave primaria</a:t>
+            </a:r>
+          </a:p>
+          <a:p>
+            <a:pPr algn="l">
+              <a:lnSpc>
+                <a:spcPct val="110000"/>
+              </a:lnSpc>
+            </a:pPr>
+            <a:r>
+              <a:rPr sz="1300">
+                <a:solidFill>
+                  <a:srgbClr val="E6E1D6"/>
+                </a:solidFill>
+                <a:latin typeface="Consolas"/>
+              </a:rPr>
+              <a:t>CONSTRAINT PK_FactVentas</a:t>
+            </a:r>
+          </a:p>
+          <a:p>
+            <a:pPr algn="l">
+              <a:lnSpc>
+                <a:spcPct val="110000"/>
+              </a:lnSpc>
+            </a:pPr>
+            <a:r>
+              <a:rPr sz="1300">
+                <a:solidFill>
+                  <a:srgbClr val="E6E1D6"/>
+                </a:solidFill>
+                <a:latin typeface="Consolas"/>
+              </a:rPr>
+              <a:t>  PRIMARY KEY (OrdenID, ProductoKey)</a:t>
+            </a:r>
+          </a:p>
+        </p:txBody>
+      </p:sp>
+      <p:sp>
+        <p:nvSpPr>
+          <p:cNvPr id="19" name="TextBox 18"/>
+          <p:cNvSpPr txBox="1"/>
+          <p:nvPr/>
+        </p:nvSpPr>
+        <p:spPr>
+          <a:xfrm>
+            <a:off x="6254496" y="4434840"/>
+            <a:ext cx="5120640" cy="1097280"/>
+          </a:xfrm>
+          <a:prstGeom prst="rect">
+            <a:avLst/>
+          </a:prstGeom>
+          <a:noFill/>
+        </p:spPr>
+        <p:txBody>
+          <a:bodyPr wrap="square" lIns="0" tIns="0" rIns="0" bIns="0">
+            <a:spAutoFit/>
+          </a:bodyPr>
+          <a:lstStyle/>
+          <a:p>
+            <a:pPr algn="l">
+              <a:lnSpc>
+                <a:spcPct val="115000"/>
+              </a:lnSpc>
+              <a:spcAft>
+                <a:spcPts val="600"/>
+              </a:spcAft>
+            </a:pPr>
+            <a:r>
+              <a:rPr sz="1500" b="0">
+                <a:solidFill>
+                  <a:srgbClr val="3E4A57"/>
+                </a:solidFill>
+                <a:latin typeface="Arial"/>
+              </a:rPr>
+              <a:t>1 línea de DetalleOrden = 1 fila de FactVentas (2.155).</a:t>
+            </a:r>
+          </a:p>
+          <a:p>
+            <a:pPr algn="l">
+              <a:lnSpc>
+                <a:spcPct val="115000"/>
+              </a:lnSpc>
+              <a:spcAft>
+                <a:spcPts val="600"/>
+              </a:spcAft>
+            </a:pPr>
+            <a:r>
+              <a:rPr sz="1500" b="0">
+                <a:solidFill>
+                  <a:srgbClr val="3E4A57"/>
+                </a:solidFill>
+                <a:latin typeface="Arial"/>
+              </a:rPr>
+              <a:t>Es el nivel más fino: desde ahí se agrega a orden, cliente o mes.</a:t>
+            </a:r>
           </a:p>
         </p:txBody>
       </p:sp>
@@ -7388,1950 +8016,6 @@
       </p:sp>
       <p:sp>
         <p:nvSpPr>
-          <p:cNvPr id="4" name="Text 2"/>
-          <p:cNvSpPr/>
-          <p:nvPr/>
-        </p:nvSpPr>
-        <p:spPr>
-          <a:xfrm>
-            <a:off x="812800" y="1849121"/>
-            <a:ext cx="5284724" cy="238760"/>
-          </a:xfrm>
-          <a:prstGeom prst="rect">
-            <a:avLst/>
-          </a:prstGeom>
-          <a:noFill/>
-          <a:ln/>
-        </p:spPr>
-        <p:txBody>
-          <a:bodyPr wrap="square" lIns="0" tIns="0" rIns="0" bIns="0" rtlCol="0" anchor="t">
-            <a:normAutofit/>
-          </a:bodyPr>
-          <a:lstStyle/>
-          <a:p>
-            <a:pPr marL="0" indent="0" algn="l">
-              <a:lnSpc>
-                <a:spcPts val="1680"/>
-              </a:lnSpc>
-              <a:buNone/>
-            </a:pPr>
-            <a:r>
-              <a:rPr lang="en-US" sz="1200" dirty="0">
-                <a:solidFill>
-                  <a:srgbClr val="A0521A"/>
-                </a:solidFill>
-                <a:latin typeface="Arial" pitchFamily="34" charset="0"/>
-                <a:ea typeface="Arial" pitchFamily="34" charset="-122"/>
-                <a:cs typeface="Arial" pitchFamily="34" charset="-120"/>
-              </a:rPr>
-              <a:t>Paso 3 · Dimensiones</a:t>
-            </a:r>
-            <a:endParaRPr lang="en-US" sz="1200" dirty="0"/>
-          </a:p>
-        </p:txBody>
-      </p:sp>
-      <p:graphicFrame>
-        <p:nvGraphicFramePr>
-          <p:cNvPr id="5" name="Table 0"/>
-          <p:cNvGraphicFramePr>
-            <a:graphicFrameLocks noGrp="1"/>
-          </p:cNvGraphicFramePr>
-          <p:nvPr>
-            <p:extLst>
-              <p:ext uri="{D42A27DB-BD31-4B8C-83A1-F6EECF244321}">
-                <p14:modId xmlns:p14="http://schemas.microsoft.com/office/powerpoint/2010/main" val="1579011935"/>
-              </p:ext>
-            </p:extLst>
-          </p:nvPr>
-        </p:nvGraphicFramePr>
-        <p:xfrm>
-          <a:off x="822960" y="2174242"/>
-          <a:ext cx="5120640" cy="2141220"/>
-        </p:xfrm>
-        <a:graphic>
-          <a:graphicData uri="http://schemas.openxmlformats.org/drawingml/2006/table">
-            <a:tbl>
-              <a:tblPr/>
-              <a:tblGrid>
-                <a:gridCol w="2150669">
-                  <a:extLst>
-                    <a:ext uri="{9D8B030D-6E8A-4147-A177-3AD203B41FA5}">
-                      <a16:colId xmlns:a16="http://schemas.microsoft.com/office/drawing/2014/main" val="20000"/>
-                    </a:ext>
-                  </a:extLst>
-                </a:gridCol>
-                <a:gridCol w="2969971">
-                  <a:extLst>
-                    <a:ext uri="{9D8B030D-6E8A-4147-A177-3AD203B41FA5}">
-                      <a16:colId xmlns:a16="http://schemas.microsoft.com/office/drawing/2014/main" val="20001"/>
-                    </a:ext>
-                  </a:extLst>
-                </a:gridCol>
-              </a:tblGrid>
-              <a:tr h="356870">
-                <a:tc>
-                  <a:txBody>
-                    <a:bodyPr/>
-                    <a:lstStyle/>
-                    <a:p>
-                      <a:pPr marL="0" indent="0">
-                        <a:lnSpc>
-                          <a:spcPts val="1820"/>
-                        </a:lnSpc>
-                        <a:buNone/>
-                      </a:pPr>
-                      <a:r>
-                        <a:rPr lang="en-US" sz="1300" b="1" dirty="0">
-                          <a:solidFill>
-                            <a:srgbClr val="3E4A57"/>
-                          </a:solidFill>
-                          <a:latin typeface="Arial" pitchFamily="34" charset="0"/>
-                          <a:ea typeface="Arial" pitchFamily="34" charset="-122"/>
-                          <a:cs typeface="Arial" pitchFamily="34" charset="-120"/>
-                        </a:rPr>
-                        <a:t>Dimensión</a:t>
-                      </a:r>
-                      <a:endParaRPr lang="en-US" sz="1300" dirty="0">
-                        <a:latin typeface="Arial" charset="0"/>
-                        <a:ea typeface="Arial" charset="0"/>
-                        <a:cs typeface="Arial" charset="0"/>
-                      </a:endParaRPr>
-                    </a:p>
-                  </a:txBody>
-                  <a:tcPr marL="57785" marR="57785" marT="57785" marB="57785">
-                    <a:lnL w="12700" cap="flat" cmpd="sng" algn="ctr">
-                      <a:solidFill>
-                        <a:srgbClr val="C5C4C1"/>
-                      </a:solidFill>
-                      <a:prstDash val="solid"/>
-                      <a:round/>
-                      <a:headEnd type="none" w="med" len="med"/>
-                      <a:tailEnd type="none" w="med" len="med"/>
-                    </a:lnL>
-                    <a:lnR w="12700" cap="flat" cmpd="sng" algn="ctr">
-                      <a:solidFill>
-                        <a:srgbClr val="B7B6B3"/>
-                      </a:solidFill>
-                      <a:prstDash val="solid"/>
-                      <a:round/>
-                      <a:headEnd type="none" w="med" len="med"/>
-                      <a:tailEnd type="none" w="med" len="med"/>
-                    </a:lnR>
-                    <a:lnT w="12700" cap="flat" cmpd="sng" algn="ctr">
-                      <a:solidFill>
-                        <a:srgbClr val="C5C4C1"/>
-                      </a:solidFill>
-                      <a:prstDash val="solid"/>
-                      <a:round/>
-                      <a:headEnd type="none" w="med" len="med"/>
-                      <a:tailEnd type="none" w="med" len="med"/>
-                    </a:lnT>
-                    <a:lnB w="12700" cap="flat" cmpd="sng" algn="ctr">
-                      <a:solidFill>
-                        <a:srgbClr val="B7B6B3"/>
-                      </a:solidFill>
-                      <a:prstDash val="solid"/>
-                      <a:round/>
-                      <a:headEnd type="none" w="med" len="med"/>
-                      <a:tailEnd type="none" w="med" len="med"/>
-                    </a:lnB>
-                    <a:solidFill>
-                      <a:srgbClr val="E5E4E0"/>
-                    </a:solidFill>
-                  </a:tcPr>
-                </a:tc>
-                <a:tc>
-                  <a:txBody>
-                    <a:bodyPr/>
-                    <a:lstStyle/>
-                    <a:p>
-                      <a:pPr marL="0" indent="0">
-                        <a:lnSpc>
-                          <a:spcPts val="1820"/>
-                        </a:lnSpc>
-                        <a:buNone/>
-                      </a:pPr>
-                      <a:r>
-                        <a:rPr lang="en-US" sz="1300" b="1" dirty="0">
-                          <a:solidFill>
-                            <a:srgbClr val="3E4A57"/>
-                          </a:solidFill>
-                          <a:latin typeface="Arial" pitchFamily="34" charset="0"/>
-                          <a:ea typeface="Arial" pitchFamily="34" charset="-122"/>
-                          <a:cs typeface="Arial" pitchFamily="34" charset="-120"/>
-                        </a:rPr>
-                        <a:t>Responde a</a:t>
-                      </a:r>
-                      <a:endParaRPr lang="en-US" sz="1300" dirty="0">
-                        <a:latin typeface="Arial" charset="0"/>
-                        <a:ea typeface="Arial" charset="0"/>
-                        <a:cs typeface="Arial" charset="0"/>
-                      </a:endParaRPr>
-                    </a:p>
-                  </a:txBody>
-                  <a:tcPr marL="57785" marR="57785" marT="57785" marB="57785">
-                    <a:lnL w="12700" cap="flat" cmpd="sng" algn="ctr">
-                      <a:solidFill>
-                        <a:srgbClr val="B7B6B3"/>
-                      </a:solidFill>
-                      <a:prstDash val="solid"/>
-                      <a:round/>
-                      <a:headEnd type="none" w="med" len="med"/>
-                      <a:tailEnd type="none" w="med" len="med"/>
-                    </a:lnL>
-                    <a:lnR w="12700" cap="flat" cmpd="sng" algn="ctr">
-                      <a:solidFill>
-                        <a:srgbClr val="B7B6B3"/>
-                      </a:solidFill>
-                      <a:prstDash val="solid"/>
-                      <a:round/>
-                      <a:headEnd type="none" w="med" len="med"/>
-                      <a:tailEnd type="none" w="med" len="med"/>
-                    </a:lnR>
-                    <a:lnT w="12700" cap="flat" cmpd="sng" algn="ctr">
-                      <a:solidFill>
-                        <a:srgbClr val="C5C4C1"/>
-                      </a:solidFill>
-                      <a:prstDash val="solid"/>
-                      <a:round/>
-                      <a:headEnd type="none" w="med" len="med"/>
-                      <a:tailEnd type="none" w="med" len="med"/>
-                    </a:lnT>
-                    <a:lnB w="12700" cap="flat" cmpd="sng" algn="ctr">
-                      <a:solidFill>
-                        <a:srgbClr val="B7B6B3"/>
-                      </a:solidFill>
-                      <a:prstDash val="solid"/>
-                      <a:round/>
-                      <a:headEnd type="none" w="med" len="med"/>
-                      <a:tailEnd type="none" w="med" len="med"/>
-                    </a:lnB>
-                    <a:solidFill>
-                      <a:srgbClr val="E5E4E0"/>
-                    </a:solidFill>
-                  </a:tcPr>
-                </a:tc>
-                <a:extLst>
-                  <a:ext uri="{0D108BD9-81ED-4DB2-BD59-A6C34878D82A}">
-                    <a16:rowId xmlns:a16="http://schemas.microsoft.com/office/drawing/2014/main" val="10000"/>
-                  </a:ext>
-                </a:extLst>
-              </a:tr>
-              <a:tr h="356870">
-                <a:tc>
-                  <a:txBody>
-                    <a:bodyPr/>
-                    <a:lstStyle/>
-                    <a:p>
-                      <a:pPr marL="0" indent="0">
-                        <a:lnSpc>
-                          <a:spcPts val="1820"/>
-                        </a:lnSpc>
-                        <a:buNone/>
-                      </a:pPr>
-                      <a:r>
-                        <a:rPr lang="en-US" sz="1300" dirty="0">
-                          <a:solidFill>
-                            <a:srgbClr val="3E4A57"/>
-                          </a:solidFill>
-                          <a:latin typeface="Arial" pitchFamily="34" charset="0"/>
-                          <a:ea typeface="Arial" pitchFamily="34" charset="-122"/>
-                          <a:cs typeface="Arial" pitchFamily="34" charset="-120"/>
-                        </a:rPr>
-                        <a:t>DimTiempo (×2)</a:t>
-                      </a:r>
-                      <a:endParaRPr lang="en-US" sz="1300" dirty="0">
-                        <a:latin typeface="Arial" charset="0"/>
-                        <a:ea typeface="Arial" charset="0"/>
-                        <a:cs typeface="Arial" charset="0"/>
-                      </a:endParaRPr>
-                    </a:p>
-                  </a:txBody>
-                  <a:tcPr marL="57785" marR="57785" marT="57785" marB="57785">
-                    <a:lnL w="12700" cap="flat" cmpd="sng" algn="ctr">
-                      <a:solidFill>
-                        <a:srgbClr val="C5C4C1"/>
-                      </a:solidFill>
-                      <a:prstDash val="solid"/>
-                      <a:round/>
-                      <a:headEnd type="none" w="med" len="med"/>
-                      <a:tailEnd type="none" w="med" len="med"/>
-                    </a:lnL>
-                    <a:lnR w="12700" cap="flat" cmpd="sng" algn="ctr">
-                      <a:solidFill>
-                        <a:srgbClr val="C5C4C1"/>
-                      </a:solidFill>
-                      <a:prstDash val="solid"/>
-                      <a:round/>
-                      <a:headEnd type="none" w="med" len="med"/>
-                      <a:tailEnd type="none" w="med" len="med"/>
-                    </a:lnR>
-                    <a:lnT w="12700" cap="flat" cmpd="sng" algn="ctr">
-                      <a:solidFill>
-                        <a:srgbClr val="B7B6B3"/>
-                      </a:solidFill>
-                      <a:prstDash val="solid"/>
-                      <a:round/>
-                      <a:headEnd type="none" w="med" len="med"/>
-                      <a:tailEnd type="none" w="med" len="med"/>
-                    </a:lnT>
-                    <a:lnB w="12700" cap="flat" cmpd="sng" algn="ctr">
-                      <a:solidFill>
-                        <a:srgbClr val="C5C4C1"/>
-                      </a:solidFill>
-                      <a:prstDash val="solid"/>
-                      <a:round/>
-                      <a:headEnd type="none" w="med" len="med"/>
-                      <a:tailEnd type="none" w="med" len="med"/>
-                    </a:lnB>
-                  </a:tcPr>
-                </a:tc>
-                <a:tc>
-                  <a:txBody>
-                    <a:bodyPr/>
-                    <a:lstStyle/>
-                    <a:p>
-                      <a:pPr marL="0" indent="0">
-                        <a:lnSpc>
-                          <a:spcPts val="1820"/>
-                        </a:lnSpc>
-                        <a:buNone/>
-                      </a:pPr>
-                      <a:r>
-                        <a:rPr lang="en-US" sz="1300" dirty="0">
-                          <a:solidFill>
-                            <a:srgbClr val="3E4A57"/>
-                          </a:solidFill>
-                          <a:latin typeface="Arial" pitchFamily="34" charset="0"/>
-                          <a:ea typeface="Arial" pitchFamily="34" charset="-122"/>
-                          <a:cs typeface="Arial" pitchFamily="34" charset="-120"/>
-                        </a:rPr>
-                        <a:t>¿Cuándo se pidió y se envió?</a:t>
-                      </a:r>
-                      <a:endParaRPr lang="en-US" sz="1300" dirty="0">
-                        <a:latin typeface="Arial" charset="0"/>
-                        <a:ea typeface="Arial" charset="0"/>
-                        <a:cs typeface="Arial" charset="0"/>
-                      </a:endParaRPr>
-                    </a:p>
-                  </a:txBody>
-                  <a:tcPr marL="57785" marR="57785" marT="57785" marB="57785">
-                    <a:lnL w="12700" cap="flat" cmpd="sng" algn="ctr">
-                      <a:solidFill>
-                        <a:srgbClr val="C5C4C1"/>
-                      </a:solidFill>
-                      <a:prstDash val="solid"/>
-                      <a:round/>
-                      <a:headEnd type="none" w="med" len="med"/>
-                      <a:tailEnd type="none" w="med" len="med"/>
-                    </a:lnL>
-                    <a:lnR w="12700" cap="flat" cmpd="sng" algn="ctr">
-                      <a:solidFill>
-                        <a:srgbClr val="C5C4C1"/>
-                      </a:solidFill>
-                      <a:prstDash val="solid"/>
-                      <a:round/>
-                      <a:headEnd type="none" w="med" len="med"/>
-                      <a:tailEnd type="none" w="med" len="med"/>
-                    </a:lnR>
-                    <a:lnT w="12700" cap="flat" cmpd="sng" algn="ctr">
-                      <a:solidFill>
-                        <a:srgbClr val="B7B6B3"/>
-                      </a:solidFill>
-                      <a:prstDash val="solid"/>
-                      <a:round/>
-                      <a:headEnd type="none" w="med" len="med"/>
-                      <a:tailEnd type="none" w="med" len="med"/>
-                    </a:lnT>
-                    <a:lnB w="12700" cap="flat" cmpd="sng" algn="ctr">
-                      <a:solidFill>
-                        <a:srgbClr val="C5C4C1"/>
-                      </a:solidFill>
-                      <a:prstDash val="solid"/>
-                      <a:round/>
-                      <a:headEnd type="none" w="med" len="med"/>
-                      <a:tailEnd type="none" w="med" len="med"/>
-                    </a:lnB>
-                  </a:tcPr>
-                </a:tc>
-                <a:extLst>
-                  <a:ext uri="{0D108BD9-81ED-4DB2-BD59-A6C34878D82A}">
-                    <a16:rowId xmlns:a16="http://schemas.microsoft.com/office/drawing/2014/main" val="10001"/>
-                  </a:ext>
-                </a:extLst>
-              </a:tr>
-              <a:tr h="356870">
-                <a:tc>
-                  <a:txBody>
-                    <a:bodyPr/>
-                    <a:lstStyle/>
-                    <a:p>
-                      <a:pPr marL="0" indent="0">
-                        <a:lnSpc>
-                          <a:spcPts val="1820"/>
-                        </a:lnSpc>
-                        <a:buNone/>
-                      </a:pPr>
-                      <a:r>
-                        <a:rPr lang="en-US" sz="1300" dirty="0">
-                          <a:solidFill>
-                            <a:srgbClr val="3E4A57"/>
-                          </a:solidFill>
-                          <a:latin typeface="Arial" pitchFamily="34" charset="0"/>
-                          <a:ea typeface="Arial" pitchFamily="34" charset="-122"/>
-                          <a:cs typeface="Arial" pitchFamily="34" charset="-120"/>
-                        </a:rPr>
-                        <a:t>DimCliente</a:t>
-                      </a:r>
-                      <a:endParaRPr lang="en-US" sz="1300" dirty="0">
-                        <a:latin typeface="Arial" charset="0"/>
-                        <a:ea typeface="Arial" charset="0"/>
-                        <a:cs typeface="Arial" charset="0"/>
-                      </a:endParaRPr>
-                    </a:p>
-                  </a:txBody>
-                  <a:tcPr marL="57785" marR="57785" marT="57785" marB="57785">
-                    <a:lnL w="12700" cap="flat" cmpd="sng" algn="ctr">
-                      <a:solidFill>
-                        <a:srgbClr val="C5C4C1"/>
-                      </a:solidFill>
-                      <a:prstDash val="solid"/>
-                      <a:round/>
-                      <a:headEnd type="none" w="med" len="med"/>
-                      <a:tailEnd type="none" w="med" len="med"/>
-                    </a:lnL>
-                    <a:lnR w="12700" cap="flat" cmpd="sng" algn="ctr">
-                      <a:solidFill>
-                        <a:srgbClr val="C5C4C1"/>
-                      </a:solidFill>
-                      <a:prstDash val="solid"/>
-                      <a:round/>
-                      <a:headEnd type="none" w="med" len="med"/>
-                      <a:tailEnd type="none" w="med" len="med"/>
-                    </a:lnR>
-                    <a:lnT w="12700" cap="flat" cmpd="sng" algn="ctr">
-                      <a:solidFill>
-                        <a:srgbClr val="C5C4C1"/>
-                      </a:solidFill>
-                      <a:prstDash val="solid"/>
-                      <a:round/>
-                      <a:headEnd type="none" w="med" len="med"/>
-                      <a:tailEnd type="none" w="med" len="med"/>
-                    </a:lnT>
-                    <a:lnB w="12700" cap="flat" cmpd="sng" algn="ctr">
-                      <a:solidFill>
-                        <a:srgbClr val="C5C4C1"/>
-                      </a:solidFill>
-                      <a:prstDash val="solid"/>
-                      <a:round/>
-                      <a:headEnd type="none" w="med" len="med"/>
-                      <a:tailEnd type="none" w="med" len="med"/>
-                    </a:lnB>
-                  </a:tcPr>
-                </a:tc>
-                <a:tc>
-                  <a:txBody>
-                    <a:bodyPr/>
-                    <a:lstStyle/>
-                    <a:p>
-                      <a:pPr marL="0" indent="0">
-                        <a:lnSpc>
-                          <a:spcPts val="1820"/>
-                        </a:lnSpc>
-                        <a:buNone/>
-                      </a:pPr>
-                      <a:r>
-                        <a:rPr lang="en-US" sz="1300" dirty="0">
-                          <a:solidFill>
-                            <a:srgbClr val="3E4A57"/>
-                          </a:solidFill>
-                          <a:latin typeface="Arial" pitchFamily="34" charset="0"/>
-                          <a:ea typeface="Arial" pitchFamily="34" charset="-122"/>
-                          <a:cs typeface="Arial" pitchFamily="34" charset="-120"/>
-                        </a:rPr>
-                        <a:t>¿A quién? ¿Dónde?</a:t>
-                      </a:r>
-                      <a:endParaRPr lang="en-US" sz="1300" dirty="0">
-                        <a:latin typeface="Arial" charset="0"/>
-                        <a:ea typeface="Arial" charset="0"/>
-                        <a:cs typeface="Arial" charset="0"/>
-                      </a:endParaRPr>
-                    </a:p>
-                  </a:txBody>
-                  <a:tcPr marL="57785" marR="57785" marT="57785" marB="57785">
-                    <a:lnL w="12700" cap="flat" cmpd="sng" algn="ctr">
-                      <a:solidFill>
-                        <a:srgbClr val="C5C4C1"/>
-                      </a:solidFill>
-                      <a:prstDash val="solid"/>
-                      <a:round/>
-                      <a:headEnd type="none" w="med" len="med"/>
-                      <a:tailEnd type="none" w="med" len="med"/>
-                    </a:lnL>
-                    <a:lnR w="12700" cap="flat" cmpd="sng" algn="ctr">
-                      <a:solidFill>
-                        <a:srgbClr val="C5C4C1"/>
-                      </a:solidFill>
-                      <a:prstDash val="solid"/>
-                      <a:round/>
-                      <a:headEnd type="none" w="med" len="med"/>
-                      <a:tailEnd type="none" w="med" len="med"/>
-                    </a:lnR>
-                    <a:lnT w="12700" cap="flat" cmpd="sng" algn="ctr">
-                      <a:solidFill>
-                        <a:srgbClr val="C5C4C1"/>
-                      </a:solidFill>
-                      <a:prstDash val="solid"/>
-                      <a:round/>
-                      <a:headEnd type="none" w="med" len="med"/>
-                      <a:tailEnd type="none" w="med" len="med"/>
-                    </a:lnT>
-                    <a:lnB w="12700" cap="flat" cmpd="sng" algn="ctr">
-                      <a:solidFill>
-                        <a:srgbClr val="C5C4C1"/>
-                      </a:solidFill>
-                      <a:prstDash val="solid"/>
-                      <a:round/>
-                      <a:headEnd type="none" w="med" len="med"/>
-                      <a:tailEnd type="none" w="med" len="med"/>
-                    </a:lnB>
-                  </a:tcPr>
-                </a:tc>
-                <a:extLst>
-                  <a:ext uri="{0D108BD9-81ED-4DB2-BD59-A6C34878D82A}">
-                    <a16:rowId xmlns:a16="http://schemas.microsoft.com/office/drawing/2014/main" val="10002"/>
-                  </a:ext>
-                </a:extLst>
-              </a:tr>
-              <a:tr h="356870">
-                <a:tc>
-                  <a:txBody>
-                    <a:bodyPr/>
-                    <a:lstStyle/>
-                    <a:p>
-                      <a:pPr marL="0" indent="0">
-                        <a:lnSpc>
-                          <a:spcPts val="1820"/>
-                        </a:lnSpc>
-                        <a:buNone/>
-                      </a:pPr>
-                      <a:r>
-                        <a:rPr lang="en-US" sz="1300" dirty="0">
-                          <a:solidFill>
-                            <a:srgbClr val="3E4A57"/>
-                          </a:solidFill>
-                          <a:latin typeface="Arial" pitchFamily="34" charset="0"/>
-                          <a:ea typeface="Arial" pitchFamily="34" charset="-122"/>
-                          <a:cs typeface="Arial" pitchFamily="34" charset="-120"/>
-                        </a:rPr>
-                        <a:t>DimProducto</a:t>
-                      </a:r>
-                      <a:endParaRPr lang="en-US" sz="1300" dirty="0">
-                        <a:latin typeface="Arial" charset="0"/>
-                        <a:ea typeface="Arial" charset="0"/>
-                        <a:cs typeface="Arial" charset="0"/>
-                      </a:endParaRPr>
-                    </a:p>
-                  </a:txBody>
-                  <a:tcPr marL="57785" marR="57785" marT="57785" marB="57785">
-                    <a:lnL w="12700" cap="flat" cmpd="sng" algn="ctr">
-                      <a:solidFill>
-                        <a:srgbClr val="C5C4C1"/>
-                      </a:solidFill>
-                      <a:prstDash val="solid"/>
-                      <a:round/>
-                      <a:headEnd type="none" w="med" len="med"/>
-                      <a:tailEnd type="none" w="med" len="med"/>
-                    </a:lnL>
-                    <a:lnR w="12700" cap="flat" cmpd="sng" algn="ctr">
-                      <a:solidFill>
-                        <a:srgbClr val="C5C4C1"/>
-                      </a:solidFill>
-                      <a:prstDash val="solid"/>
-                      <a:round/>
-                      <a:headEnd type="none" w="med" len="med"/>
-                      <a:tailEnd type="none" w="med" len="med"/>
-                    </a:lnR>
-                    <a:lnT w="12700" cap="flat" cmpd="sng" algn="ctr">
-                      <a:solidFill>
-                        <a:srgbClr val="C5C4C1"/>
-                      </a:solidFill>
-                      <a:prstDash val="solid"/>
-                      <a:round/>
-                      <a:headEnd type="none" w="med" len="med"/>
-                      <a:tailEnd type="none" w="med" len="med"/>
-                    </a:lnT>
-                    <a:lnB w="12700" cap="flat" cmpd="sng" algn="ctr">
-                      <a:solidFill>
-                        <a:srgbClr val="C5C4C1"/>
-                      </a:solidFill>
-                      <a:prstDash val="solid"/>
-                      <a:round/>
-                      <a:headEnd type="none" w="med" len="med"/>
-                      <a:tailEnd type="none" w="med" len="med"/>
-                    </a:lnB>
-                  </a:tcPr>
-                </a:tc>
-                <a:tc>
-                  <a:txBody>
-                    <a:bodyPr/>
-                    <a:lstStyle/>
-                    <a:p>
-                      <a:pPr marL="0" indent="0">
-                        <a:lnSpc>
-                          <a:spcPts val="1820"/>
-                        </a:lnSpc>
-                        <a:buNone/>
-                      </a:pPr>
-                      <a:r>
-                        <a:rPr lang="en-US" sz="1300" dirty="0">
-                          <a:solidFill>
-                            <a:srgbClr val="3E4A57"/>
-                          </a:solidFill>
-                          <a:latin typeface="Arial" pitchFamily="34" charset="0"/>
-                          <a:ea typeface="Arial" pitchFamily="34" charset="-122"/>
-                          <a:cs typeface="Arial" pitchFamily="34" charset="-120"/>
-                        </a:rPr>
-                        <a:t>¿Qué? (con categoría y proveedor)</a:t>
-                      </a:r>
-                      <a:endParaRPr lang="en-US" sz="1300" dirty="0">
-                        <a:latin typeface="Arial" charset="0"/>
-                        <a:ea typeface="Arial" charset="0"/>
-                        <a:cs typeface="Arial" charset="0"/>
-                      </a:endParaRPr>
-                    </a:p>
-                  </a:txBody>
-                  <a:tcPr marL="57785" marR="57785" marT="57785" marB="57785">
-                    <a:lnL w="12700" cap="flat" cmpd="sng" algn="ctr">
-                      <a:solidFill>
-                        <a:srgbClr val="C5C4C1"/>
-                      </a:solidFill>
-                      <a:prstDash val="solid"/>
-                      <a:round/>
-                      <a:headEnd type="none" w="med" len="med"/>
-                      <a:tailEnd type="none" w="med" len="med"/>
-                    </a:lnL>
-                    <a:lnR w="12700" cap="flat" cmpd="sng" algn="ctr">
-                      <a:solidFill>
-                        <a:srgbClr val="C5C4C1"/>
-                      </a:solidFill>
-                      <a:prstDash val="solid"/>
-                      <a:round/>
-                      <a:headEnd type="none" w="med" len="med"/>
-                      <a:tailEnd type="none" w="med" len="med"/>
-                    </a:lnR>
-                    <a:lnT w="12700" cap="flat" cmpd="sng" algn="ctr">
-                      <a:solidFill>
-                        <a:srgbClr val="C5C4C1"/>
-                      </a:solidFill>
-                      <a:prstDash val="solid"/>
-                      <a:round/>
-                      <a:headEnd type="none" w="med" len="med"/>
-                      <a:tailEnd type="none" w="med" len="med"/>
-                    </a:lnT>
-                    <a:lnB w="12700" cap="flat" cmpd="sng" algn="ctr">
-                      <a:solidFill>
-                        <a:srgbClr val="C5C4C1"/>
-                      </a:solidFill>
-                      <a:prstDash val="solid"/>
-                      <a:round/>
-                      <a:headEnd type="none" w="med" len="med"/>
-                      <a:tailEnd type="none" w="med" len="med"/>
-                    </a:lnB>
-                  </a:tcPr>
-                </a:tc>
-                <a:extLst>
-                  <a:ext uri="{0D108BD9-81ED-4DB2-BD59-A6C34878D82A}">
-                    <a16:rowId xmlns:a16="http://schemas.microsoft.com/office/drawing/2014/main" val="10003"/>
-                  </a:ext>
-                </a:extLst>
-              </a:tr>
-              <a:tr h="356870">
-                <a:tc>
-                  <a:txBody>
-                    <a:bodyPr/>
-                    <a:lstStyle/>
-                    <a:p>
-                      <a:pPr marL="0" indent="0">
-                        <a:lnSpc>
-                          <a:spcPts val="1820"/>
-                        </a:lnSpc>
-                        <a:buNone/>
-                      </a:pPr>
-                      <a:r>
-                        <a:rPr lang="en-US" sz="1300" dirty="0">
-                          <a:solidFill>
-                            <a:srgbClr val="3E4A57"/>
-                          </a:solidFill>
-                          <a:latin typeface="Arial" pitchFamily="34" charset="0"/>
-                          <a:ea typeface="Arial" pitchFamily="34" charset="-122"/>
-                          <a:cs typeface="Arial" pitchFamily="34" charset="-120"/>
-                        </a:rPr>
-                        <a:t>DimEmpleado</a:t>
-                      </a:r>
-                      <a:endParaRPr lang="en-US" sz="1300" dirty="0">
-                        <a:latin typeface="Arial" charset="0"/>
-                        <a:ea typeface="Arial" charset="0"/>
-                        <a:cs typeface="Arial" charset="0"/>
-                      </a:endParaRPr>
-                    </a:p>
-                  </a:txBody>
-                  <a:tcPr marL="57785" marR="57785" marT="57785" marB="57785">
-                    <a:lnL w="12700" cap="flat" cmpd="sng" algn="ctr">
-                      <a:solidFill>
-                        <a:srgbClr val="C5C4C1"/>
-                      </a:solidFill>
-                      <a:prstDash val="solid"/>
-                      <a:round/>
-                      <a:headEnd type="none" w="med" len="med"/>
-                      <a:tailEnd type="none" w="med" len="med"/>
-                    </a:lnL>
-                    <a:lnR w="12700" cap="flat" cmpd="sng" algn="ctr">
-                      <a:solidFill>
-                        <a:srgbClr val="C5C4C1"/>
-                      </a:solidFill>
-                      <a:prstDash val="solid"/>
-                      <a:round/>
-                      <a:headEnd type="none" w="med" len="med"/>
-                      <a:tailEnd type="none" w="med" len="med"/>
-                    </a:lnR>
-                    <a:lnT w="12700" cap="flat" cmpd="sng" algn="ctr">
-                      <a:solidFill>
-                        <a:srgbClr val="C5C4C1"/>
-                      </a:solidFill>
-                      <a:prstDash val="solid"/>
-                      <a:round/>
-                      <a:headEnd type="none" w="med" len="med"/>
-                      <a:tailEnd type="none" w="med" len="med"/>
-                    </a:lnT>
-                    <a:lnB w="12700" cap="flat" cmpd="sng" algn="ctr">
-                      <a:solidFill>
-                        <a:srgbClr val="C5C4C1"/>
-                      </a:solidFill>
-                      <a:prstDash val="solid"/>
-                      <a:round/>
-                      <a:headEnd type="none" w="med" len="med"/>
-                      <a:tailEnd type="none" w="med" len="med"/>
-                    </a:lnB>
-                  </a:tcPr>
-                </a:tc>
-                <a:tc>
-                  <a:txBody>
-                    <a:bodyPr/>
-                    <a:lstStyle/>
-                    <a:p>
-                      <a:pPr marL="0" indent="0">
-                        <a:lnSpc>
-                          <a:spcPts val="1820"/>
-                        </a:lnSpc>
-                        <a:buNone/>
-                      </a:pPr>
-                      <a:r>
-                        <a:rPr lang="en-US" sz="1300" dirty="0">
-                          <a:solidFill>
-                            <a:srgbClr val="3E4A57"/>
-                          </a:solidFill>
-                          <a:latin typeface="Arial" pitchFamily="34" charset="0"/>
-                          <a:ea typeface="Arial" pitchFamily="34" charset="-122"/>
-                          <a:cs typeface="Arial" pitchFamily="34" charset="-120"/>
-                        </a:rPr>
-                        <a:t>¿Quién vendió?</a:t>
-                      </a:r>
-                      <a:endParaRPr lang="en-US" sz="1300" dirty="0">
-                        <a:latin typeface="Arial" charset="0"/>
-                        <a:ea typeface="Arial" charset="0"/>
-                        <a:cs typeface="Arial" charset="0"/>
-                      </a:endParaRPr>
-                    </a:p>
-                  </a:txBody>
-                  <a:tcPr marL="57785" marR="57785" marT="57785" marB="57785">
-                    <a:lnL w="12700" cap="flat" cmpd="sng" algn="ctr">
-                      <a:solidFill>
-                        <a:srgbClr val="C5C4C1"/>
-                      </a:solidFill>
-                      <a:prstDash val="solid"/>
-                      <a:round/>
-                      <a:headEnd type="none" w="med" len="med"/>
-                      <a:tailEnd type="none" w="med" len="med"/>
-                    </a:lnL>
-                    <a:lnR w="12700" cap="flat" cmpd="sng" algn="ctr">
-                      <a:solidFill>
-                        <a:srgbClr val="C5C4C1"/>
-                      </a:solidFill>
-                      <a:prstDash val="solid"/>
-                      <a:round/>
-                      <a:headEnd type="none" w="med" len="med"/>
-                      <a:tailEnd type="none" w="med" len="med"/>
-                    </a:lnR>
-                    <a:lnT w="12700" cap="flat" cmpd="sng" algn="ctr">
-                      <a:solidFill>
-                        <a:srgbClr val="C5C4C1"/>
-                      </a:solidFill>
-                      <a:prstDash val="solid"/>
-                      <a:round/>
-                      <a:headEnd type="none" w="med" len="med"/>
-                      <a:tailEnd type="none" w="med" len="med"/>
-                    </a:lnT>
-                    <a:lnB w="12700" cap="flat" cmpd="sng" algn="ctr">
-                      <a:solidFill>
-                        <a:srgbClr val="C5C4C1"/>
-                      </a:solidFill>
-                      <a:prstDash val="solid"/>
-                      <a:round/>
-                      <a:headEnd type="none" w="med" len="med"/>
-                      <a:tailEnd type="none" w="med" len="med"/>
-                    </a:lnB>
-                  </a:tcPr>
-                </a:tc>
-                <a:extLst>
-                  <a:ext uri="{0D108BD9-81ED-4DB2-BD59-A6C34878D82A}">
-                    <a16:rowId xmlns:a16="http://schemas.microsoft.com/office/drawing/2014/main" val="10004"/>
-                  </a:ext>
-                </a:extLst>
-              </a:tr>
-              <a:tr h="356870">
-                <a:tc>
-                  <a:txBody>
-                    <a:bodyPr/>
-                    <a:lstStyle/>
-                    <a:p>
-                      <a:pPr marL="0" indent="0">
-                        <a:lnSpc>
-                          <a:spcPts val="1820"/>
-                        </a:lnSpc>
-                        <a:buNone/>
-                      </a:pPr>
-                      <a:r>
-                        <a:rPr lang="en-US" sz="1300" dirty="0">
-                          <a:solidFill>
-                            <a:srgbClr val="3E4A57"/>
-                          </a:solidFill>
-                          <a:latin typeface="Arial" pitchFamily="34" charset="0"/>
-                          <a:ea typeface="Arial" pitchFamily="34" charset="-122"/>
-                          <a:cs typeface="Arial" pitchFamily="34" charset="-120"/>
-                        </a:rPr>
-                        <a:t>DimTransportista</a:t>
-                      </a:r>
-                      <a:endParaRPr lang="en-US" sz="1300" dirty="0">
-                        <a:latin typeface="Arial" charset="0"/>
-                        <a:ea typeface="Arial" charset="0"/>
-                        <a:cs typeface="Arial" charset="0"/>
-                      </a:endParaRPr>
-                    </a:p>
-                  </a:txBody>
-                  <a:tcPr marL="57785" marR="57785" marT="57785" marB="57785">
-                    <a:lnL w="12700" cap="flat" cmpd="sng" algn="ctr">
-                      <a:solidFill>
-                        <a:srgbClr val="C5C4C1"/>
-                      </a:solidFill>
-                      <a:prstDash val="solid"/>
-                      <a:round/>
-                      <a:headEnd type="none" w="med" len="med"/>
-                      <a:tailEnd type="none" w="med" len="med"/>
-                    </a:lnL>
-                    <a:lnR w="12700" cap="flat" cmpd="sng" algn="ctr">
-                      <a:solidFill>
-                        <a:srgbClr val="C5C4C1"/>
-                      </a:solidFill>
-                      <a:prstDash val="solid"/>
-                      <a:round/>
-                      <a:headEnd type="none" w="med" len="med"/>
-                      <a:tailEnd type="none" w="med" len="med"/>
-                    </a:lnR>
-                    <a:lnT w="12700" cap="flat" cmpd="sng" algn="ctr">
-                      <a:solidFill>
-                        <a:srgbClr val="C5C4C1"/>
-                      </a:solidFill>
-                      <a:prstDash val="solid"/>
-                      <a:round/>
-                      <a:headEnd type="none" w="med" len="med"/>
-                      <a:tailEnd type="none" w="med" len="med"/>
-                    </a:lnT>
-                    <a:lnB w="12700" cap="flat" cmpd="sng" algn="ctr">
-                      <a:solidFill>
-                        <a:srgbClr val="C5C4C1"/>
-                      </a:solidFill>
-                      <a:prstDash val="solid"/>
-                      <a:round/>
-                      <a:headEnd type="none" w="med" len="med"/>
-                      <a:tailEnd type="none" w="med" len="med"/>
-                    </a:lnB>
-                  </a:tcPr>
-                </a:tc>
-                <a:tc>
-                  <a:txBody>
-                    <a:bodyPr/>
-                    <a:lstStyle/>
-                    <a:p>
-                      <a:pPr marL="0" indent="0">
-                        <a:lnSpc>
-                          <a:spcPts val="1820"/>
-                        </a:lnSpc>
-                        <a:buNone/>
-                      </a:pPr>
-                      <a:r>
-                        <a:rPr lang="en-US" sz="1300" dirty="0">
-                          <a:solidFill>
-                            <a:srgbClr val="3E4A57"/>
-                          </a:solidFill>
-                          <a:latin typeface="Arial" pitchFamily="34" charset="0"/>
-                          <a:ea typeface="Arial" pitchFamily="34" charset="-122"/>
-                          <a:cs typeface="Arial" pitchFamily="34" charset="-120"/>
-                        </a:rPr>
-                        <a:t>¿Quién despachó?</a:t>
-                      </a:r>
-                      <a:endParaRPr lang="en-US" sz="1300" dirty="0">
-                        <a:latin typeface="Arial" charset="0"/>
-                        <a:ea typeface="Arial" charset="0"/>
-                        <a:cs typeface="Arial" charset="0"/>
-                      </a:endParaRPr>
-                    </a:p>
-                  </a:txBody>
-                  <a:tcPr marL="57785" marR="57785" marT="57785" marB="57785">
-                    <a:lnL w="12700" cap="flat" cmpd="sng" algn="ctr">
-                      <a:solidFill>
-                        <a:srgbClr val="C5C4C1"/>
-                      </a:solidFill>
-                      <a:prstDash val="solid"/>
-                      <a:round/>
-                      <a:headEnd type="none" w="med" len="med"/>
-                      <a:tailEnd type="none" w="med" len="med"/>
-                    </a:lnL>
-                    <a:lnR w="12700" cap="flat" cmpd="sng" algn="ctr">
-                      <a:solidFill>
-                        <a:srgbClr val="C5C4C1"/>
-                      </a:solidFill>
-                      <a:prstDash val="solid"/>
-                      <a:round/>
-                      <a:headEnd type="none" w="med" len="med"/>
-                      <a:tailEnd type="none" w="med" len="med"/>
-                    </a:lnR>
-                    <a:lnT w="12700" cap="flat" cmpd="sng" algn="ctr">
-                      <a:solidFill>
-                        <a:srgbClr val="C5C4C1"/>
-                      </a:solidFill>
-                      <a:prstDash val="solid"/>
-                      <a:round/>
-                      <a:headEnd type="none" w="med" len="med"/>
-                      <a:tailEnd type="none" w="med" len="med"/>
-                    </a:lnT>
-                    <a:lnB w="12700" cap="flat" cmpd="sng" algn="ctr">
-                      <a:solidFill>
-                        <a:srgbClr val="C5C4C1"/>
-                      </a:solidFill>
-                      <a:prstDash val="solid"/>
-                      <a:round/>
-                      <a:headEnd type="none" w="med" len="med"/>
-                      <a:tailEnd type="none" w="med" len="med"/>
-                    </a:lnB>
-                  </a:tcPr>
-                </a:tc>
-                <a:extLst>
-                  <a:ext uri="{0D108BD9-81ED-4DB2-BD59-A6C34878D82A}">
-                    <a16:rowId xmlns:a16="http://schemas.microsoft.com/office/drawing/2014/main" val="10005"/>
-                  </a:ext>
-                </a:extLst>
-              </a:tr>
-            </a:tbl>
-          </a:graphicData>
-        </a:graphic>
-      </p:graphicFrame>
-      <p:sp>
-        <p:nvSpPr>
-          <p:cNvPr id="6" name="Text 3"/>
-          <p:cNvSpPr/>
-          <p:nvPr/>
-        </p:nvSpPr>
-        <p:spPr>
-          <a:xfrm>
-            <a:off x="812800" y="4417061"/>
-            <a:ext cx="5284724" cy="238760"/>
-          </a:xfrm>
-          <a:prstGeom prst="rect">
-            <a:avLst/>
-          </a:prstGeom>
-          <a:noFill/>
-          <a:ln/>
-        </p:spPr>
-        <p:txBody>
-          <a:bodyPr wrap="square" lIns="0" tIns="0" rIns="0" bIns="0" rtlCol="0" anchor="t">
-            <a:normAutofit/>
-          </a:bodyPr>
-          <a:lstStyle/>
-          <a:p>
-            <a:pPr marL="0" indent="0" algn="l">
-              <a:lnSpc>
-                <a:spcPts val="1680"/>
-              </a:lnSpc>
-              <a:buNone/>
-            </a:pPr>
-            <a:r>
-              <a:rPr lang="en-US" sz="1200" dirty="0">
-                <a:solidFill>
-                  <a:srgbClr val="3E4A57"/>
-                </a:solidFill>
-                <a:latin typeface="Arial" pitchFamily="34" charset="0"/>
-                <a:ea typeface="Arial" pitchFamily="34" charset="-122"/>
-                <a:cs typeface="Arial" pitchFamily="34" charset="-120"/>
-              </a:rPr>
-              <a:t>OrdenID queda en el hecho como dimensión degenerada.</a:t>
-            </a:r>
-            <a:endParaRPr lang="en-US" sz="1200" dirty="0"/>
-          </a:p>
-        </p:txBody>
-      </p:sp>
-      <p:sp>
-        <p:nvSpPr>
-          <p:cNvPr id="7" name="Text 4"/>
-          <p:cNvSpPr/>
-          <p:nvPr/>
-        </p:nvSpPr>
-        <p:spPr>
-          <a:xfrm>
-            <a:off x="6248400" y="1849121"/>
-            <a:ext cx="5284724" cy="238760"/>
-          </a:xfrm>
-          <a:prstGeom prst="rect">
-            <a:avLst/>
-          </a:prstGeom>
-          <a:noFill/>
-          <a:ln/>
-        </p:spPr>
-        <p:txBody>
-          <a:bodyPr wrap="square" lIns="0" tIns="0" rIns="0" bIns="0" rtlCol="0" anchor="t">
-            <a:normAutofit/>
-          </a:bodyPr>
-          <a:lstStyle/>
-          <a:p>
-            <a:pPr marL="0" indent="0" algn="l">
-              <a:lnSpc>
-                <a:spcPts val="1680"/>
-              </a:lnSpc>
-              <a:buNone/>
-            </a:pPr>
-            <a:r>
-              <a:rPr lang="en-US" sz="1200" dirty="0">
-                <a:solidFill>
-                  <a:srgbClr val="A0521A"/>
-                </a:solidFill>
-                <a:latin typeface="Arial" pitchFamily="34" charset="0"/>
-                <a:ea typeface="Arial" pitchFamily="34" charset="-122"/>
-                <a:cs typeface="Arial" pitchFamily="34" charset="-120"/>
-              </a:rPr>
-              <a:t>Paso 4 · Hecho: FactVentas</a:t>
-            </a:r>
-            <a:endParaRPr lang="en-US" sz="1200" dirty="0"/>
-          </a:p>
-        </p:txBody>
-      </p:sp>
-      <p:graphicFrame>
-        <p:nvGraphicFramePr>
-          <p:cNvPr id="8" name="Table 1"/>
-          <p:cNvGraphicFramePr>
-            <a:graphicFrameLocks noGrp="1"/>
-          </p:cNvGraphicFramePr>
-          <p:nvPr>
-            <p:extLst>
-              <p:ext uri="{D42A27DB-BD31-4B8C-83A1-F6EECF244321}">
-                <p14:modId xmlns:p14="http://schemas.microsoft.com/office/powerpoint/2010/main" val="1579011935"/>
-              </p:ext>
-            </p:extLst>
-          </p:nvPr>
-        </p:nvGraphicFramePr>
-        <p:xfrm>
-          <a:off x="6258560" y="2174242"/>
-          <a:ext cx="5120640" cy="2372360"/>
-        </p:xfrm>
-        <a:graphic>
-          <a:graphicData uri="http://schemas.openxmlformats.org/drawingml/2006/table">
-            <a:tbl>
-              <a:tblPr/>
-              <a:tblGrid>
-                <a:gridCol w="2150669">
-                  <a:extLst>
-                    <a:ext uri="{9D8B030D-6E8A-4147-A177-3AD203B41FA5}">
-                      <a16:colId xmlns:a16="http://schemas.microsoft.com/office/drawing/2014/main" val="20000"/>
-                    </a:ext>
-                  </a:extLst>
-                </a:gridCol>
-                <a:gridCol w="2969971">
-                  <a:extLst>
-                    <a:ext uri="{9D8B030D-6E8A-4147-A177-3AD203B41FA5}">
-                      <a16:colId xmlns:a16="http://schemas.microsoft.com/office/drawing/2014/main" val="20001"/>
-                    </a:ext>
-                  </a:extLst>
-                </a:gridCol>
-              </a:tblGrid>
-              <a:tr h="356870">
-                <a:tc>
-                  <a:txBody>
-                    <a:bodyPr/>
-                    <a:lstStyle/>
-                    <a:p>
-                      <a:pPr marL="0" indent="0">
-                        <a:lnSpc>
-                          <a:spcPts val="1820"/>
-                        </a:lnSpc>
-                        <a:buNone/>
-                      </a:pPr>
-                      <a:r>
-                        <a:rPr lang="en-US" sz="1300" b="1" dirty="0">
-                          <a:solidFill>
-                            <a:srgbClr val="3E4A57"/>
-                          </a:solidFill>
-                          <a:latin typeface="Arial" pitchFamily="34" charset="0"/>
-                          <a:ea typeface="Arial" pitchFamily="34" charset="-122"/>
-                          <a:cs typeface="Arial" pitchFamily="34" charset="-120"/>
-                        </a:rPr>
-                        <a:t>Medida</a:t>
-                      </a:r>
-                      <a:endParaRPr lang="en-US" sz="1300" dirty="0">
-                        <a:latin typeface="Arial" charset="0"/>
-                        <a:ea typeface="Arial" charset="0"/>
-                        <a:cs typeface="Arial" charset="0"/>
-                      </a:endParaRPr>
-                    </a:p>
-                  </a:txBody>
-                  <a:tcPr marL="57785" marR="57785" marT="57785" marB="57785">
-                    <a:lnL w="12700" cap="flat" cmpd="sng" algn="ctr">
-                      <a:solidFill>
-                        <a:srgbClr val="C5C4C1"/>
-                      </a:solidFill>
-                      <a:prstDash val="solid"/>
-                      <a:round/>
-                      <a:headEnd type="none" w="med" len="med"/>
-                      <a:tailEnd type="none" w="med" len="med"/>
-                    </a:lnL>
-                    <a:lnR w="12700" cap="flat" cmpd="sng" algn="ctr">
-                      <a:solidFill>
-                        <a:srgbClr val="B7B6B3"/>
-                      </a:solidFill>
-                      <a:prstDash val="solid"/>
-                      <a:round/>
-                      <a:headEnd type="none" w="med" len="med"/>
-                      <a:tailEnd type="none" w="med" len="med"/>
-                    </a:lnR>
-                    <a:lnT w="12700" cap="flat" cmpd="sng" algn="ctr">
-                      <a:solidFill>
-                        <a:srgbClr val="C5C4C1"/>
-                      </a:solidFill>
-                      <a:prstDash val="solid"/>
-                      <a:round/>
-                      <a:headEnd type="none" w="med" len="med"/>
-                      <a:tailEnd type="none" w="med" len="med"/>
-                    </a:lnT>
-                    <a:lnB w="12700" cap="flat" cmpd="sng" algn="ctr">
-                      <a:solidFill>
-                        <a:srgbClr val="B7B6B3"/>
-                      </a:solidFill>
-                      <a:prstDash val="solid"/>
-                      <a:round/>
-                      <a:headEnd type="none" w="med" len="med"/>
-                      <a:tailEnd type="none" w="med" len="med"/>
-                    </a:lnB>
-                    <a:solidFill>
-                      <a:srgbClr val="E5E4E0"/>
-                    </a:solidFill>
-                  </a:tcPr>
-                </a:tc>
-                <a:tc>
-                  <a:txBody>
-                    <a:bodyPr/>
-                    <a:lstStyle/>
-                    <a:p>
-                      <a:pPr marL="0" indent="0">
-                        <a:lnSpc>
-                          <a:spcPts val="1820"/>
-                        </a:lnSpc>
-                        <a:buNone/>
-                      </a:pPr>
-                      <a:r>
-                        <a:rPr lang="en-US" sz="1300" b="1" dirty="0">
-                          <a:solidFill>
-                            <a:srgbClr val="3E4A57"/>
-                          </a:solidFill>
-                          <a:latin typeface="Arial" pitchFamily="34" charset="0"/>
-                          <a:ea typeface="Arial" pitchFamily="34" charset="-122"/>
-                          <a:cs typeface="Arial" pitchFamily="34" charset="-120"/>
-                        </a:rPr>
-                        <a:t>Tipo</a:t>
-                      </a:r>
-                      <a:endParaRPr lang="en-US" sz="1300" dirty="0">
-                        <a:latin typeface="Arial" charset="0"/>
-                        <a:ea typeface="Arial" charset="0"/>
-                        <a:cs typeface="Arial" charset="0"/>
-                      </a:endParaRPr>
-                    </a:p>
-                  </a:txBody>
-                  <a:tcPr marL="57785" marR="57785" marT="57785" marB="57785">
-                    <a:lnL w="12700" cap="flat" cmpd="sng" algn="ctr">
-                      <a:solidFill>
-                        <a:srgbClr val="B7B6B3"/>
-                      </a:solidFill>
-                      <a:prstDash val="solid"/>
-                      <a:round/>
-                      <a:headEnd type="none" w="med" len="med"/>
-                      <a:tailEnd type="none" w="med" len="med"/>
-                    </a:lnL>
-                    <a:lnR w="12700" cap="flat" cmpd="sng" algn="ctr">
-                      <a:solidFill>
-                        <a:srgbClr val="B7B6B3"/>
-                      </a:solidFill>
-                      <a:prstDash val="solid"/>
-                      <a:round/>
-                      <a:headEnd type="none" w="med" len="med"/>
-                      <a:tailEnd type="none" w="med" len="med"/>
-                    </a:lnR>
-                    <a:lnT w="12700" cap="flat" cmpd="sng" algn="ctr">
-                      <a:solidFill>
-                        <a:srgbClr val="C5C4C1"/>
-                      </a:solidFill>
-                      <a:prstDash val="solid"/>
-                      <a:round/>
-                      <a:headEnd type="none" w="med" len="med"/>
-                      <a:tailEnd type="none" w="med" len="med"/>
-                    </a:lnT>
-                    <a:lnB w="12700" cap="flat" cmpd="sng" algn="ctr">
-                      <a:solidFill>
-                        <a:srgbClr val="B7B6B3"/>
-                      </a:solidFill>
-                      <a:prstDash val="solid"/>
-                      <a:round/>
-                      <a:headEnd type="none" w="med" len="med"/>
-                      <a:tailEnd type="none" w="med" len="med"/>
-                    </a:lnB>
-                    <a:solidFill>
-                      <a:srgbClr val="E5E4E0"/>
-                    </a:solidFill>
-                  </a:tcPr>
-                </a:tc>
-                <a:extLst>
-                  <a:ext uri="{0D108BD9-81ED-4DB2-BD59-A6C34878D82A}">
-                    <a16:rowId xmlns:a16="http://schemas.microsoft.com/office/drawing/2014/main" val="10000"/>
-                  </a:ext>
-                </a:extLst>
-              </a:tr>
-              <a:tr h="356870">
-                <a:tc>
-                  <a:txBody>
-                    <a:bodyPr/>
-                    <a:lstStyle/>
-                    <a:p>
-                      <a:pPr marL="0" indent="0">
-                        <a:lnSpc>
-                          <a:spcPts val="1820"/>
-                        </a:lnSpc>
-                        <a:buNone/>
-                      </a:pPr>
-                      <a:r>
-                        <a:rPr lang="en-US" sz="1300" dirty="0">
-                          <a:solidFill>
-                            <a:srgbClr val="3E4A57"/>
-                          </a:solidFill>
-                          <a:latin typeface="Arial" pitchFamily="34" charset="0"/>
-                          <a:ea typeface="Arial" pitchFamily="34" charset="-122"/>
-                          <a:cs typeface="Arial" pitchFamily="34" charset="-120"/>
-                        </a:rPr>
-                        <a:t>Cantidad</a:t>
-                      </a:r>
-                      <a:endParaRPr lang="en-US" sz="1300" dirty="0">
-                        <a:latin typeface="Arial" charset="0"/>
-                        <a:ea typeface="Arial" charset="0"/>
-                        <a:cs typeface="Arial" charset="0"/>
-                      </a:endParaRPr>
-                    </a:p>
-                  </a:txBody>
-                  <a:tcPr marL="57785" marR="57785" marT="57785" marB="57785">
-                    <a:lnL w="12700" cap="flat" cmpd="sng" algn="ctr">
-                      <a:solidFill>
-                        <a:srgbClr val="C5C4C1"/>
-                      </a:solidFill>
-                      <a:prstDash val="solid"/>
-                      <a:round/>
-                      <a:headEnd type="none" w="med" len="med"/>
-                      <a:tailEnd type="none" w="med" len="med"/>
-                    </a:lnL>
-                    <a:lnR w="12700" cap="flat" cmpd="sng" algn="ctr">
-                      <a:solidFill>
-                        <a:srgbClr val="C5C4C1"/>
-                      </a:solidFill>
-                      <a:prstDash val="solid"/>
-                      <a:round/>
-                      <a:headEnd type="none" w="med" len="med"/>
-                      <a:tailEnd type="none" w="med" len="med"/>
-                    </a:lnR>
-                    <a:lnT w="12700" cap="flat" cmpd="sng" algn="ctr">
-                      <a:solidFill>
-                        <a:srgbClr val="B7B6B3"/>
-                      </a:solidFill>
-                      <a:prstDash val="solid"/>
-                      <a:round/>
-                      <a:headEnd type="none" w="med" len="med"/>
-                      <a:tailEnd type="none" w="med" len="med"/>
-                    </a:lnT>
-                    <a:lnB w="12700" cap="flat" cmpd="sng" algn="ctr">
-                      <a:solidFill>
-                        <a:srgbClr val="C5C4C1"/>
-                      </a:solidFill>
-                      <a:prstDash val="solid"/>
-                      <a:round/>
-                      <a:headEnd type="none" w="med" len="med"/>
-                      <a:tailEnd type="none" w="med" len="med"/>
-                    </a:lnB>
-                  </a:tcPr>
-                </a:tc>
-                <a:tc>
-                  <a:txBody>
-                    <a:bodyPr/>
-                    <a:lstStyle/>
-                    <a:p>
-                      <a:pPr marL="0" indent="0">
-                        <a:lnSpc>
-                          <a:spcPts val="1820"/>
-                        </a:lnSpc>
-                        <a:buNone/>
-                      </a:pPr>
-                      <a:r>
-                        <a:rPr lang="en-US" sz="1300" dirty="0">
-                          <a:solidFill>
-                            <a:srgbClr val="3E4A57"/>
-                          </a:solidFill>
-                          <a:latin typeface="Arial" pitchFamily="34" charset="0"/>
-                          <a:ea typeface="Arial" pitchFamily="34" charset="-122"/>
-                          <a:cs typeface="Arial" pitchFamily="34" charset="-120"/>
-                        </a:rPr>
-                        <a:t>Aditiva</a:t>
-                      </a:r>
-                      <a:endParaRPr lang="en-US" sz="1300" dirty="0">
-                        <a:latin typeface="Arial" charset="0"/>
-                        <a:ea typeface="Arial" charset="0"/>
-                        <a:cs typeface="Arial" charset="0"/>
-                      </a:endParaRPr>
-                    </a:p>
-                  </a:txBody>
-                  <a:tcPr marL="57785" marR="57785" marT="57785" marB="57785">
-                    <a:lnL w="12700" cap="flat" cmpd="sng" algn="ctr">
-                      <a:solidFill>
-                        <a:srgbClr val="C5C4C1"/>
-                      </a:solidFill>
-                      <a:prstDash val="solid"/>
-                      <a:round/>
-                      <a:headEnd type="none" w="med" len="med"/>
-                      <a:tailEnd type="none" w="med" len="med"/>
-                    </a:lnL>
-                    <a:lnR w="12700" cap="flat" cmpd="sng" algn="ctr">
-                      <a:solidFill>
-                        <a:srgbClr val="C5C4C1"/>
-                      </a:solidFill>
-                      <a:prstDash val="solid"/>
-                      <a:round/>
-                      <a:headEnd type="none" w="med" len="med"/>
-                      <a:tailEnd type="none" w="med" len="med"/>
-                    </a:lnR>
-                    <a:lnT w="12700" cap="flat" cmpd="sng" algn="ctr">
-                      <a:solidFill>
-                        <a:srgbClr val="B7B6B3"/>
-                      </a:solidFill>
-                      <a:prstDash val="solid"/>
-                      <a:round/>
-                      <a:headEnd type="none" w="med" len="med"/>
-                      <a:tailEnd type="none" w="med" len="med"/>
-                    </a:lnT>
-                    <a:lnB w="12700" cap="flat" cmpd="sng" algn="ctr">
-                      <a:solidFill>
-                        <a:srgbClr val="C5C4C1"/>
-                      </a:solidFill>
-                      <a:prstDash val="solid"/>
-                      <a:round/>
-                      <a:headEnd type="none" w="med" len="med"/>
-                      <a:tailEnd type="none" w="med" len="med"/>
-                    </a:lnB>
-                  </a:tcPr>
-                </a:tc>
-                <a:extLst>
-                  <a:ext uri="{0D108BD9-81ED-4DB2-BD59-A6C34878D82A}">
-                    <a16:rowId xmlns:a16="http://schemas.microsoft.com/office/drawing/2014/main" val="10001"/>
-                  </a:ext>
-                </a:extLst>
-              </a:tr>
-              <a:tr h="356870">
-                <a:tc>
-                  <a:txBody>
-                    <a:bodyPr/>
-                    <a:lstStyle/>
-                    <a:p>
-                      <a:pPr marL="0" indent="0">
-                        <a:lnSpc>
-                          <a:spcPts val="1820"/>
-                        </a:lnSpc>
-                        <a:buNone/>
-                      </a:pPr>
-                      <a:r>
-                        <a:rPr lang="en-US" sz="1300" dirty="0">
-                          <a:solidFill>
-                            <a:srgbClr val="3E4A57"/>
-                          </a:solidFill>
-                          <a:latin typeface="Arial" pitchFamily="34" charset="0"/>
-                          <a:ea typeface="Arial" pitchFamily="34" charset="-122"/>
-                          <a:cs typeface="Arial" pitchFamily="34" charset="-120"/>
-                        </a:rPr>
-                        <a:t>MontoBruto</a:t>
-                      </a:r>
-                      <a:endParaRPr lang="en-US" sz="1300" dirty="0">
-                        <a:latin typeface="Arial" charset="0"/>
-                        <a:ea typeface="Arial" charset="0"/>
-                        <a:cs typeface="Arial" charset="0"/>
-                      </a:endParaRPr>
-                    </a:p>
-                  </a:txBody>
-                  <a:tcPr marL="57785" marR="57785" marT="57785" marB="57785">
-                    <a:lnL w="12700" cap="flat" cmpd="sng" algn="ctr">
-                      <a:solidFill>
-                        <a:srgbClr val="C5C4C1"/>
-                      </a:solidFill>
-                      <a:prstDash val="solid"/>
-                      <a:round/>
-                      <a:headEnd type="none" w="med" len="med"/>
-                      <a:tailEnd type="none" w="med" len="med"/>
-                    </a:lnL>
-                    <a:lnR w="12700" cap="flat" cmpd="sng" algn="ctr">
-                      <a:solidFill>
-                        <a:srgbClr val="C5C4C1"/>
-                      </a:solidFill>
-                      <a:prstDash val="solid"/>
-                      <a:round/>
-                      <a:headEnd type="none" w="med" len="med"/>
-                      <a:tailEnd type="none" w="med" len="med"/>
-                    </a:lnR>
-                    <a:lnT w="12700" cap="flat" cmpd="sng" algn="ctr">
-                      <a:solidFill>
-                        <a:srgbClr val="C5C4C1"/>
-                      </a:solidFill>
-                      <a:prstDash val="solid"/>
-                      <a:round/>
-                      <a:headEnd type="none" w="med" len="med"/>
-                      <a:tailEnd type="none" w="med" len="med"/>
-                    </a:lnT>
-                    <a:lnB w="12700" cap="flat" cmpd="sng" algn="ctr">
-                      <a:solidFill>
-                        <a:srgbClr val="C5C4C1"/>
-                      </a:solidFill>
-                      <a:prstDash val="solid"/>
-                      <a:round/>
-                      <a:headEnd type="none" w="med" len="med"/>
-                      <a:tailEnd type="none" w="med" len="med"/>
-                    </a:lnB>
-                  </a:tcPr>
-                </a:tc>
-                <a:tc>
-                  <a:txBody>
-                    <a:bodyPr/>
-                    <a:lstStyle/>
-                    <a:p>
-                      <a:pPr marL="0" indent="0">
-                        <a:lnSpc>
-                          <a:spcPts val="1820"/>
-                        </a:lnSpc>
-                        <a:buNone/>
-                      </a:pPr>
-                      <a:r>
-                        <a:rPr lang="en-US" sz="1300" dirty="0">
-                          <a:solidFill>
-                            <a:srgbClr val="3E4A57"/>
-                          </a:solidFill>
-                          <a:latin typeface="Arial" pitchFamily="34" charset="0"/>
-                          <a:ea typeface="Arial" pitchFamily="34" charset="-122"/>
-                          <a:cs typeface="Arial" pitchFamily="34" charset="-120"/>
-                        </a:rPr>
-                        <a:t>Aditiva (cant. × precio)</a:t>
-                      </a:r>
-                      <a:endParaRPr lang="en-US" sz="1300" dirty="0">
-                        <a:latin typeface="Arial" charset="0"/>
-                        <a:ea typeface="Arial" charset="0"/>
-                        <a:cs typeface="Arial" charset="0"/>
-                      </a:endParaRPr>
-                    </a:p>
-                  </a:txBody>
-                  <a:tcPr marL="57785" marR="57785" marT="57785" marB="57785">
-                    <a:lnL w="12700" cap="flat" cmpd="sng" algn="ctr">
-                      <a:solidFill>
-                        <a:srgbClr val="C5C4C1"/>
-                      </a:solidFill>
-                      <a:prstDash val="solid"/>
-                      <a:round/>
-                      <a:headEnd type="none" w="med" len="med"/>
-                      <a:tailEnd type="none" w="med" len="med"/>
-                    </a:lnL>
-                    <a:lnR w="12700" cap="flat" cmpd="sng" algn="ctr">
-                      <a:solidFill>
-                        <a:srgbClr val="C5C4C1"/>
-                      </a:solidFill>
-                      <a:prstDash val="solid"/>
-                      <a:round/>
-                      <a:headEnd type="none" w="med" len="med"/>
-                      <a:tailEnd type="none" w="med" len="med"/>
-                    </a:lnR>
-                    <a:lnT w="12700" cap="flat" cmpd="sng" algn="ctr">
-                      <a:solidFill>
-                        <a:srgbClr val="C5C4C1"/>
-                      </a:solidFill>
-                      <a:prstDash val="solid"/>
-                      <a:round/>
-                      <a:headEnd type="none" w="med" len="med"/>
-                      <a:tailEnd type="none" w="med" len="med"/>
-                    </a:lnT>
-                    <a:lnB w="12700" cap="flat" cmpd="sng" algn="ctr">
-                      <a:solidFill>
-                        <a:srgbClr val="C5C4C1"/>
-                      </a:solidFill>
-                      <a:prstDash val="solid"/>
-                      <a:round/>
-                      <a:headEnd type="none" w="med" len="med"/>
-                      <a:tailEnd type="none" w="med" len="med"/>
-                    </a:lnB>
-                  </a:tcPr>
-                </a:tc>
-                <a:extLst>
-                  <a:ext uri="{0D108BD9-81ED-4DB2-BD59-A6C34878D82A}">
-                    <a16:rowId xmlns:a16="http://schemas.microsoft.com/office/drawing/2014/main" val="10002"/>
-                  </a:ext>
-                </a:extLst>
-              </a:tr>
-              <a:tr h="356870">
-                <a:tc>
-                  <a:txBody>
-                    <a:bodyPr/>
-                    <a:lstStyle/>
-                    <a:p>
-                      <a:pPr marL="0" indent="0">
-                        <a:lnSpc>
-                          <a:spcPts val="1820"/>
-                        </a:lnSpc>
-                        <a:buNone/>
-                      </a:pPr>
-                      <a:r>
-                        <a:rPr lang="en-US" sz="1300" dirty="0">
-                          <a:solidFill>
-                            <a:srgbClr val="3E4A57"/>
-                          </a:solidFill>
-                          <a:latin typeface="Arial" pitchFamily="34" charset="0"/>
-                          <a:ea typeface="Arial" pitchFamily="34" charset="-122"/>
-                          <a:cs typeface="Arial" pitchFamily="34" charset="-120"/>
-                        </a:rPr>
-                        <a:t>MontoDescuento</a:t>
-                      </a:r>
-                      <a:endParaRPr lang="en-US" sz="1300" dirty="0">
-                        <a:latin typeface="Arial" charset="0"/>
-                        <a:ea typeface="Arial" charset="0"/>
-                        <a:cs typeface="Arial" charset="0"/>
-                      </a:endParaRPr>
-                    </a:p>
-                  </a:txBody>
-                  <a:tcPr marL="57785" marR="57785" marT="57785" marB="57785">
-                    <a:lnL w="12700" cap="flat" cmpd="sng" algn="ctr">
-                      <a:solidFill>
-                        <a:srgbClr val="C5C4C1"/>
-                      </a:solidFill>
-                      <a:prstDash val="solid"/>
-                      <a:round/>
-                      <a:headEnd type="none" w="med" len="med"/>
-                      <a:tailEnd type="none" w="med" len="med"/>
-                    </a:lnL>
-                    <a:lnR w="12700" cap="flat" cmpd="sng" algn="ctr">
-                      <a:solidFill>
-                        <a:srgbClr val="C5C4C1"/>
-                      </a:solidFill>
-                      <a:prstDash val="solid"/>
-                      <a:round/>
-                      <a:headEnd type="none" w="med" len="med"/>
-                      <a:tailEnd type="none" w="med" len="med"/>
-                    </a:lnR>
-                    <a:lnT w="12700" cap="flat" cmpd="sng" algn="ctr">
-                      <a:solidFill>
-                        <a:srgbClr val="C5C4C1"/>
-                      </a:solidFill>
-                      <a:prstDash val="solid"/>
-                      <a:round/>
-                      <a:headEnd type="none" w="med" len="med"/>
-                      <a:tailEnd type="none" w="med" len="med"/>
-                    </a:lnT>
-                    <a:lnB w="12700" cap="flat" cmpd="sng" algn="ctr">
-                      <a:solidFill>
-                        <a:srgbClr val="C5C4C1"/>
-                      </a:solidFill>
-                      <a:prstDash val="solid"/>
-                      <a:round/>
-                      <a:headEnd type="none" w="med" len="med"/>
-                      <a:tailEnd type="none" w="med" len="med"/>
-                    </a:lnB>
-                  </a:tcPr>
-                </a:tc>
-                <a:tc>
-                  <a:txBody>
-                    <a:bodyPr/>
-                    <a:lstStyle/>
-                    <a:p>
-                      <a:pPr marL="0" indent="0">
-                        <a:lnSpc>
-                          <a:spcPts val="1820"/>
-                        </a:lnSpc>
-                        <a:buNone/>
-                      </a:pPr>
-                      <a:r>
-                        <a:rPr lang="en-US" sz="1300" dirty="0">
-                          <a:solidFill>
-                            <a:srgbClr val="3E4A57"/>
-                          </a:solidFill>
-                          <a:latin typeface="Arial" pitchFamily="34" charset="0"/>
-                          <a:ea typeface="Arial" pitchFamily="34" charset="-122"/>
-                          <a:cs typeface="Arial" pitchFamily="34" charset="-120"/>
-                        </a:rPr>
-                        <a:t>Aditiva (bruto × desc.)</a:t>
-                      </a:r>
-                      <a:endParaRPr lang="en-US" sz="1300" dirty="0">
-                        <a:latin typeface="Arial" charset="0"/>
-                        <a:ea typeface="Arial" charset="0"/>
-                        <a:cs typeface="Arial" charset="0"/>
-                      </a:endParaRPr>
-                    </a:p>
-                  </a:txBody>
-                  <a:tcPr marL="57785" marR="57785" marT="57785" marB="57785">
-                    <a:lnL w="12700" cap="flat" cmpd="sng" algn="ctr">
-                      <a:solidFill>
-                        <a:srgbClr val="C5C4C1"/>
-                      </a:solidFill>
-                      <a:prstDash val="solid"/>
-                      <a:round/>
-                      <a:headEnd type="none" w="med" len="med"/>
-                      <a:tailEnd type="none" w="med" len="med"/>
-                    </a:lnL>
-                    <a:lnR w="12700" cap="flat" cmpd="sng" algn="ctr">
-                      <a:solidFill>
-                        <a:srgbClr val="C5C4C1"/>
-                      </a:solidFill>
-                      <a:prstDash val="solid"/>
-                      <a:round/>
-                      <a:headEnd type="none" w="med" len="med"/>
-                      <a:tailEnd type="none" w="med" len="med"/>
-                    </a:lnR>
-                    <a:lnT w="12700" cap="flat" cmpd="sng" algn="ctr">
-                      <a:solidFill>
-                        <a:srgbClr val="C5C4C1"/>
-                      </a:solidFill>
-                      <a:prstDash val="solid"/>
-                      <a:round/>
-                      <a:headEnd type="none" w="med" len="med"/>
-                      <a:tailEnd type="none" w="med" len="med"/>
-                    </a:lnT>
-                    <a:lnB w="12700" cap="flat" cmpd="sng" algn="ctr">
-                      <a:solidFill>
-                        <a:srgbClr val="C5C4C1"/>
-                      </a:solidFill>
-                      <a:prstDash val="solid"/>
-                      <a:round/>
-                      <a:headEnd type="none" w="med" len="med"/>
-                      <a:tailEnd type="none" w="med" len="med"/>
-                    </a:lnB>
-                  </a:tcPr>
-                </a:tc>
-                <a:extLst>
-                  <a:ext uri="{0D108BD9-81ED-4DB2-BD59-A6C34878D82A}">
-                    <a16:rowId xmlns:a16="http://schemas.microsoft.com/office/drawing/2014/main" val="10003"/>
-                  </a:ext>
-                </a:extLst>
-              </a:tr>
-              <a:tr h="356870">
-                <a:tc>
-                  <a:txBody>
-                    <a:bodyPr/>
-                    <a:lstStyle/>
-                    <a:p>
-                      <a:pPr marL="0" indent="0">
-                        <a:lnSpc>
-                          <a:spcPts val="1820"/>
-                        </a:lnSpc>
-                        <a:buNone/>
-                      </a:pPr>
-                      <a:r>
-                        <a:rPr lang="en-US" sz="1300" dirty="0">
-                          <a:solidFill>
-                            <a:srgbClr val="3E4A57"/>
-                          </a:solidFill>
-                          <a:latin typeface="Arial" pitchFamily="34" charset="0"/>
-                          <a:ea typeface="Arial" pitchFamily="34" charset="-122"/>
-                          <a:cs typeface="Arial" pitchFamily="34" charset="-120"/>
-                        </a:rPr>
-                        <a:t>MontoNeto</a:t>
-                      </a:r>
-                      <a:endParaRPr lang="en-US" sz="1300" dirty="0">
-                        <a:latin typeface="Arial" charset="0"/>
-                        <a:ea typeface="Arial" charset="0"/>
-                        <a:cs typeface="Arial" charset="0"/>
-                      </a:endParaRPr>
-                    </a:p>
-                  </a:txBody>
-                  <a:tcPr marL="57785" marR="57785" marT="57785" marB="57785">
-                    <a:lnL w="12700" cap="flat" cmpd="sng" algn="ctr">
-                      <a:solidFill>
-                        <a:srgbClr val="C5C4C1"/>
-                      </a:solidFill>
-                      <a:prstDash val="solid"/>
-                      <a:round/>
-                      <a:headEnd type="none" w="med" len="med"/>
-                      <a:tailEnd type="none" w="med" len="med"/>
-                    </a:lnL>
-                    <a:lnR w="12700" cap="flat" cmpd="sng" algn="ctr">
-                      <a:solidFill>
-                        <a:srgbClr val="C5C4C1"/>
-                      </a:solidFill>
-                      <a:prstDash val="solid"/>
-                      <a:round/>
-                      <a:headEnd type="none" w="med" len="med"/>
-                      <a:tailEnd type="none" w="med" len="med"/>
-                    </a:lnR>
-                    <a:lnT w="12700" cap="flat" cmpd="sng" algn="ctr">
-                      <a:solidFill>
-                        <a:srgbClr val="C5C4C1"/>
-                      </a:solidFill>
-                      <a:prstDash val="solid"/>
-                      <a:round/>
-                      <a:headEnd type="none" w="med" len="med"/>
-                      <a:tailEnd type="none" w="med" len="med"/>
-                    </a:lnT>
-                    <a:lnB w="12700" cap="flat" cmpd="sng" algn="ctr">
-                      <a:solidFill>
-                        <a:srgbClr val="C5C4C1"/>
-                      </a:solidFill>
-                      <a:prstDash val="solid"/>
-                      <a:round/>
-                      <a:headEnd type="none" w="med" len="med"/>
-                      <a:tailEnd type="none" w="med" len="med"/>
-                    </a:lnB>
-                  </a:tcPr>
-                </a:tc>
-                <a:tc>
-                  <a:txBody>
-                    <a:bodyPr/>
-                    <a:lstStyle/>
-                    <a:p>
-                      <a:pPr marL="0" indent="0">
-                        <a:lnSpc>
-                          <a:spcPts val="1820"/>
-                        </a:lnSpc>
-                        <a:buNone/>
-                      </a:pPr>
-                      <a:r>
-                        <a:rPr lang="en-US" sz="1300" dirty="0">
-                          <a:solidFill>
-                            <a:srgbClr val="3E4A57"/>
-                          </a:solidFill>
-                          <a:latin typeface="Arial" pitchFamily="34" charset="0"/>
-                          <a:ea typeface="Arial" pitchFamily="34" charset="-122"/>
-                          <a:cs typeface="Arial" pitchFamily="34" charset="-120"/>
-                        </a:rPr>
-                        <a:t>Aditiva (bruto − desc.)</a:t>
-                      </a:r>
-                      <a:endParaRPr lang="en-US" sz="1300" dirty="0">
-                        <a:latin typeface="Arial" charset="0"/>
-                        <a:ea typeface="Arial" charset="0"/>
-                        <a:cs typeface="Arial" charset="0"/>
-                      </a:endParaRPr>
-                    </a:p>
-                  </a:txBody>
-                  <a:tcPr marL="57785" marR="57785" marT="57785" marB="57785">
-                    <a:lnL w="12700" cap="flat" cmpd="sng" algn="ctr">
-                      <a:solidFill>
-                        <a:srgbClr val="C5C4C1"/>
-                      </a:solidFill>
-                      <a:prstDash val="solid"/>
-                      <a:round/>
-                      <a:headEnd type="none" w="med" len="med"/>
-                      <a:tailEnd type="none" w="med" len="med"/>
-                    </a:lnL>
-                    <a:lnR w="12700" cap="flat" cmpd="sng" algn="ctr">
-                      <a:solidFill>
-                        <a:srgbClr val="C5C4C1"/>
-                      </a:solidFill>
-                      <a:prstDash val="solid"/>
-                      <a:round/>
-                      <a:headEnd type="none" w="med" len="med"/>
-                      <a:tailEnd type="none" w="med" len="med"/>
-                    </a:lnR>
-                    <a:lnT w="12700" cap="flat" cmpd="sng" algn="ctr">
-                      <a:solidFill>
-                        <a:srgbClr val="C5C4C1"/>
-                      </a:solidFill>
-                      <a:prstDash val="solid"/>
-                      <a:round/>
-                      <a:headEnd type="none" w="med" len="med"/>
-                      <a:tailEnd type="none" w="med" len="med"/>
-                    </a:lnT>
-                    <a:lnB w="12700" cap="flat" cmpd="sng" algn="ctr">
-                      <a:solidFill>
-                        <a:srgbClr val="C5C4C1"/>
-                      </a:solidFill>
-                      <a:prstDash val="solid"/>
-                      <a:round/>
-                      <a:headEnd type="none" w="med" len="med"/>
-                      <a:tailEnd type="none" w="med" len="med"/>
-                    </a:lnB>
-                  </a:tcPr>
-                </a:tc>
-                <a:extLst>
-                  <a:ext uri="{0D108BD9-81ED-4DB2-BD59-A6C34878D82A}">
-                    <a16:rowId xmlns:a16="http://schemas.microsoft.com/office/drawing/2014/main" val="10004"/>
-                  </a:ext>
-                </a:extLst>
-              </a:tr>
-              <a:tr h="588010">
-                <a:tc>
-                  <a:txBody>
-                    <a:bodyPr/>
-                    <a:lstStyle/>
-                    <a:p>
-                      <a:pPr marL="0" indent="0">
-                        <a:lnSpc>
-                          <a:spcPts val="1820"/>
-                        </a:lnSpc>
-                        <a:buNone/>
-                      </a:pPr>
-                      <a:r>
-                        <a:rPr lang="en-US" sz="1300" dirty="0">
-                          <a:solidFill>
-                            <a:srgbClr val="3E4A57"/>
-                          </a:solidFill>
-                          <a:latin typeface="Arial" pitchFamily="34" charset="0"/>
-                          <a:ea typeface="Arial" pitchFamily="34" charset="-122"/>
-                          <a:cs typeface="Arial" pitchFamily="34" charset="-120"/>
-                        </a:rPr>
-                        <a:t>Precio, Descuento, DiasDespacho</a:t>
-                      </a:r>
-                      <a:endParaRPr lang="en-US" sz="1300" dirty="0">
-                        <a:latin typeface="Arial" charset="0"/>
-                        <a:ea typeface="Arial" charset="0"/>
-                        <a:cs typeface="Arial" charset="0"/>
-                      </a:endParaRPr>
-                    </a:p>
-                  </a:txBody>
-                  <a:tcPr marL="57785" marR="57785" marT="57785" marB="57785">
-                    <a:lnL w="12700" cap="flat" cmpd="sng" algn="ctr">
-                      <a:solidFill>
-                        <a:srgbClr val="C5C4C1"/>
-                      </a:solidFill>
-                      <a:prstDash val="solid"/>
-                      <a:round/>
-                      <a:headEnd type="none" w="med" len="med"/>
-                      <a:tailEnd type="none" w="med" len="med"/>
-                    </a:lnL>
-                    <a:lnR w="12700" cap="flat" cmpd="sng" algn="ctr">
-                      <a:solidFill>
-                        <a:srgbClr val="C5C4C1"/>
-                      </a:solidFill>
-                      <a:prstDash val="solid"/>
-                      <a:round/>
-                      <a:headEnd type="none" w="med" len="med"/>
-                      <a:tailEnd type="none" w="med" len="med"/>
-                    </a:lnR>
-                    <a:lnT w="12700" cap="flat" cmpd="sng" algn="ctr">
-                      <a:solidFill>
-                        <a:srgbClr val="C5C4C1"/>
-                      </a:solidFill>
-                      <a:prstDash val="solid"/>
-                      <a:round/>
-                      <a:headEnd type="none" w="med" len="med"/>
-                      <a:tailEnd type="none" w="med" len="med"/>
-                    </a:lnT>
-                    <a:lnB w="12700" cap="flat" cmpd="sng" algn="ctr">
-                      <a:solidFill>
-                        <a:srgbClr val="C5C4C1"/>
-                      </a:solidFill>
-                      <a:prstDash val="solid"/>
-                      <a:round/>
-                      <a:headEnd type="none" w="med" len="med"/>
-                      <a:tailEnd type="none" w="med" len="med"/>
-                    </a:lnB>
-                  </a:tcPr>
-                </a:tc>
-                <a:tc>
-                  <a:txBody>
-                    <a:bodyPr/>
-                    <a:lstStyle/>
-                    <a:p>
-                      <a:pPr marL="0" indent="0">
-                        <a:lnSpc>
-                          <a:spcPts val="1820"/>
-                        </a:lnSpc>
-                        <a:buNone/>
-                      </a:pPr>
-                      <a:r>
-                        <a:rPr lang="en-US" sz="1300" dirty="0">
-                          <a:solidFill>
-                            <a:srgbClr val="3E4A57"/>
-                          </a:solidFill>
-                          <a:latin typeface="Arial" pitchFamily="34" charset="0"/>
-                          <a:ea typeface="Arial" pitchFamily="34" charset="-122"/>
-                          <a:cs typeface="Arial" pitchFamily="34" charset="-120"/>
-                        </a:rPr>
-                        <a:t>No aditivas: solo promediar</a:t>
-                      </a:r>
-                      <a:endParaRPr lang="en-US" sz="1300" dirty="0">
-                        <a:latin typeface="Arial" charset="0"/>
-                        <a:ea typeface="Arial" charset="0"/>
-                        <a:cs typeface="Arial" charset="0"/>
-                      </a:endParaRPr>
-                    </a:p>
-                  </a:txBody>
-                  <a:tcPr marL="57785" marR="57785" marT="57785" marB="57785">
-                    <a:lnL w="12700" cap="flat" cmpd="sng" algn="ctr">
-                      <a:solidFill>
-                        <a:srgbClr val="C5C4C1"/>
-                      </a:solidFill>
-                      <a:prstDash val="solid"/>
-                      <a:round/>
-                      <a:headEnd type="none" w="med" len="med"/>
-                      <a:tailEnd type="none" w="med" len="med"/>
-                    </a:lnL>
-                    <a:lnR w="12700" cap="flat" cmpd="sng" algn="ctr">
-                      <a:solidFill>
-                        <a:srgbClr val="C5C4C1"/>
-                      </a:solidFill>
-                      <a:prstDash val="solid"/>
-                      <a:round/>
-                      <a:headEnd type="none" w="med" len="med"/>
-                      <a:tailEnd type="none" w="med" len="med"/>
-                    </a:lnR>
-                    <a:lnT w="12700" cap="flat" cmpd="sng" algn="ctr">
-                      <a:solidFill>
-                        <a:srgbClr val="C5C4C1"/>
-                      </a:solidFill>
-                      <a:prstDash val="solid"/>
-                      <a:round/>
-                      <a:headEnd type="none" w="med" len="med"/>
-                      <a:tailEnd type="none" w="med" len="med"/>
-                    </a:lnT>
-                    <a:lnB w="12700" cap="flat" cmpd="sng" algn="ctr">
-                      <a:solidFill>
-                        <a:srgbClr val="C5C4C1"/>
-                      </a:solidFill>
-                      <a:prstDash val="solid"/>
-                      <a:round/>
-                      <a:headEnd type="none" w="med" len="med"/>
-                      <a:tailEnd type="none" w="med" len="med"/>
-                    </a:lnB>
-                  </a:tcPr>
-                </a:tc>
-                <a:extLst>
-                  <a:ext uri="{0D108BD9-81ED-4DB2-BD59-A6C34878D82A}">
-                    <a16:rowId xmlns:a16="http://schemas.microsoft.com/office/drawing/2014/main" val="10005"/>
-                  </a:ext>
-                </a:extLst>
-              </a:tr>
-            </a:tbl>
-          </a:graphicData>
-        </a:graphic>
-      </p:graphicFrame>
-      <p:sp>
-        <p:nvSpPr>
           <p:cNvPr id="9" name="Text 5"/>
           <p:cNvSpPr/>
           <p:nvPr/>
@@ -9371,6 +8055,507 @@
               <a:t>6</a:t>
             </a:r>
             <a:endParaRPr lang="en-US" sz="1200" dirty="0"/>
+          </a:p>
+        </p:txBody>
+      </p:sp>
+      <p:sp>
+        <p:nvSpPr>
+          <p:cNvPr id="10" name="Rounded Rectangle 9"/>
+          <p:cNvSpPr/>
+          <p:nvPr/>
+        </p:nvSpPr>
+        <p:spPr>
+          <a:xfrm>
+            <a:off x="813816" y="1874519"/>
+            <a:ext cx="6309360" cy="3520440"/>
+          </a:xfrm>
+          <a:prstGeom prst="roundRect">
+            <a:avLst>
+              <a:gd name="adj" fmla="val 4000"/>
+            </a:avLst>
+          </a:prstGeom>
+          <a:solidFill>
+            <a:srgbClr val="1B2A3A"/>
+          </a:solidFill>
+          <a:ln>
+            <a:noFill/>
+          </a:ln>
+          <a:effectLst/>
+        </p:spPr>
+        <p:style>
+          <a:lnRef idx="1">
+            <a:schemeClr val="accent1"/>
+          </a:lnRef>
+          <a:fillRef idx="3">
+            <a:schemeClr val="accent1"/>
+          </a:fillRef>
+          <a:effectRef idx="2">
+            <a:schemeClr val="accent1"/>
+          </a:effectRef>
+          <a:fontRef idx="minor">
+            <a:schemeClr val="lt1"/>
+          </a:fontRef>
+        </p:style>
+        <p:txBody>
+          <a:bodyPr wrap="square" lIns="201168" tIns="146304" rIns="201168" bIns="146304" rtlCol="0" anchor="t"/>
+          <a:lstStyle/>
+          <a:p>
+            <a:pPr algn="l">
+              <a:lnSpc>
+                <a:spcPct val="110000"/>
+              </a:lnSpc>
+            </a:pPr>
+            <a:r>
+              <a:rPr sz="1300">
+                <a:solidFill>
+                  <a:srgbClr val="E8A35A"/>
+                </a:solidFill>
+                <a:latin typeface="Consolas"/>
+              </a:rPr>
+              <a:t>-- FactVentas (resumen de columnas)</a:t>
+            </a:r>
+          </a:p>
+          <a:p>
+            <a:pPr algn="l">
+              <a:lnSpc>
+                <a:spcPct val="110000"/>
+              </a:lnSpc>
+            </a:pPr>
+            <a:r>
+              <a:rPr sz="1300">
+                <a:solidFill>
+                  <a:srgbClr val="E6E1D6"/>
+                </a:solidFill>
+                <a:latin typeface="Consolas"/>
+              </a:rPr>
+              <a:t>OrdenID           </a:t>
+            </a:r>
+            <a:r>
+              <a:rPr sz="1300">
+                <a:solidFill>
+                  <a:srgbClr val="E8A35A"/>
+                </a:solidFill>
+                <a:latin typeface="Consolas"/>
+              </a:rPr>
+              <a:t>-- dimensión degenerada</a:t>
+            </a:r>
+          </a:p>
+          <a:p>
+            <a:pPr algn="l">
+              <a:lnSpc>
+                <a:spcPct val="110000"/>
+              </a:lnSpc>
+            </a:pPr>
+            <a:r>
+              <a:rPr sz="1300">
+                <a:solidFill>
+                  <a:srgbClr val="E6E1D6"/>
+                </a:solidFill>
+                <a:latin typeface="Consolas"/>
+              </a:rPr>
+              <a:t>ProductoKey       </a:t>
+            </a:r>
+            <a:r>
+              <a:rPr sz="1300">
+                <a:solidFill>
+                  <a:srgbClr val="E8A35A"/>
+                </a:solidFill>
+                <a:latin typeface="Consolas"/>
+              </a:rPr>
+              <a:t>-- → DimProducto</a:t>
+            </a:r>
+          </a:p>
+          <a:p>
+            <a:pPr algn="l">
+              <a:lnSpc>
+                <a:spcPct val="110000"/>
+              </a:lnSpc>
+            </a:pPr>
+            <a:r>
+              <a:rPr sz="1300">
+                <a:solidFill>
+                  <a:srgbClr val="E6E1D6"/>
+                </a:solidFill>
+                <a:latin typeface="Consolas"/>
+              </a:rPr>
+              <a:t>ClienteKey        </a:t>
+            </a:r>
+            <a:r>
+              <a:rPr sz="1300">
+                <a:solidFill>
+                  <a:srgbClr val="E8A35A"/>
+                </a:solidFill>
+                <a:latin typeface="Consolas"/>
+              </a:rPr>
+              <a:t>-- → DimCliente</a:t>
+            </a:r>
+          </a:p>
+          <a:p>
+            <a:pPr algn="l">
+              <a:lnSpc>
+                <a:spcPct val="110000"/>
+              </a:lnSpc>
+            </a:pPr>
+            <a:r>
+              <a:rPr sz="1300">
+                <a:solidFill>
+                  <a:srgbClr val="E6E1D6"/>
+                </a:solidFill>
+                <a:latin typeface="Consolas"/>
+              </a:rPr>
+              <a:t>EmpleadoKey       </a:t>
+            </a:r>
+            <a:r>
+              <a:rPr sz="1300">
+                <a:solidFill>
+                  <a:srgbClr val="E8A35A"/>
+                </a:solidFill>
+                <a:latin typeface="Consolas"/>
+              </a:rPr>
+              <a:t>-- → DimEmpleado</a:t>
+            </a:r>
+          </a:p>
+          <a:p>
+            <a:pPr algn="l">
+              <a:lnSpc>
+                <a:spcPct val="110000"/>
+              </a:lnSpc>
+            </a:pPr>
+            <a:r>
+              <a:rPr sz="1300">
+                <a:solidFill>
+                  <a:srgbClr val="E6E1D6"/>
+                </a:solidFill>
+                <a:latin typeface="Consolas"/>
+              </a:rPr>
+              <a:t>TransportistaKey  </a:t>
+            </a:r>
+            <a:r>
+              <a:rPr sz="1300">
+                <a:solidFill>
+                  <a:srgbClr val="E8A35A"/>
+                </a:solidFill>
+                <a:latin typeface="Consolas"/>
+              </a:rPr>
+              <a:t>-- → DimTransportista</a:t>
+            </a:r>
+          </a:p>
+          <a:p>
+            <a:pPr algn="l">
+              <a:lnSpc>
+                <a:spcPct val="110000"/>
+              </a:lnSpc>
+            </a:pPr>
+            <a:r>
+              <a:rPr sz="1300">
+                <a:solidFill>
+                  <a:srgbClr val="E6E1D6"/>
+                </a:solidFill>
+                <a:latin typeface="Consolas"/>
+              </a:rPr>
+              <a:t>FechaOrdenKey     </a:t>
+            </a:r>
+            <a:r>
+              <a:rPr sz="1300">
+                <a:solidFill>
+                  <a:srgbClr val="E8A35A"/>
+                </a:solidFill>
+                <a:latin typeface="Consolas"/>
+              </a:rPr>
+              <a:t>-- → DimTiempo (rol 1)</a:t>
+            </a:r>
+          </a:p>
+          <a:p>
+            <a:pPr algn="l">
+              <a:lnSpc>
+                <a:spcPct val="110000"/>
+              </a:lnSpc>
+            </a:pPr>
+            <a:r>
+              <a:rPr sz="1300">
+                <a:solidFill>
+                  <a:srgbClr val="E6E1D6"/>
+                </a:solidFill>
+                <a:latin typeface="Consolas"/>
+              </a:rPr>
+              <a:t>FechaEnvioKey     </a:t>
+            </a:r>
+            <a:r>
+              <a:rPr sz="1300">
+                <a:solidFill>
+                  <a:srgbClr val="E8A35A"/>
+                </a:solidFill>
+                <a:latin typeface="Consolas"/>
+              </a:rPr>
+              <a:t>-- → DimTiempo (rol 2)</a:t>
+            </a:r>
+          </a:p>
+          <a:p>
+            <a:pPr algn="l">
+              <a:lnSpc>
+                <a:spcPct val="110000"/>
+              </a:lnSpc>
+            </a:pPr>
+            <a:r>
+              <a:rPr sz="1300">
+                <a:latin typeface="Consolas"/>
+              </a:rPr>
+              <a:t> </a:t>
+            </a:r>
+          </a:p>
+          <a:p>
+            <a:pPr algn="l">
+              <a:lnSpc>
+                <a:spcPct val="110000"/>
+              </a:lnSpc>
+            </a:pPr>
+            <a:r>
+              <a:rPr sz="1300">
+                <a:solidFill>
+                  <a:srgbClr val="E6E1D6"/>
+                </a:solidFill>
+                <a:latin typeface="Consolas"/>
+              </a:rPr>
+              <a:t>Cantidad, PrecioUnitario, Descuento</a:t>
+            </a:r>
+          </a:p>
+          <a:p>
+            <a:pPr algn="l">
+              <a:lnSpc>
+                <a:spcPct val="110000"/>
+              </a:lnSpc>
+            </a:pPr>
+            <a:r>
+              <a:rPr sz="1300">
+                <a:solidFill>
+                  <a:srgbClr val="E6E1D6"/>
+                </a:solidFill>
+                <a:latin typeface="Consolas"/>
+              </a:rPr>
+              <a:t>MontoBruto, MontoDescuento, MontoNeto</a:t>
+            </a:r>
+          </a:p>
+          <a:p>
+            <a:pPr algn="l">
+              <a:lnSpc>
+                <a:spcPct val="110000"/>
+              </a:lnSpc>
+            </a:pPr>
+            <a:r>
+              <a:rPr sz="1300">
+                <a:solidFill>
+                  <a:srgbClr val="E6E1D6"/>
+                </a:solidFill>
+                <a:latin typeface="Consolas"/>
+              </a:rPr>
+              <a:t>DiasDespacho</a:t>
+            </a:r>
+          </a:p>
+        </p:txBody>
+      </p:sp>
+      <p:sp>
+        <p:nvSpPr>
+          <p:cNvPr id="11" name="TextBox 10"/>
+          <p:cNvSpPr txBox="1"/>
+          <p:nvPr/>
+        </p:nvSpPr>
+        <p:spPr>
+          <a:xfrm>
+            <a:off x="7397496" y="1874519"/>
+            <a:ext cx="3931920" cy="274320"/>
+          </a:xfrm>
+          <a:prstGeom prst="rect">
+            <a:avLst/>
+          </a:prstGeom>
+          <a:noFill/>
+        </p:spPr>
+        <p:txBody>
+          <a:bodyPr wrap="square" lIns="0" tIns="0" rIns="0" bIns="0">
+            <a:spAutoFit/>
+          </a:bodyPr>
+          <a:lstStyle/>
+          <a:p>
+            <a:pPr algn="l">
+              <a:lnSpc>
+                <a:spcPct val="115000"/>
+              </a:lnSpc>
+              <a:spcAft>
+                <a:spcPts val="600"/>
+              </a:spcAft>
+            </a:pPr>
+            <a:r>
+              <a:rPr sz="1200" b="1">
+                <a:solidFill>
+                  <a:srgbClr val="A0521A"/>
+                </a:solidFill>
+                <a:latin typeface="Arial"/>
+              </a:rPr>
+              <a:t>PASO 3 · DIMENSIONES</a:t>
+            </a:r>
+          </a:p>
+        </p:txBody>
+      </p:sp>
+      <p:sp>
+        <p:nvSpPr>
+          <p:cNvPr id="12" name="TextBox 11"/>
+          <p:cNvSpPr txBox="1"/>
+          <p:nvPr/>
+        </p:nvSpPr>
+        <p:spPr>
+          <a:xfrm>
+            <a:off x="7397496" y="2194560"/>
+            <a:ext cx="3977639" cy="1645920"/>
+          </a:xfrm>
+          <a:prstGeom prst="rect">
+            <a:avLst/>
+          </a:prstGeom>
+          <a:noFill/>
+        </p:spPr>
+        <p:txBody>
+          <a:bodyPr wrap="square" lIns="0" tIns="0" rIns="0" bIns="0">
+            <a:spAutoFit/>
+          </a:bodyPr>
+          <a:lstStyle/>
+          <a:p>
+            <a:pPr algn="l">
+              <a:lnSpc>
+                <a:spcPct val="115000"/>
+              </a:lnSpc>
+              <a:spcAft>
+                <a:spcPts val="600"/>
+              </a:spcAft>
+            </a:pPr>
+            <a:r>
+              <a:rPr sz="1500" b="0">
+                <a:solidFill>
+                  <a:srgbClr val="3E4A57"/>
+                </a:solidFill>
+                <a:latin typeface="Arial"/>
+              </a:rPr>
+              <a:t>Cuándo, a quién, qué, quién vendió y quién despachó.</a:t>
+            </a:r>
+          </a:p>
+          <a:p>
+            <a:pPr algn="l">
+              <a:lnSpc>
+                <a:spcPct val="115000"/>
+              </a:lnSpc>
+              <a:spcAft>
+                <a:spcPts val="600"/>
+              </a:spcAft>
+            </a:pPr>
+            <a:r>
+              <a:rPr sz="1500" b="0">
+                <a:solidFill>
+                  <a:srgbClr val="3E4A57"/>
+                </a:solidFill>
+                <a:latin typeface="Arial"/>
+              </a:rPr>
+              <a:t>DimTiempo se usa dos veces: fecha de orden y de envío.</a:t>
+            </a:r>
+          </a:p>
+        </p:txBody>
+      </p:sp>
+      <p:sp>
+        <p:nvSpPr>
+          <p:cNvPr id="13" name="TextBox 12"/>
+          <p:cNvSpPr txBox="1"/>
+          <p:nvPr/>
+        </p:nvSpPr>
+        <p:spPr>
+          <a:xfrm>
+            <a:off x="7397496" y="3886200"/>
+            <a:ext cx="3931920" cy="274320"/>
+          </a:xfrm>
+          <a:prstGeom prst="rect">
+            <a:avLst/>
+          </a:prstGeom>
+          <a:noFill/>
+        </p:spPr>
+        <p:txBody>
+          <a:bodyPr wrap="square" lIns="0" tIns="0" rIns="0" bIns="0">
+            <a:spAutoFit/>
+          </a:bodyPr>
+          <a:lstStyle/>
+          <a:p>
+            <a:pPr algn="l">
+              <a:lnSpc>
+                <a:spcPct val="115000"/>
+              </a:lnSpc>
+              <a:spcAft>
+                <a:spcPts val="600"/>
+              </a:spcAft>
+            </a:pPr>
+            <a:r>
+              <a:rPr sz="1200" b="1">
+                <a:solidFill>
+                  <a:srgbClr val="A0521A"/>
+                </a:solidFill>
+                <a:latin typeface="Arial"/>
+              </a:rPr>
+              <a:t>PASO 4 · MEDIDAS</a:t>
+            </a:r>
+          </a:p>
+        </p:txBody>
+      </p:sp>
+      <p:sp>
+        <p:nvSpPr>
+          <p:cNvPr id="14" name="TextBox 13"/>
+          <p:cNvSpPr txBox="1"/>
+          <p:nvPr/>
+        </p:nvSpPr>
+        <p:spPr>
+          <a:xfrm>
+            <a:off x="7397496" y="4206240"/>
+            <a:ext cx="3977639" cy="1645920"/>
+          </a:xfrm>
+          <a:prstGeom prst="rect">
+            <a:avLst/>
+          </a:prstGeom>
+          <a:noFill/>
+        </p:spPr>
+        <p:txBody>
+          <a:bodyPr wrap="square" lIns="0" tIns="0" rIns="0" bIns="0">
+            <a:spAutoFit/>
+          </a:bodyPr>
+          <a:lstStyle/>
+          <a:p>
+            <a:pPr algn="l">
+              <a:lnSpc>
+                <a:spcPct val="115000"/>
+              </a:lnSpc>
+              <a:spcAft>
+                <a:spcPts val="600"/>
+              </a:spcAft>
+            </a:pPr>
+            <a:r>
+              <a:rPr sz="1500" b="0">
+                <a:solidFill>
+                  <a:srgbClr val="3E4A57"/>
+                </a:solidFill>
+                <a:latin typeface="Arial"/>
+              </a:rPr>
+              <a:t>Se suman: cantidad y montos.</a:t>
+            </a:r>
+          </a:p>
+          <a:p>
+            <a:pPr algn="l">
+              <a:lnSpc>
+                <a:spcPct val="115000"/>
+              </a:lnSpc>
+              <a:spcAft>
+                <a:spcPts val="600"/>
+              </a:spcAft>
+            </a:pPr>
+            <a:r>
+              <a:rPr sz="1500" b="0">
+                <a:solidFill>
+                  <a:srgbClr val="3E4A57"/>
+                </a:solidFill>
+                <a:latin typeface="Arial"/>
+              </a:rPr>
+              <a:t>Solo se promedian: precio, descuento y días de despacho.</a:t>
+            </a:r>
           </a:p>
         </p:txBody>
       </p:sp>
@@ -9532,15 +8717,7 @@
 
 <file path=ppt/slides/slide8.xml><?xml version="1.0" encoding="utf-8"?>
 <p:sld xmlns:a="http://schemas.openxmlformats.org/drawingml/2006/main" xmlns:r="http://schemas.openxmlformats.org/officeDocument/2006/relationships" xmlns:p="http://schemas.openxmlformats.org/presentationml/2006/main">
-  <p:cSld name="Slide 8">
-    <p:bg>
-      <p:bgPr>
-        <a:solidFill>
-          <a:srgbClr val="F7F6F2"/>
-        </a:solidFill>
-        <a:effectLst/>
-      </p:bgPr>
-    </p:bg>
+  <p:cSld>
     <p:spTree>
       <p:nvGrpSpPr>
         <p:cNvPr id="1" name=""/>
@@ -9995,7 +9172,7 @@
 
 <file path=ppt/slides/slide9.xml><?xml version="1.0" encoding="utf-8"?>
 <p:sld xmlns:a="http://schemas.openxmlformats.org/drawingml/2006/main" xmlns:r="http://schemas.openxmlformats.org/officeDocument/2006/relationships" xmlns:p="http://schemas.openxmlformats.org/presentationml/2006/main">
-  <p:cSld name="Slide 9">
+  <p:cSld>
     <p:bg>
       <p:bgPr>
         <a:solidFill>
@@ -10041,24 +9218,54 @@
           </a:bodyPr>
           <a:lstStyle/>
           <a:p>
-            <a:pPr marL="0" indent="0" algn="l">
+            <a:pPr marL="0" marR="0" lvl="0" indent="0" algn="l" defTabSz="914400" rtl="0" eaLnBrk="1" fontAlgn="auto" latinLnBrk="0" hangingPunct="1">
               <a:lnSpc>
                 <a:spcPts val="1680"/>
               </a:lnSpc>
+              <a:spcBef>
+                <a:spcPts val="0"/>
+              </a:spcBef>
+              <a:spcAft>
+                <a:spcPts val="0"/>
+              </a:spcAft>
+              <a:buClrTx/>
+              <a:buSzTx/>
+              <a:buFontTx/>
               <a:buNone/>
-            </a:pPr>
-            <a:r>
-              <a:rPr lang="en-US" sz="1200" kern="0" spc="150" dirty="0">
+              <a:tabLst/>
+              <a:defRPr/>
+            </a:pPr>
+            <a:r>
+              <a:rPr kumimoji="0" lang="en-US" sz="1200" b="0" i="0" u="none" strike="noStrike" kern="0" cap="none" spc="150" normalizeH="0" baseline="0" noProof="0" dirty="0">
+                <a:ln>
+                  <a:noFill/>
+                </a:ln>
                 <a:solidFill>
                   <a:srgbClr val="A0521A"/>
                 </a:solidFill>
+                <a:effectLst/>
+                <a:uLnTx/>
+                <a:uFillTx/>
                 <a:latin typeface="Arial" pitchFamily="34" charset="0"/>
                 <a:ea typeface="Arial" pitchFamily="34" charset="-122"/>
                 <a:cs typeface="Arial" pitchFamily="34" charset="-120"/>
               </a:rPr>
               <a:t>IMPLEMENTACIÓN EN SQL SERVER</a:t>
             </a:r>
-            <a:endParaRPr lang="en-US" sz="1200" dirty="0"/>
+            <a:endParaRPr kumimoji="0" lang="en-US" sz="1200" b="0" i="0" u="none" strike="noStrike" kern="1200" cap="none" spc="0" normalizeH="0" baseline="0" noProof="0" dirty="0">
+              <a:ln>
+                <a:noFill/>
+              </a:ln>
+              <a:solidFill>
+                <a:srgbClr val="1B2A3A"/>
+              </a:solidFill>
+              <a:effectLst/>
+              <a:uLnTx/>
+              <a:uFillTx/>
+              <a:latin typeface="Arial"/>
+              <a:ea typeface="+mn-ea"/>
+              <a:cs typeface="+mn-cs"/>
+            </a:endParaRPr>
           </a:p>
         </p:txBody>
       </p:sp>
@@ -10155,24 +9362,54 @@
           </a:bodyPr>
           <a:lstStyle/>
           <a:p>
-            <a:pPr marL="0" indent="0" algn="l">
+            <a:pPr marL="0" marR="0" lvl="0" indent="0" algn="l" defTabSz="914400" rtl="0" eaLnBrk="1" fontAlgn="auto" latinLnBrk="0" hangingPunct="1">
               <a:lnSpc>
                 <a:spcPts val="1920"/>
               </a:lnSpc>
+              <a:spcBef>
+                <a:spcPts val="0"/>
+              </a:spcBef>
+              <a:spcAft>
+                <a:spcPts val="0"/>
+              </a:spcAft>
+              <a:buClrTx/>
+              <a:buSzTx/>
+              <a:buFontTx/>
               <a:buNone/>
-            </a:pPr>
-            <a:r>
-              <a:rPr lang="en-US" sz="1600" b="1" dirty="0">
+              <a:tabLst/>
+              <a:defRPr/>
+            </a:pPr>
+            <a:r>
+              <a:rPr kumimoji="0" lang="en-US" sz="1600" b="1" i="0" u="none" strike="noStrike" kern="1200" cap="none" spc="0" normalizeH="0" baseline="0" noProof="0" dirty="0">
+                <a:ln>
+                  <a:noFill/>
+                </a:ln>
                 <a:solidFill>
                   <a:srgbClr val="1B2A3A"/>
                 </a:solidFill>
+                <a:effectLst/>
+                <a:uLnTx/>
+                <a:uFillTx/>
                 <a:latin typeface="Arial" pitchFamily="34" charset="0"/>
                 <a:ea typeface="Arial" pitchFamily="34" charset="-122"/>
                 <a:cs typeface="Arial" pitchFamily="34" charset="-120"/>
               </a:rPr>
               <a:t>Base separada KentFoodsDW</a:t>
             </a:r>
-            <a:endParaRPr lang="en-US" sz="1600" dirty="0"/>
+            <a:endParaRPr kumimoji="0" lang="en-US" sz="1600" b="0" i="0" u="none" strike="noStrike" kern="1200" cap="none" spc="0" normalizeH="0" baseline="0" noProof="0" dirty="0">
+              <a:ln>
+                <a:noFill/>
+              </a:ln>
+              <a:solidFill>
+                <a:srgbClr val="1B2A3A"/>
+              </a:solidFill>
+              <a:effectLst/>
+              <a:uLnTx/>
+              <a:uFillTx/>
+              <a:latin typeface="Arial"/>
+              <a:ea typeface="+mn-ea"/>
+              <a:cs typeface="+mn-cs"/>
+            </a:endParaRPr>
           </a:p>
         </p:txBody>
       </p:sp>
@@ -10199,24 +9436,54 @@
           </a:bodyPr>
           <a:lstStyle/>
           <a:p>
-            <a:pPr marL="0" indent="0" algn="l">
+            <a:pPr marL="0" marR="0" lvl="0" indent="0" algn="l" defTabSz="914400" rtl="0" eaLnBrk="1" fontAlgn="auto" latinLnBrk="0" hangingPunct="1">
               <a:lnSpc>
                 <a:spcPts val="1820"/>
               </a:lnSpc>
+              <a:spcBef>
+                <a:spcPts val="0"/>
+              </a:spcBef>
+              <a:spcAft>
+                <a:spcPts val="0"/>
+              </a:spcAft>
+              <a:buClrTx/>
+              <a:buSzTx/>
+              <a:buFontTx/>
               <a:buNone/>
-            </a:pPr>
-            <a:r>
-              <a:rPr lang="en-US" sz="1300" dirty="0">
+              <a:tabLst/>
+              <a:defRPr/>
+            </a:pPr>
+            <a:r>
+              <a:rPr kumimoji="0" lang="en-US" sz="1300" b="0" i="0" u="none" strike="noStrike" kern="1200" cap="none" spc="0" normalizeH="0" baseline="0" noProof="0" dirty="0">
+                <a:ln>
+                  <a:noFill/>
+                </a:ln>
                 <a:solidFill>
                   <a:srgbClr val="3E4A57"/>
                 </a:solidFill>
+                <a:effectLst/>
+                <a:uLnTx/>
+                <a:uFillTx/>
                 <a:latin typeface="Arial" pitchFamily="34" charset="0"/>
                 <a:ea typeface="Arial" pitchFamily="34" charset="-122"/>
                 <a:cs typeface="Arial" pitchFamily="34" charset="-120"/>
               </a:rPr>
               <a:t>No se mezcla el entorno transaccional con el analítico. Se puede re-ejecutar desde cero.</a:t>
             </a:r>
-            <a:endParaRPr lang="en-US" sz="1300" dirty="0"/>
+            <a:endParaRPr kumimoji="0" lang="en-US" sz="1300" b="0" i="0" u="none" strike="noStrike" kern="1200" cap="none" spc="0" normalizeH="0" baseline="0" noProof="0" dirty="0">
+              <a:ln>
+                <a:noFill/>
+              </a:ln>
+              <a:solidFill>
+                <a:srgbClr val="1B2A3A"/>
+              </a:solidFill>
+              <a:effectLst/>
+              <a:uLnTx/>
+              <a:uFillTx/>
+              <a:latin typeface="Arial"/>
+              <a:ea typeface="+mn-ea"/>
+              <a:cs typeface="+mn-cs"/>
+            </a:endParaRPr>
           </a:p>
         </p:txBody>
       </p:sp>
@@ -10265,24 +9532,54 @@
           </a:bodyPr>
           <a:lstStyle/>
           <a:p>
-            <a:pPr marL="0" indent="0" algn="l">
+            <a:pPr marL="0" marR="0" lvl="0" indent="0" algn="l" defTabSz="914400" rtl="0" eaLnBrk="1" fontAlgn="auto" latinLnBrk="0" hangingPunct="1">
               <a:lnSpc>
                 <a:spcPts val="1920"/>
               </a:lnSpc>
+              <a:spcBef>
+                <a:spcPts val="0"/>
+              </a:spcBef>
+              <a:spcAft>
+                <a:spcPts val="0"/>
+              </a:spcAft>
+              <a:buClrTx/>
+              <a:buSzTx/>
+              <a:buFontTx/>
               <a:buNone/>
-            </a:pPr>
-            <a:r>
-              <a:rPr lang="en-US" sz="1600" b="1" dirty="0">
+              <a:tabLst/>
+              <a:defRPr/>
+            </a:pPr>
+            <a:r>
+              <a:rPr kumimoji="0" lang="en-US" sz="1600" b="1" i="0" u="none" strike="noStrike" kern="1200" cap="none" spc="0" normalizeH="0" baseline="0" noProof="0" dirty="0">
+                <a:ln>
+                  <a:noFill/>
+                </a:ln>
                 <a:solidFill>
                   <a:srgbClr val="1B2A3A"/>
                 </a:solidFill>
+                <a:effectLst/>
+                <a:uLnTx/>
+                <a:uFillTx/>
                 <a:latin typeface="Arial" pitchFamily="34" charset="0"/>
                 <a:ea typeface="Arial" pitchFamily="34" charset="-122"/>
                 <a:cs typeface="Arial" pitchFamily="34" charset="-120"/>
               </a:rPr>
               <a:t>Claves sustitutas</a:t>
             </a:r>
-            <a:endParaRPr lang="en-US" sz="1600" dirty="0"/>
+            <a:endParaRPr kumimoji="0" lang="en-US" sz="1600" b="0" i="0" u="none" strike="noStrike" kern="1200" cap="none" spc="0" normalizeH="0" baseline="0" noProof="0" dirty="0">
+              <a:ln>
+                <a:noFill/>
+              </a:ln>
+              <a:solidFill>
+                <a:srgbClr val="1B2A3A"/>
+              </a:solidFill>
+              <a:effectLst/>
+              <a:uLnTx/>
+              <a:uFillTx/>
+              <a:latin typeface="Arial"/>
+              <a:ea typeface="+mn-ea"/>
+              <a:cs typeface="+mn-cs"/>
+            </a:endParaRPr>
           </a:p>
         </p:txBody>
       </p:sp>
@@ -10309,24 +9606,54 @@
           </a:bodyPr>
           <a:lstStyle/>
           <a:p>
-            <a:pPr marL="0" indent="0" algn="l">
+            <a:pPr marL="0" marR="0" lvl="0" indent="0" algn="l" defTabSz="914400" rtl="0" eaLnBrk="1" fontAlgn="auto" latinLnBrk="0" hangingPunct="1">
               <a:lnSpc>
                 <a:spcPts val="1820"/>
               </a:lnSpc>
+              <a:spcBef>
+                <a:spcPts val="0"/>
+              </a:spcBef>
+              <a:spcAft>
+                <a:spcPts val="0"/>
+              </a:spcAft>
+              <a:buClrTx/>
+              <a:buSzTx/>
+              <a:buFontTx/>
               <a:buNone/>
-            </a:pPr>
-            <a:r>
-              <a:rPr lang="en-US" sz="1300" dirty="0">
+              <a:tabLst/>
+              <a:defRPr/>
+            </a:pPr>
+            <a:r>
+              <a:rPr kumimoji="0" lang="en-US" sz="1300" b="0" i="0" u="none" strike="noStrike" kern="1200" cap="none" spc="0" normalizeH="0" baseline="0" noProof="0" dirty="0">
+                <a:ln>
+                  <a:noFill/>
+                </a:ln>
                 <a:solidFill>
                   <a:srgbClr val="3E4A57"/>
                 </a:solidFill>
+                <a:effectLst/>
+                <a:uLnTx/>
+                <a:uFillTx/>
                 <a:latin typeface="Arial" pitchFamily="34" charset="0"/>
                 <a:ea typeface="Arial" pitchFamily="34" charset="-122"/>
                 <a:cs typeface="Arial" pitchFamily="34" charset="-120"/>
               </a:rPr>
               <a:t>INT IDENTITY en cada dimensión; la clave natural se guarda para los Lookup del ETL. SCD tipo 1.</a:t>
             </a:r>
-            <a:endParaRPr lang="en-US" sz="1300" dirty="0"/>
+            <a:endParaRPr kumimoji="0" lang="en-US" sz="1300" b="0" i="0" u="none" strike="noStrike" kern="1200" cap="none" spc="0" normalizeH="0" baseline="0" noProof="0" dirty="0">
+              <a:ln>
+                <a:noFill/>
+              </a:ln>
+              <a:solidFill>
+                <a:srgbClr val="1B2A3A"/>
+              </a:solidFill>
+              <a:effectLst/>
+              <a:uLnTx/>
+              <a:uFillTx/>
+              <a:latin typeface="Arial"/>
+              <a:ea typeface="+mn-ea"/>
+              <a:cs typeface="+mn-cs"/>
+            </a:endParaRPr>
           </a:p>
         </p:txBody>
       </p:sp>
@@ -10375,24 +9702,54 @@
           </a:bodyPr>
           <a:lstStyle/>
           <a:p>
-            <a:pPr marL="0" indent="0" algn="l">
+            <a:pPr marL="0" marR="0" lvl="0" indent="0" algn="l" defTabSz="914400" rtl="0" eaLnBrk="1" fontAlgn="auto" latinLnBrk="0" hangingPunct="1">
               <a:lnSpc>
                 <a:spcPts val="1920"/>
               </a:lnSpc>
+              <a:spcBef>
+                <a:spcPts val="0"/>
+              </a:spcBef>
+              <a:spcAft>
+                <a:spcPts val="0"/>
+              </a:spcAft>
+              <a:buClrTx/>
+              <a:buSzTx/>
+              <a:buFontTx/>
               <a:buNone/>
-            </a:pPr>
-            <a:r>
-              <a:rPr lang="en-US" sz="1600" b="1" dirty="0">
+              <a:tabLst/>
+              <a:defRPr/>
+            </a:pPr>
+            <a:r>
+              <a:rPr kumimoji="0" lang="en-US" sz="1600" b="1" i="0" u="none" strike="noStrike" kern="1200" cap="none" spc="0" normalizeH="0" baseline="0" noProof="0" dirty="0">
+                <a:ln>
+                  <a:noFill/>
+                </a:ln>
                 <a:solidFill>
                   <a:srgbClr val="1B2A3A"/>
                 </a:solidFill>
+                <a:effectLst/>
+                <a:uLnTx/>
+                <a:uFillTx/>
                 <a:latin typeface="Arial" pitchFamily="34" charset="0"/>
                 <a:ea typeface="Arial" pitchFamily="34" charset="-122"/>
                 <a:cs typeface="Arial" pitchFamily="34" charset="-120"/>
               </a:rPr>
               <a:t>PK = granularidad</a:t>
             </a:r>
-            <a:endParaRPr lang="en-US" sz="1600" dirty="0"/>
+            <a:endParaRPr kumimoji="0" lang="en-US" sz="1600" b="0" i="0" u="none" strike="noStrike" kern="1200" cap="none" spc="0" normalizeH="0" baseline="0" noProof="0" dirty="0">
+              <a:ln>
+                <a:noFill/>
+              </a:ln>
+              <a:solidFill>
+                <a:srgbClr val="1B2A3A"/>
+              </a:solidFill>
+              <a:effectLst/>
+              <a:uLnTx/>
+              <a:uFillTx/>
+              <a:latin typeface="Arial"/>
+              <a:ea typeface="+mn-ea"/>
+              <a:cs typeface="+mn-cs"/>
+            </a:endParaRPr>
           </a:p>
         </p:txBody>
       </p:sp>
@@ -10419,24 +9776,54 @@
           </a:bodyPr>
           <a:lstStyle/>
           <a:p>
-            <a:pPr marL="0" indent="0" algn="l">
+            <a:pPr marL="0" marR="0" lvl="0" indent="0" algn="l" defTabSz="914400" rtl="0" eaLnBrk="1" fontAlgn="auto" latinLnBrk="0" hangingPunct="1">
               <a:lnSpc>
                 <a:spcPts val="1820"/>
               </a:lnSpc>
+              <a:spcBef>
+                <a:spcPts val="0"/>
+              </a:spcBef>
+              <a:spcAft>
+                <a:spcPts val="0"/>
+              </a:spcAft>
+              <a:buClrTx/>
+              <a:buSzTx/>
+              <a:buFontTx/>
               <a:buNone/>
-            </a:pPr>
-            <a:r>
-              <a:rPr lang="en-US" sz="1300" dirty="0">
+              <a:tabLst/>
+              <a:defRPr/>
+            </a:pPr>
+            <a:r>
+              <a:rPr kumimoji="0" lang="en-US" sz="1300" b="0" i="0" u="none" strike="noStrike" kern="1200" cap="none" spc="0" normalizeH="0" baseline="0" noProof="0" dirty="0">
+                <a:ln>
+                  <a:noFill/>
+                </a:ln>
                 <a:solidFill>
                   <a:srgbClr val="3E4A57"/>
                 </a:solidFill>
+                <a:effectLst/>
+                <a:uLnTx/>
+                <a:uFillTx/>
                 <a:latin typeface="Arial" pitchFamily="34" charset="0"/>
                 <a:ea typeface="Arial" pitchFamily="34" charset="-122"/>
                 <a:cs typeface="Arial" pitchFamily="34" charset="-120"/>
               </a:rPr>
               <a:t>(OrdenID, ProductoKey) rechaza líneas duplicadas. 7 FK aseguran la integridad.</a:t>
             </a:r>
-            <a:endParaRPr lang="en-US" sz="1300" dirty="0"/>
+            <a:endParaRPr kumimoji="0" lang="en-US" sz="1300" b="0" i="0" u="none" strike="noStrike" kern="1200" cap="none" spc="0" normalizeH="0" baseline="0" noProof="0" dirty="0">
+              <a:ln>
+                <a:noFill/>
+              </a:ln>
+              <a:solidFill>
+                <a:srgbClr val="1B2A3A"/>
+              </a:solidFill>
+              <a:effectLst/>
+              <a:uLnTx/>
+              <a:uFillTx/>
+              <a:latin typeface="Arial"/>
+              <a:ea typeface="+mn-ea"/>
+              <a:cs typeface="+mn-cs"/>
+            </a:endParaRPr>
           </a:p>
         </p:txBody>
       </p:sp>
@@ -10485,24 +9872,54 @@
           </a:bodyPr>
           <a:lstStyle/>
           <a:p>
-            <a:pPr marL="0" indent="0" algn="l">
+            <a:pPr marL="0" marR="0" lvl="0" indent="0" algn="l" defTabSz="914400" rtl="0" eaLnBrk="1" fontAlgn="auto" latinLnBrk="0" hangingPunct="1">
               <a:lnSpc>
                 <a:spcPts val="1920"/>
               </a:lnSpc>
+              <a:spcBef>
+                <a:spcPts val="0"/>
+              </a:spcBef>
+              <a:spcAft>
+                <a:spcPts val="0"/>
+              </a:spcAft>
+              <a:buClrTx/>
+              <a:buSzTx/>
+              <a:buFontTx/>
               <a:buNone/>
-            </a:pPr>
-            <a:r>
-              <a:rPr lang="en-US" sz="1600" b="1" dirty="0">
+              <a:tabLst/>
+              <a:defRPr/>
+            </a:pPr>
+            <a:r>
+              <a:rPr kumimoji="0" lang="en-US" sz="1600" b="1" i="0" u="none" strike="noStrike" kern="1200" cap="none" spc="0" normalizeH="0" baseline="0" noProof="0" dirty="0">
+                <a:ln>
+                  <a:noFill/>
+                </a:ln>
                 <a:solidFill>
                   <a:srgbClr val="1B2A3A"/>
                 </a:solidFill>
+                <a:effectLst/>
+                <a:uLnTx/>
+                <a:uFillTx/>
                 <a:latin typeface="Arial" pitchFamily="34" charset="0"/>
                 <a:ea typeface="Arial" pitchFamily="34" charset="-122"/>
                 <a:cs typeface="Arial" pitchFamily="34" charset="-120"/>
               </a:rPr>
               <a:t>DimTiempo generada</a:t>
             </a:r>
-            <a:endParaRPr lang="en-US" sz="1600" dirty="0"/>
+            <a:endParaRPr kumimoji="0" lang="en-US" sz="1600" b="0" i="0" u="none" strike="noStrike" kern="1200" cap="none" spc="0" normalizeH="0" baseline="0" noProof="0" dirty="0">
+              <a:ln>
+                <a:noFill/>
+              </a:ln>
+              <a:solidFill>
+                <a:srgbClr val="1B2A3A"/>
+              </a:solidFill>
+              <a:effectLst/>
+              <a:uLnTx/>
+              <a:uFillTx/>
+              <a:latin typeface="Arial"/>
+              <a:ea typeface="+mn-ea"/>
+              <a:cs typeface="+mn-cs"/>
+            </a:endParaRPr>
           </a:p>
         </p:txBody>
       </p:sp>
@@ -10529,24 +9946,54 @@
           </a:bodyPr>
           <a:lstStyle/>
           <a:p>
-            <a:pPr marL="0" indent="0" algn="l">
+            <a:pPr marL="0" marR="0" lvl="0" indent="0" algn="l" defTabSz="914400" rtl="0" eaLnBrk="1" fontAlgn="auto" latinLnBrk="0" hangingPunct="1">
               <a:lnSpc>
                 <a:spcPts val="1820"/>
               </a:lnSpc>
+              <a:spcBef>
+                <a:spcPts val="0"/>
+              </a:spcBef>
+              <a:spcAft>
+                <a:spcPts val="0"/>
+              </a:spcAft>
+              <a:buClrTx/>
+              <a:buSzTx/>
+              <a:buFontTx/>
               <a:buNone/>
-            </a:pPr>
-            <a:r>
-              <a:rPr lang="en-US" sz="1300" dirty="0">
+              <a:tabLst/>
+              <a:defRPr/>
+            </a:pPr>
+            <a:r>
+              <a:rPr kumimoji="0" lang="en-US" sz="1300" b="0" i="0" u="none" strike="noStrike" kern="1200" cap="none" spc="0" normalizeH="0" baseline="0" noProof="0" dirty="0">
+                <a:ln>
+                  <a:noFill/>
+                </a:ln>
                 <a:solidFill>
                   <a:srgbClr val="3E4A57"/>
                 </a:solidFill>
+                <a:effectLst/>
+                <a:uLnTx/>
+                <a:uFillTx/>
                 <a:latin typeface="Arial" pitchFamily="34" charset="0"/>
                 <a:ea typeface="Arial" pitchFamily="34" charset="-122"/>
                 <a:cs typeface="Arial" pitchFamily="34" charset="-120"/>
               </a:rPr>
               <a:t>Clave AAAAMMDD, 2016–2018 más la fila −1. Nombres en español con CHOOSE.</a:t>
             </a:r>
-            <a:endParaRPr lang="en-US" sz="1300" dirty="0"/>
+            <a:endParaRPr kumimoji="0" lang="en-US" sz="1300" b="0" i="0" u="none" strike="noStrike" kern="1200" cap="none" spc="0" normalizeH="0" baseline="0" noProof="0" dirty="0">
+              <a:ln>
+                <a:noFill/>
+              </a:ln>
+              <a:solidFill>
+                <a:srgbClr val="1B2A3A"/>
+              </a:solidFill>
+              <a:effectLst/>
+              <a:uLnTx/>
+              <a:uFillTx/>
+              <a:latin typeface="Arial"/>
+              <a:ea typeface="+mn-ea"/>
+              <a:cs typeface="+mn-cs"/>
+            </a:endParaRPr>
           </a:p>
         </p:txBody>
       </p:sp>
@@ -10573,24 +10020,54 @@
           </a:bodyPr>
           <a:lstStyle/>
           <a:p>
-            <a:pPr marL="0" indent="0" algn="l">
+            <a:pPr marL="0" marR="0" lvl="0" indent="0" algn="l" defTabSz="914400" rtl="0" eaLnBrk="1" fontAlgn="auto" latinLnBrk="0" hangingPunct="1">
               <a:lnSpc>
                 <a:spcPts val="1680"/>
               </a:lnSpc>
+              <a:spcBef>
+                <a:spcPts val="0"/>
+              </a:spcBef>
+              <a:spcAft>
+                <a:spcPts val="0"/>
+              </a:spcAft>
+              <a:buClrTx/>
+              <a:buSzTx/>
+              <a:buFontTx/>
               <a:buNone/>
-            </a:pPr>
-            <a:r>
-              <a:rPr lang="en-US" sz="1200" dirty="0">
+              <a:tabLst/>
+              <a:defRPr/>
+            </a:pPr>
+            <a:r>
+              <a:rPr kumimoji="0" lang="en-US" sz="1200" b="0" i="0" u="none" strike="noStrike" kern="1200" cap="none" spc="0" normalizeH="0" baseline="0" noProof="0" dirty="0">
+                <a:ln>
+                  <a:noFill/>
+                </a:ln>
                 <a:solidFill>
                   <a:srgbClr val="7A8591"/>
                 </a:solidFill>
+                <a:effectLst/>
+                <a:uLnTx/>
+                <a:uFillTx/>
                 <a:latin typeface="Arial" pitchFamily="34" charset="0"/>
                 <a:ea typeface="Arial" pitchFamily="34" charset="-122"/>
                 <a:cs typeface="Arial" pitchFamily="34" charset="-120"/>
               </a:rPr>
               <a:t>9</a:t>
             </a:r>
-            <a:endParaRPr lang="en-US" sz="1200" dirty="0"/>
+            <a:endParaRPr kumimoji="0" lang="en-US" sz="1200" b="0" i="0" u="none" strike="noStrike" kern="1200" cap="none" spc="0" normalizeH="0" baseline="0" noProof="0" dirty="0">
+              <a:ln>
+                <a:noFill/>
+              </a:ln>
+              <a:solidFill>
+                <a:srgbClr val="1B2A3A"/>
+              </a:solidFill>
+              <a:effectLst/>
+              <a:uLnTx/>
+              <a:uFillTx/>
+              <a:latin typeface="Arial"/>
+              <a:ea typeface="+mn-ea"/>
+              <a:cs typeface="+mn-cs"/>
+            </a:endParaRPr>
           </a:p>
         </p:txBody>
       </p:sp>
